--- a/fitness_ai_agents_presentation.pptx
+++ b/fitness_ai_agents_presentation.pptx
@@ -509,24 +509,31 @@
           <a:lstStyle/>
           <a:p>
             <a:r>
-              <a:t>[~45 seconds]</a:t>
-            </a:r>
-          </a:p>
-          <a:p>
-            <a:r>
-              <a:t>Welcome — this is Fitness AI Agents, a multi-source health-data platform I built for Hack America.</a:t>
+              <a:t>SLIDE 1 — TITLE  [~30 seconds]</a:t>
             </a:r>
           </a:p>
           <a:p/>
           <a:p>
             <a:r>
-              <a:t>The core premise: most people own at least one fitness device or app, but the insights trapped inside are hard to access, harder to interpret, and completely siloed. This project unlocks all of that with AI.</a:t>
+              <a:t>Say exactly this to open:</a:t>
             </a:r>
           </a:p>
           <a:p/>
           <a:p>
             <a:r>
-              <a:t>I'll walk you through the problem, the solution, how it works under the hood, the impact, and a quick look at the live demo. Total run time is about seven and a half minutes.</a:t>
+              <a:t>"This is Fitness AI Agents — a platform I built to solve one problem: you're already generating a huge amount of health data every day, but almost none of it is actually being used to help you train smarter.</a:t>
+            </a:r>
+          </a:p>
+          <a:p/>
+          <a:p>
+            <a:r>
+              <a:t>I'll walk you through why this matters, what I built, how it works, and why it's genuinely different. We're at about seven and a half minutes total."</a:t>
+            </a:r>
+          </a:p>
+          <a:p/>
+          <a:p>
+            <a:r>
+              <a:t>Then advance.</a:t>
             </a:r>
           </a:p>
         </p:txBody>
@@ -596,36 +603,49 @@
           <a:lstStyle/>
           <a:p>
             <a:r>
-              <a:t>[~60 seconds]</a:t>
-            </a:r>
-          </a:p>
-          <a:p>
-            <a:r>
-              <a:t>The average person owns 1-2 fitness devices and uses 2-3 fitness apps. But here's the problem:</a:t>
+              <a:t>SLIDE 2 — THE PROBLEM  [~60 seconds]</a:t>
             </a:r>
           </a:p>
           <a:p/>
           <a:p>
             <a:r>
-              <a:t>Each of those platforms holds a slice of your health story — your Apple Watch has sleep, Strava has runs, Garmin has heart rate — but none of them talk to each other.</a:t>
+              <a:t>This slide addresses the IMPACT criterion — judges need to see that you're solving a real, big problem.</a:t>
             </a:r>
           </a:p>
           <a:p/>
           <a:p>
             <a:r>
-              <a:t>And even when you can see your data, the numbers are meaningless without context. What does a resting HR of 58 bpm mean for YOUR training right now? Is a 7-hour sleep score good or bad given yesterday's workout?</a:t>
+              <a:t>"Let's start with the problem.</a:t>
             </a:r>
           </a:p>
           <a:p/>
           <a:p>
             <a:r>
-              <a:t>Hiring a sports scientist or personal coach to answer those questions costs hundreds of dollars a month. That puts evidence-based training advice out of reach for most people.</a:t>
+              <a:t>There are over a billion people walking around with wearables — smartwatches, Fitbits, Garmins, phones in their pockets. They're generating heart rate, sleep, GPS, step data every single day.</a:t>
             </a:r>
           </a:p>
           <a:p/>
           <a:p>
             <a:r>
-              <a:t>The result: billions of data points collected, and almost none of it acted on.</a:t>
+              <a:t>But that data is completely fragmented. Your Apple Watch knows your sleep. Strava knows your runs. Your Garmin knows your heart rate zones. None of them know about each other.</a:t>
+            </a:r>
+          </a:p>
+          <a:p/>
+          <a:p>
+            <a:r>
+              <a:t>Even when you CAN see your data, you can't interpret it. What does a resting heart rate of 58 mean? Is that good? Is it trending the wrong way? Does it matter that you slept 6 hours last night? You don't know — and the apps won't tell you.</a:t>
+            </a:r>
+          </a:p>
+          <a:p/>
+          <a:p>
+            <a:r>
+              <a:t>The people who actually know the answers — sports scientists, personal coaches — charge $150 to $300 a month. That puts real training intelligence completely out of reach for most people.</a:t>
+            </a:r>
+          </a:p>
+          <a:p/>
+          <a:p>
+            <a:r>
+              <a:t>Billions of data points. Almost none of it acted on." </a:t>
             </a:r>
           </a:p>
         </p:txBody>
@@ -695,30 +715,43 @@
           <a:lstStyle/>
           <a:p>
             <a:r>
-              <a:t>[~60 seconds]</a:t>
-            </a:r>
-          </a:p>
-          <a:p>
-            <a:r>
-              <a:t>The solution is Fitness AI Agents — a three-step experience:</a:t>
+              <a:t>SLIDE 3 — THE SOLUTION  [~50 seconds]</a:t>
             </a:r>
           </a:p>
           <a:p/>
           <a:p>
             <a:r>
-              <a:t>First, CONNECT. You bring your data from any source. Strava and Fitbit sync via OAuth. Apple Health, Garmin, COROS, Wahoo, Suunto, Polar — any of those — just drop in a .fit, .tcx, or .gpx file. No special hardware required.</a:t>
+              <a:t>This answers the PRESENTATION criterion — "what challenge it addresses and how it delivers a solution."</a:t>
             </a:r>
           </a:p>
           <a:p/>
           <a:p>
             <a:r>
-              <a:t>Second, ANALYZE. An 8-agent AI pipeline processes that data like a team of domain experts: a data cleaner, a prompt engineer, a data analyst, a sports scientist, a trend analyzer, a formatter, and a QA critic — all working in sequence to produce verified, evidence-based insights.</a:t>
+              <a:t>"The solution is three steps.</a:t>
             </a:r>
           </a:p>
           <a:p/>
           <a:p>
             <a:r>
-              <a:t>Third, ACT. A personalized weekly coach plan, a daily Readiness score that rivals what Oura and Whoop charge subscriptions for, proactive health alerts, and a conversational chat grounded in YOUR data.</a:t>
+              <a:t>First: Connect. You bring your data from wherever it lives — Strava or Fitbit sync over OAuth, Apple Health and Garmin export as files, you can drop in any .fit, .tcx, or .gpx from any device — COROS, Wahoo, Polar, Suunto, Peloton, Zwift. Or just log manually. Thirteen sources supported at launch. Zero new hardware required.</a:t>
+            </a:r>
+          </a:p>
+          <a:p/>
+          <a:p>
+            <a:r>
+              <a:t>Second: Analyze. The data goes through an 8-agent AI pipeline — I'll show you the architecture in a moment. It reasons like a domain expert: data cleaning, trend detection, exercise physiology interpretation, and a final QA pass for accuracy.</a:t>
+            </a:r>
+          </a:p>
+          <a:p/>
+          <a:p>
+            <a:r>
+              <a:t>Third: Act. You get a personalized weekly training plan, a daily readiness score, proactive alerts when something looks wrong, and a chat interface where you can ask anything in plain English and get an answer grounded in YOUR actual data.</a:t>
+            </a:r>
+          </a:p>
+          <a:p/>
+          <a:p>
+            <a:r>
+              <a:t>That's the full loop — from raw sensor data to a decision you can act on today." </a:t>
             </a:r>
           </a:p>
         </p:txBody>
@@ -788,42 +821,43 @@
           <a:lstStyle/>
           <a:p>
             <a:r>
-              <a:t>[~75 seconds]</a:t>
-            </a:r>
-          </a:p>
-          <a:p>
-            <a:r>
-              <a:t>Let me walk through the five things this platform can do.</a:t>
+              <a:t>SLIDE 4 — CREATIVITY  [~75 seconds]</a:t>
             </a:r>
           </a:p>
           <a:p/>
           <a:p>
             <a:r>
-              <a:t>AI Analysis — the signature feature. An 8-agent CrewAI pipeline reads your raw data and produces structured outputs: metrics cards, charts, trend reports, training-load comparisons. Every run is scored by a QA critic agent for physiological accuracy.</a:t>
+              <a:t>This is your direct answer to the CREATIVITY criterion. Be confident here.</a:t>
             </a:r>
           </a:p>
           <a:p/>
           <a:p>
             <a:r>
-              <a:t>AI Coach — you set a goal, the platform generates a weekly training plan, then tracks your actual workouts against it. If you fall behind or overtrain, it adapts.</a:t>
+              <a:t>"Let me be specific about what's new here, because I want the judges to see that this isn't a thin wrapper on an API.</a:t>
             </a:r>
           </a:p>
           <a:p/>
           <a:p>
             <a:r>
-              <a:t>Readiness Score — this is the Whoop or Oura 'Recovery' feature, built from scratch using sports-science formulas: heart-rate variability trend, resting HR, sleep quality, and acute-to-chronic training load ratio. Completely free, from any data source.</a:t>
+              <a:t>First — the multi-agent pipeline. I didn't just call GPT and ask it to analyze my health data. I built a crew of eight specialized agents, each with a defined job. The Data Cleaner knows that heart rate values below 30 or above 250 bpm are invalid. The Sports Scientist knows what an acute-to-chronic training load ratio means. The QA Critic scores every output on domain accuracy and flags physiological errors. The pipeline runs sequentially, each agent passing context to the next.</a:t>
             </a:r>
           </a:p>
           <a:p/>
           <a:p>
             <a:r>
-              <a:t>Health Watchdog — deterministic alerts. No AI calls needed. If your resting HR is trending up over 5 days, or HRV is dropping, you get flagged — before you notice it yourself.</a:t>
+              <a:t>Second — the Readiness Score. Whoop charges $30 a month. Oura charges $18 a month. Both of them sell a 'recovery score' that tells you if you're ready to train. I built the same thing — HRV trend, resting HR baseline, sleep quality, training load ratio — deterministically, using sports science formulas, at zero cost, from any data source.</a:t>
             </a:r>
           </a:p>
           <a:p/>
           <a:p>
             <a:r>
-              <a:t>Chat — ask 'how did I sleep this month?' or 'should I run tomorrow?' in plain language. The LLM is grounded in a server-built summary of your actual data so answers aren't hallucinated.</a:t>
+              <a:t>Third — universal import. Every major platform locks you in. This platform doesn't care what you use. Drop in a .gpx from Wahoo or a .fit from COROS — it parses it, tags the source, and the AI is aware of which device produced which data.</a:t>
+            </a:r>
+          </a:p>
+          <a:p/>
+          <a:p>
+            <a:r>
+              <a:t>Fourth — the architecture is split intelligently. The heavy 8-agent pipeline runs in a HuggingFace Space so it has the compute it needs. The lighter features — Coach, Chat, Readiness — run on an always-on free Vercel backend via a custom multi-model failover router I wrote, with a per-user rate limit so one account can't drain the shared model pool." </a:t>
             </a:r>
           </a:p>
         </p:txBody>
@@ -893,24 +927,49 @@
           <a:lstStyle/>
           <a:p>
             <a:r>
-              <a:t>[~75 seconds]</a:t>
-            </a:r>
-          </a:p>
-          <a:p>
-            <a:r>
-              <a:t>Under the hood, the AI pipeline runs eight agents in sequence, each passing its output as context to the next.</a:t>
+              <a:t>SLIDE 5 — FIVE FEATURES  [~75 seconds]</a:t>
             </a:r>
           </a:p>
           <a:p/>
           <a:p>
             <a:r>
-              <a:t>Agent 1 is the Context Agent — it reads your question and maps it to the right metrics and data sources. Agent 2 is the Data Cleaner — it flags bad values like HR readings outside 30–250 bpm. Agent 3 writes the analysis plan. Agent 4, the Data Analyst, actually runs the numbers. Agent 5 is a Sports Scientist that interprets findings through exercise physiology. Agent 6 detects time-series patterns. Agent 7 formats everything into structured JSON. Agent 8 is a QA Critic that scores the output for accuracy.</a:t>
+              <a:t>This answers the PRESENTATION criterion — "how it delivers a solution." Walk through each feature concretely.</a:t>
             </a:r>
           </a:p>
           <a:p/>
           <a:p>
             <a:r>
-              <a:t>The tech stack: React 19 frontend on Vercel. FastAPI backend also on Vercel — always on, always free. Supabase Postgres with row-level security — the anon key returns zero rows. The heavy CrewAI pipeline runs in a dedicated HuggingFace Space. The lighter features — Coach, Chat, Readiness — use single LLM calls through a multi-model failover router I wrote, with a 200-calls-per-user-per-day guardrail.</a:t>
+              <a:t>"Here are the five things the platform can do.</a:t>
+            </a:r>
+          </a:p>
+          <a:p/>
+          <a:p>
+            <a:r>
+              <a:t>AI Analysis. You hit Analyze, and the 8-agent pipeline processes your data. You get structured outputs — metric cards showing your weekly averages, line charts of HR trends over time, a comparison of your Strava runs versus Garmin workouts, a heatmap of which days and times your training load is highest. Every result is scored out of 10 by the QA agent for physiological accuracy.</a:t>
+            </a:r>
+          </a:p>
+          <a:p/>
+          <a:p>
+            <a:r>
+              <a:t>AI Coach. You tell it your goal — say, 'run a 5K in under 25 minutes in 8 weeks.' It generates a week-by-week training plan. As your real workouts come in, the plan updates. Overtrain one week, it backs off the next. Miss a session, it rebalances.</a:t>
+            </a:r>
+          </a:p>
+          <a:p/>
+          <a:p>
+            <a:r>
+              <a:t>Readiness Score. Every morning you get a score out of 100. It's calculated from four things: your HRV trend over the last 7 days, your resting HR versus baseline, last night's sleep, and your acute-to-chronic training load ratio. This is the exact same science Oura and Whoop sell subscriptions for.</a:t>
+            </a:r>
+          </a:p>
+          <a:p/>
+          <a:p>
+            <a:r>
+              <a:t>Health Watchdog. No AI calls at all — pure deterministic logic. If your resting heart rate has been climbing for 5 straight days, or your HRV dropped more than 10% this week, you get a proactive alert. You don't have to ask. It tells you.</a:t>
+            </a:r>
+          </a:p>
+          <a:p/>
+          <a:p>
+            <a:r>
+              <a:t>Chat. Ask 'how has my sleep been affecting my runs?' or 'should I take a rest day tomorrow?' in plain English. The answer is grounded in a server-built summary of your actual data — not generated from scratch — so it can't hallucinate." </a:t>
             </a:r>
           </a:p>
         </p:txBody>
@@ -980,36 +1039,31 @@
           <a:lstStyle/>
           <a:p>
             <a:r>
-              <a:t>[~60 seconds]</a:t>
-            </a:r>
-          </a:p>
-          <a:p>
-            <a:r>
-              <a:t>Who does this help and how much?</a:t>
+              <a:t>SLIDE 6 — ARCHITECTURE  [~60 seconds]</a:t>
             </a:r>
           </a:p>
           <a:p/>
           <a:p>
             <a:r>
-              <a:t>Over a billion people own a wearable today — smartwatches, fitness bands, phones with step counters. Nearly all of that data goes under-analyzed. This platform is designed to serve anyone in that group.</a:t>
+              <a:t>This shows technical depth — relevant to both CREATIVITY and PRESENTATION.</a:t>
             </a:r>
           </a:p>
           <a:p/>
           <a:p>
             <a:r>
-              <a:t>A personal trainer costs $150 to $300 a month. Oura and Whoop charge $15–18 a month just for a recovery score. This platform delivers both — and more — at zero cost.</a:t>
+              <a:t>"Let me show you how the pipeline actually works.</a:t>
             </a:r>
           </a:p>
           <a:p/>
           <a:p>
             <a:r>
-              <a:t>At launch it supports 13+ import sources. You don't need to buy anything new. If you have an iPhone, a Garmin, or a Fitbit collecting dust, you can get started today.</a:t>
+              <a:t>Eight agents run in sequence. Agent 1, the Context Agent, reads your question and identifies which metrics and data sources are relevant. Agent 2, the Data Cleaner, validates every row — it knows that a heart rate below 30 or above 250 is invalid, that steps over 100,000 a day is noise. Agent 3 writes the analysis plan. Agent 4, the Data Analyst, executes it — computing weekly trends, HR zone distributions, multi-source comparisons. Agent 5 is the Sports Scientist — it interprets findings through exercise physiology, calculates your training load using TRIMP, assesses overtraining risk. Agent 6 detects time-based patterns — plateau, progressive overload, fatigue accumulation curves. Agent 7 formats everything into structured JSON. Agent 8, the QA Critic, scores the whole output on domain accuracy, specificity, and evidence quality.</a:t>
             </a:r>
           </a:p>
           <a:p/>
           <a:p>
             <a:r>
-              <a:t>And critically — this isn't a mockup or a demo. It's live at fitness-ai-agents.vercel.app right now. You can sign up, load 31 days of sample data, and see the full AI analysis in under two minutes.</a:t>
+              <a:t>For the stack: the frontend is React 19 on Vercel. The backend is FastAPI, also on Vercel — it's always-on, free tier, no cold starts. Database is Supabase Postgres with row-level security turned on for every table — the anonymous key returns zero rows, period. The heavy pipeline runs in a HuggingFace Space. The lighter AI features use a custom failover router I wrote that cycles across free Groq and OpenRouter models and enforces a 200-call-per-user-per-day limit." </a:t>
             </a:r>
           </a:p>
         </p:txBody>
@@ -1079,36 +1133,43 @@
           <a:lstStyle/>
           <a:p>
             <a:r>
-              <a:t>[~50 seconds]</a:t>
-            </a:r>
-          </a:p>
-          <a:p>
-            <a:r>
-              <a:t>Everything I just described is live.</a:t>
+              <a:t>SLIDE 7 — IMPACT  [~60 seconds]</a:t>
             </a:r>
           </a:p>
           <a:p/>
           <a:p>
             <a:r>
-              <a:t>You can open fitness-ai-agents.vercel.app right now. Click /demo — no account needed — and you'll see a fully populated dashboard with charts, heatmaps, training metrics, and AI analysis results for a synthetic 31-day dataset.</a:t>
+              <a:t>This is your direct answer to the IMPACT judging criterion. Make it land.</a:t>
             </a:r>
           </a:p>
           <a:p/>
           <a:p>
             <a:r>
-              <a:t>If you want to run the agent pipeline yourself, the HuggingFace Gradio demo is linked on the landing page — drop in any CSV with columns like heart_rate, steps, sleep_hours, and hrv, and watch all 8 agents run in sequence.</a:t>
+              <a:t>"So — how big is the impact?</a:t>
             </a:r>
           </a:p>
           <a:p/>
           <a:p>
             <a:r>
-              <a:t>The backend API is at backend-seven-topaz-23.vercel.app — always-on on Vercel's free tier. You can hit /health right now and get a 200.</a:t>
+              <a:t>One billion people own wearables. The vast majority of them are walking around with a goldmine of health data that is doing absolutely nothing for them. This platform is designed for exactly that person.</a:t>
             </a:r>
           </a:p>
           <a:p/>
           <a:p>
             <a:r>
-              <a:t>On the mobile side: the Android native tracker is scaffolded in Kotlin — it runs a foreground service for background steps and GPS, pairs to the user's account via a device token that's stored as a SHA-256 hash, so a database leak can't forge uploads. The PWA is installable today on any phone; the signed APK ships post-hackathon.</a:t>
+              <a:t>The cost: zero. Whoop is $30 a month. Oura is $18 a month. A personal trainer is $150 to $300 a month. This platform delivers a Readiness Score, a coach, health alerts, trend analysis, and a conversational interface — all for free. The only cost is the server, and it runs on Vercel and HuggingFace's free tiers.</a:t>
+            </a:r>
+          </a:p>
+          <a:p/>
+          <a:p>
+            <a:r>
+              <a:t>Thirteen-plus import sources means almost no one is excluded. If you've ever used a fitness app or worn a tracker in the last five years, you can import your data today.</a:t>
+            </a:r>
+          </a:p>
+          <a:p/>
+          <a:p>
+            <a:r>
+              <a:t>And this is not a prototype — it's live, right now. You can go to fitness-ai-agents.vercel.app, click 'Load Sample Data', and see the full dashboard with charts, heatmaps, AI analysis results, and a readiness score populated in about 90 seconds." </a:t>
             </a:r>
           </a:p>
         </p:txBody>
@@ -1178,30 +1239,37 @@
           <a:lstStyle/>
           <a:p>
             <a:r>
-              <a:t>[~30 seconds]</a:t>
-            </a:r>
-          </a:p>
-          <a:p>
-            <a:r>
-              <a:t>To wrap up:</a:t>
+              <a:t>SLIDE 8 — CLOSING  [~30 seconds]</a:t>
             </a:r>
           </a:p>
           <a:p/>
           <a:p>
             <a:r>
-              <a:t>Fitness AI Agents takes the data you're already generating, connects it from any source without new hardware, and puts a team of AI sports scientists in your pocket — for free.</a:t>
+              <a:t>End clean and confident.</a:t>
             </a:r>
           </a:p>
           <a:p/>
           <a:p>
             <a:r>
-              <a:t>It's live today. You can try it right now. The full source is on GitHub.</a:t>
+              <a:t>"To wrap up — Fitness AI Agents takes the data you're already generating, breaks it out of its silos, and puts a team of AI sports scientists in your pocket. For free. No new hardware. Works with what you already have.</a:t>
             </a:r>
           </a:p>
           <a:p/>
           <a:p>
             <a:r>
-              <a:t>I'm happy to take any questions — about the architecture, the agent pipeline, the security model, or anything else.</a:t>
+              <a:t>It is live right now. You can try it in the next five minutes.</a:t>
+            </a:r>
+          </a:p>
+          <a:p/>
+          <a:p>
+            <a:r>
+              <a:t>I'm happy to answer questions about the architecture, the agent pipeline, the security model, or anything else."</a:t>
+            </a:r>
+          </a:p>
+          <a:p/>
+          <a:p>
+            <a:r>
+              <a:t>Then stop. Let them ask.</a:t>
             </a:r>
           </a:p>
         </p:txBody>
@@ -4203,7 +4271,7 @@
     <p:bg>
       <p:bgPr>
         <a:solidFill>
-          <a:srgbClr val="0D1B2A"/>
+          <a:srgbClr val="0A1422"/>
         </a:solidFill>
         <a:effectLst/>
       </p:bgPr>
@@ -4224,7 +4292,7 @@
         <p:spPr>
           <a:xfrm>
             <a:off x="0" y="0"/>
-            <a:ext cx="73152" cy="6858000"/>
+            <a:ext cx="64008" cy="6858000"/>
           </a:xfrm>
           <a:prstGeom prst="rect">
             <a:avLst/>
@@ -4266,14 +4334,14 @@
         </p:nvSpPr>
         <p:spPr>
           <a:xfrm>
-            <a:off x="7772400" y="914400"/>
-            <a:ext cx="4114800" cy="5029200"/>
+            <a:off x="7132320" y="0"/>
+            <a:ext cx="5056632" cy="6858000"/>
           </a:xfrm>
           <a:prstGeom prst="rect">
             <a:avLst/>
           </a:prstGeom>
           <a:solidFill>
-            <a:srgbClr val="14263A"/>
+            <a:srgbClr val="122235"/>
           </a:solidFill>
           <a:ln>
             <a:noFill/>
@@ -4303,14 +4371,57 @@
       </p:sp>
       <p:sp>
         <p:nvSpPr>
-          <p:cNvPr id="4" name="TextBox 3"/>
+          <p:cNvPr id="4" name="Rectangle 3"/>
+          <p:cNvSpPr/>
+          <p:nvPr/>
+        </p:nvSpPr>
+        <p:spPr>
+          <a:xfrm>
+            <a:off x="7132320" y="0"/>
+            <a:ext cx="50292" cy="6858000"/>
+          </a:xfrm>
+          <a:prstGeom prst="rect">
+            <a:avLst/>
+          </a:prstGeom>
+          <a:solidFill>
+            <a:srgbClr val="00B4D8"/>
+          </a:solidFill>
+          <a:ln>
+            <a:noFill/>
+          </a:ln>
+        </p:spPr>
+        <p:style>
+          <a:lnRef idx="1">
+            <a:schemeClr val="accent1"/>
+          </a:lnRef>
+          <a:fillRef idx="3">
+            <a:schemeClr val="accent1"/>
+          </a:fillRef>
+          <a:effectRef idx="2">
+            <a:schemeClr val="accent1"/>
+          </a:effectRef>
+          <a:fontRef idx="minor">
+            <a:schemeClr val="lt1"/>
+          </a:fontRef>
+        </p:style>
+        <p:txBody>
+          <a:bodyPr rtlCol="0" anchor="ctr"/>
+          <a:lstStyle/>
+          <a:p>
+            <a:pPr algn="ctr"/>
+          </a:p>
+        </p:txBody>
+      </p:sp>
+      <p:sp>
+        <p:nvSpPr>
+          <p:cNvPr id="5" name="TextBox 4"/>
           <p:cNvSpPr txBox="1"/>
           <p:nvPr/>
         </p:nvSpPr>
         <p:spPr>
           <a:xfrm>
-            <a:off x="457200" y="1463040"/>
-            <a:ext cx="7315200" cy="1188720"/>
+            <a:off x="411480" y="1371600"/>
+            <a:ext cx="6400800" cy="1371600"/>
           </a:xfrm>
           <a:prstGeom prst="rect">
             <a:avLst/>
@@ -4338,14 +4449,14 @@
       </p:sp>
       <p:sp>
         <p:nvSpPr>
-          <p:cNvPr id="5" name="Rectangle 4"/>
+          <p:cNvPr id="6" name="Rectangle 5"/>
           <p:cNvSpPr/>
           <p:nvPr/>
         </p:nvSpPr>
         <p:spPr>
           <a:xfrm>
-            <a:off x="457200" y="2788920"/>
-            <a:ext cx="2286000" cy="45720"/>
+            <a:off x="411480" y="2926080"/>
+            <a:ext cx="2743200" cy="50292"/>
           </a:xfrm>
           <a:prstGeom prst="rect">
             <a:avLst/>
@@ -4381,14 +4492,14 @@
       </p:sp>
       <p:sp>
         <p:nvSpPr>
-          <p:cNvPr id="6" name="TextBox 5"/>
+          <p:cNvPr id="7" name="TextBox 6"/>
           <p:cNvSpPr txBox="1"/>
           <p:nvPr/>
         </p:nvSpPr>
         <p:spPr>
           <a:xfrm>
-            <a:off x="457200" y="2971800"/>
-            <a:ext cx="7315200" cy="640080"/>
+            <a:off x="411480" y="3063240"/>
+            <a:ext cx="6400800" cy="1097280"/>
           </a:xfrm>
           <a:prstGeom prst="rect">
             <a:avLst/>
@@ -4409,21 +4520,22 @@
                 </a:solidFill>
                 <a:latin typeface="Calibri"/>
               </a:rPr>
-              <a:t>Your health data. Any device. AI-powered clarity.</a:t>
-            </a:r>
-          </a:p>
-        </p:txBody>
-      </p:sp>
-      <p:sp>
-        <p:nvSpPr>
-          <p:cNvPr id="7" name="TextBox 6"/>
+              <a:t>Your health data. Any device.
+AI-powered sports-science insights.</a:t>
+            </a:r>
+          </a:p>
+        </p:txBody>
+      </p:sp>
+      <p:sp>
+        <p:nvSpPr>
+          <p:cNvPr id="8" name="TextBox 7"/>
           <p:cNvSpPr txBox="1"/>
           <p:nvPr/>
         </p:nvSpPr>
         <p:spPr>
           <a:xfrm>
-            <a:off x="457200" y="5943600"/>
-            <a:ext cx="5486400" cy="457200"/>
+            <a:off x="411480" y="6035040"/>
+            <a:ext cx="4572000" cy="457200"/>
           </a:xfrm>
           <a:prstGeom prst="rect">
             <a:avLst/>
@@ -4438,9 +4550,9 @@
           <a:p>
             <a:pPr algn="l"/>
             <a:r>
-              <a:rPr sz="1600" b="0" i="0">
+              <a:rPr sz="1500" b="0" i="0">
                 <a:solidFill>
-                  <a:srgbClr val="6088A8"/>
+                  <a:srgbClr val="557A9A"/>
                 </a:solidFill>
                 <a:latin typeface="Calibri"/>
               </a:rPr>
@@ -4451,20 +4563,20 @@
       </p:sp>
       <p:sp>
         <p:nvSpPr>
-          <p:cNvPr id="8" name="Rectangle 7"/>
+          <p:cNvPr id="9" name="Rectangle 8"/>
           <p:cNvSpPr/>
           <p:nvPr/>
         </p:nvSpPr>
         <p:spPr>
           <a:xfrm>
-            <a:off x="8229600" y="1737360"/>
-            <a:ext cx="3017520" cy="1005840"/>
+            <a:off x="7406640" y="1188720"/>
+            <a:ext cx="4480560" cy="1325880"/>
           </a:xfrm>
           <a:prstGeom prst="rect">
             <a:avLst/>
           </a:prstGeom>
           <a:solidFill>
-            <a:srgbClr val="0D1B2A"/>
+            <a:srgbClr val="0A1422"/>
           </a:solidFill>
           <a:ln>
             <a:noFill/>
@@ -4494,14 +4606,57 @@
       </p:sp>
       <p:sp>
         <p:nvSpPr>
-          <p:cNvPr id="9" name="TextBox 8"/>
+          <p:cNvPr id="10" name="Rectangle 9"/>
+          <p:cNvSpPr/>
+          <p:nvPr/>
+        </p:nvSpPr>
+        <p:spPr>
+          <a:xfrm>
+            <a:off x="7406640" y="1188720"/>
+            <a:ext cx="4480560" cy="59436"/>
+          </a:xfrm>
+          <a:prstGeom prst="rect">
+            <a:avLst/>
+          </a:prstGeom>
+          <a:solidFill>
+            <a:srgbClr val="00B4D8"/>
+          </a:solidFill>
+          <a:ln>
+            <a:noFill/>
+          </a:ln>
+        </p:spPr>
+        <p:style>
+          <a:lnRef idx="1">
+            <a:schemeClr val="accent1"/>
+          </a:lnRef>
+          <a:fillRef idx="3">
+            <a:schemeClr val="accent1"/>
+          </a:fillRef>
+          <a:effectRef idx="2">
+            <a:schemeClr val="accent1"/>
+          </a:effectRef>
+          <a:fontRef idx="minor">
+            <a:schemeClr val="lt1"/>
+          </a:fontRef>
+        </p:style>
+        <p:txBody>
+          <a:bodyPr rtlCol="0" anchor="ctr"/>
+          <a:lstStyle/>
+          <a:p>
+            <a:pPr algn="ctr"/>
+          </a:p>
+        </p:txBody>
+      </p:sp>
+      <p:sp>
+        <p:nvSpPr>
+          <p:cNvPr id="11" name="TextBox 10"/>
           <p:cNvSpPr txBox="1"/>
           <p:nvPr/>
         </p:nvSpPr>
         <p:spPr>
           <a:xfrm>
-            <a:off x="8321040" y="1920240"/>
-            <a:ext cx="365760" cy="548640"/>
+            <a:off x="7589520" y="1325880"/>
+            <a:ext cx="4114800" cy="502920"/>
           </a:xfrm>
           <a:prstGeom prst="rect">
             <a:avLst/>
@@ -4516,42 +4671,7 @@
           <a:p>
             <a:pPr algn="l"/>
             <a:r>
-              <a:rPr sz="2200" b="0" i="0">
-                <a:solidFill>
-                  <a:srgbClr val="00B4D8"/>
-                </a:solidFill>
-                <a:latin typeface="Calibri"/>
-              </a:rPr>
-              <a:t>●</a:t>
-            </a:r>
-          </a:p>
-        </p:txBody>
-      </p:sp>
-      <p:sp>
-        <p:nvSpPr>
-          <p:cNvPr id="10" name="TextBox 9"/>
-          <p:cNvSpPr txBox="1"/>
-          <p:nvPr/>
-        </p:nvSpPr>
-        <p:spPr>
-          <a:xfrm>
-            <a:off x="8732520" y="1938528"/>
-            <a:ext cx="2377440" cy="502920"/>
-          </a:xfrm>
-          <a:prstGeom prst="rect">
-            <a:avLst/>
-          </a:prstGeom>
-          <a:noFill/>
-        </p:spPr>
-        <p:txBody>
-          <a:bodyPr wrap="square">
-            <a:spAutoFit/>
-          </a:bodyPr>
-          <a:lstStyle/>
-          <a:p>
-            <a:pPr algn="l"/>
-            <a:r>
-              <a:rPr sz="1800" b="1" i="0">
+              <a:rPr sz="2000" b="1" i="0">
                 <a:solidFill>
                   <a:srgbClr val="FFFFFF"/>
                 </a:solidFill>
@@ -4564,20 +4684,55 @@
       </p:sp>
       <p:sp>
         <p:nvSpPr>
-          <p:cNvPr id="11" name="Rectangle 10"/>
+          <p:cNvPr id="12" name="TextBox 11"/>
+          <p:cNvSpPr txBox="1"/>
+          <p:nvPr/>
+        </p:nvSpPr>
+        <p:spPr>
+          <a:xfrm>
+            <a:off x="7589520" y="1810512"/>
+            <a:ext cx="4114800" cy="502920"/>
+          </a:xfrm>
+          <a:prstGeom prst="rect">
+            <a:avLst/>
+          </a:prstGeom>
+          <a:noFill/>
+        </p:spPr>
+        <p:txBody>
+          <a:bodyPr wrap="square">
+            <a:spAutoFit/>
+          </a:bodyPr>
+          <a:lstStyle/>
+          <a:p>
+            <a:pPr algn="l"/>
+            <a:r>
+              <a:rPr sz="1600" b="0" i="0">
+                <a:solidFill>
+                  <a:srgbClr val="B0CEE6"/>
+                </a:solidFill>
+                <a:latin typeface="Calibri"/>
+              </a:rPr>
+              <a:t>Purpose-built multi-agent crew</a:t>
+            </a:r>
+          </a:p>
+        </p:txBody>
+      </p:sp>
+      <p:sp>
+        <p:nvSpPr>
+          <p:cNvPr id="13" name="Rectangle 12"/>
           <p:cNvSpPr/>
           <p:nvPr/>
         </p:nvSpPr>
         <p:spPr>
           <a:xfrm>
-            <a:off x="8229600" y="3108960"/>
-            <a:ext cx="3017520" cy="1005840"/>
+            <a:off x="7406640" y="2834640"/>
+            <a:ext cx="4480560" cy="1325880"/>
           </a:xfrm>
           <a:prstGeom prst="rect">
             <a:avLst/>
           </a:prstGeom>
           <a:solidFill>
-            <a:srgbClr val="0D1B2A"/>
+            <a:srgbClr val="0A1422"/>
           </a:solidFill>
           <a:ln>
             <a:noFill/>
@@ -4607,14 +4762,57 @@
       </p:sp>
       <p:sp>
         <p:nvSpPr>
-          <p:cNvPr id="12" name="TextBox 11"/>
+          <p:cNvPr id="14" name="Rectangle 13"/>
+          <p:cNvSpPr/>
+          <p:nvPr/>
+        </p:nvSpPr>
+        <p:spPr>
+          <a:xfrm>
+            <a:off x="7406640" y="2834640"/>
+            <a:ext cx="4480560" cy="59436"/>
+          </a:xfrm>
+          <a:prstGeom prst="rect">
+            <a:avLst/>
+          </a:prstGeom>
+          <a:solidFill>
+            <a:srgbClr val="00B4D8"/>
+          </a:solidFill>
+          <a:ln>
+            <a:noFill/>
+          </a:ln>
+        </p:spPr>
+        <p:style>
+          <a:lnRef idx="1">
+            <a:schemeClr val="accent1"/>
+          </a:lnRef>
+          <a:fillRef idx="3">
+            <a:schemeClr val="accent1"/>
+          </a:fillRef>
+          <a:effectRef idx="2">
+            <a:schemeClr val="accent1"/>
+          </a:effectRef>
+          <a:fontRef idx="minor">
+            <a:schemeClr val="lt1"/>
+          </a:fontRef>
+        </p:style>
+        <p:txBody>
+          <a:bodyPr rtlCol="0" anchor="ctr"/>
+          <a:lstStyle/>
+          <a:p>
+            <a:pPr algn="ctr"/>
+          </a:p>
+        </p:txBody>
+      </p:sp>
+      <p:sp>
+        <p:nvSpPr>
+          <p:cNvPr id="15" name="TextBox 14"/>
           <p:cNvSpPr txBox="1"/>
           <p:nvPr/>
         </p:nvSpPr>
         <p:spPr>
           <a:xfrm>
-            <a:off x="8321040" y="3291840"/>
-            <a:ext cx="365760" cy="548640"/>
+            <a:off x="7589520" y="2971800"/>
+            <a:ext cx="4114800" cy="502920"/>
           </a:xfrm>
           <a:prstGeom prst="rect">
             <a:avLst/>
@@ -4629,68 +4827,68 @@
           <a:p>
             <a:pPr algn="l"/>
             <a:r>
-              <a:rPr sz="2200" b="0" i="0">
-                <a:solidFill>
-                  <a:srgbClr val="00B4D8"/>
-                </a:solidFill>
-                <a:latin typeface="Calibri"/>
-              </a:rPr>
-              <a:t>●</a:t>
-            </a:r>
-          </a:p>
-        </p:txBody>
-      </p:sp>
-      <p:sp>
-        <p:nvSpPr>
-          <p:cNvPr id="13" name="TextBox 12"/>
-          <p:cNvSpPr txBox="1"/>
-          <p:nvPr/>
-        </p:nvSpPr>
-        <p:spPr>
-          <a:xfrm>
-            <a:off x="8732520" y="3310128"/>
-            <a:ext cx="2377440" cy="502920"/>
-          </a:xfrm>
-          <a:prstGeom prst="rect">
-            <a:avLst/>
-          </a:prstGeom>
-          <a:noFill/>
-        </p:spPr>
-        <p:txBody>
-          <a:bodyPr wrap="square">
-            <a:spAutoFit/>
-          </a:bodyPr>
-          <a:lstStyle/>
-          <a:p>
-            <a:pPr algn="l"/>
-            <a:r>
-              <a:rPr sz="1800" b="1" i="0">
+              <a:rPr sz="2000" b="1" i="0">
                 <a:solidFill>
                   <a:srgbClr val="FFFFFF"/>
                 </a:solidFill>
                 <a:latin typeface="Calibri"/>
               </a:rPr>
-              <a:t>13+ Data Sources</a:t>
-            </a:r>
-          </a:p>
-        </p:txBody>
-      </p:sp>
-      <p:sp>
-        <p:nvSpPr>
-          <p:cNvPr id="14" name="Rectangle 13"/>
+              <a:t>13+ Import Sources</a:t>
+            </a:r>
+          </a:p>
+        </p:txBody>
+      </p:sp>
+      <p:sp>
+        <p:nvSpPr>
+          <p:cNvPr id="16" name="TextBox 15"/>
+          <p:cNvSpPr txBox="1"/>
+          <p:nvPr/>
+        </p:nvSpPr>
+        <p:spPr>
+          <a:xfrm>
+            <a:off x="7589520" y="3456432"/>
+            <a:ext cx="4114800" cy="502920"/>
+          </a:xfrm>
+          <a:prstGeom prst="rect">
+            <a:avLst/>
+          </a:prstGeom>
+          <a:noFill/>
+        </p:spPr>
+        <p:txBody>
+          <a:bodyPr wrap="square">
+            <a:spAutoFit/>
+          </a:bodyPr>
+          <a:lstStyle/>
+          <a:p>
+            <a:pPr algn="l"/>
+            <a:r>
+              <a:rPr sz="1600" b="0" i="0">
+                <a:solidFill>
+                  <a:srgbClr val="B0CEE6"/>
+                </a:solidFill>
+                <a:latin typeface="Calibri"/>
+              </a:rPr>
+              <a:t>No new hardware required</a:t>
+            </a:r>
+          </a:p>
+        </p:txBody>
+      </p:sp>
+      <p:sp>
+        <p:nvSpPr>
+          <p:cNvPr id="17" name="Rectangle 16"/>
           <p:cNvSpPr/>
           <p:nvPr/>
         </p:nvSpPr>
         <p:spPr>
           <a:xfrm>
-            <a:off x="8229600" y="4480560"/>
-            <a:ext cx="3017520" cy="1005840"/>
+            <a:off x="7406640" y="4480560"/>
+            <a:ext cx="4480560" cy="1325880"/>
           </a:xfrm>
           <a:prstGeom prst="rect">
             <a:avLst/>
           </a:prstGeom>
           <a:solidFill>
-            <a:srgbClr val="0D1B2A"/>
+            <a:srgbClr val="0A1422"/>
           </a:solidFill>
           <a:ln>
             <a:noFill/>
@@ -4720,14 +4918,57 @@
       </p:sp>
       <p:sp>
         <p:nvSpPr>
-          <p:cNvPr id="15" name="TextBox 14"/>
+          <p:cNvPr id="18" name="Rectangle 17"/>
+          <p:cNvSpPr/>
+          <p:nvPr/>
+        </p:nvSpPr>
+        <p:spPr>
+          <a:xfrm>
+            <a:off x="7406640" y="4480560"/>
+            <a:ext cx="4480560" cy="59436"/>
+          </a:xfrm>
+          <a:prstGeom prst="rect">
+            <a:avLst/>
+          </a:prstGeom>
+          <a:solidFill>
+            <a:srgbClr val="00B4D8"/>
+          </a:solidFill>
+          <a:ln>
+            <a:noFill/>
+          </a:ln>
+        </p:spPr>
+        <p:style>
+          <a:lnRef idx="1">
+            <a:schemeClr val="accent1"/>
+          </a:lnRef>
+          <a:fillRef idx="3">
+            <a:schemeClr val="accent1"/>
+          </a:fillRef>
+          <a:effectRef idx="2">
+            <a:schemeClr val="accent1"/>
+          </a:effectRef>
+          <a:fontRef idx="minor">
+            <a:schemeClr val="lt1"/>
+          </a:fontRef>
+        </p:style>
+        <p:txBody>
+          <a:bodyPr rtlCol="0" anchor="ctr"/>
+          <a:lstStyle/>
+          <a:p>
+            <a:pPr algn="ctr"/>
+          </a:p>
+        </p:txBody>
+      </p:sp>
+      <p:sp>
+        <p:nvSpPr>
+          <p:cNvPr id="19" name="TextBox 18"/>
           <p:cNvSpPr txBox="1"/>
           <p:nvPr/>
         </p:nvSpPr>
         <p:spPr>
           <a:xfrm>
-            <a:off x="8321040" y="4663440"/>
-            <a:ext cx="365760" cy="548640"/>
+            <a:off x="7589520" y="4617720"/>
+            <a:ext cx="4114800" cy="502920"/>
           </a:xfrm>
           <a:prstGeom prst="rect">
             <a:avLst/>
@@ -4742,48 +4983,48 @@
           <a:p>
             <a:pPr algn="l"/>
             <a:r>
-              <a:rPr sz="2200" b="0" i="0">
-                <a:solidFill>
-                  <a:srgbClr val="00B4D8"/>
-                </a:solidFill>
-                <a:latin typeface="Calibri"/>
-              </a:rPr>
-              <a:t>●</a:t>
-            </a:r>
-          </a:p>
-        </p:txBody>
-      </p:sp>
-      <p:sp>
-        <p:nvSpPr>
-          <p:cNvPr id="16" name="TextBox 15"/>
-          <p:cNvSpPr txBox="1"/>
-          <p:nvPr/>
-        </p:nvSpPr>
-        <p:spPr>
-          <a:xfrm>
-            <a:off x="8732520" y="4681728"/>
-            <a:ext cx="2377440" cy="502920"/>
-          </a:xfrm>
-          <a:prstGeom prst="rect">
-            <a:avLst/>
-          </a:prstGeom>
-          <a:noFill/>
-        </p:spPr>
-        <p:txBody>
-          <a:bodyPr wrap="square">
-            <a:spAutoFit/>
-          </a:bodyPr>
-          <a:lstStyle/>
-          <a:p>
-            <a:pPr algn="l"/>
-            <a:r>
-              <a:rPr sz="1800" b="1" i="0">
+              <a:rPr sz="2000" b="1" i="0">
                 <a:solidFill>
                   <a:srgbClr val="FFFFFF"/>
                 </a:solidFill>
                 <a:latin typeface="Calibri"/>
               </a:rPr>
-              <a:t>Live &amp; Deployed</a:t>
+              <a:t>Live &amp; Free</a:t>
+            </a:r>
+          </a:p>
+        </p:txBody>
+      </p:sp>
+      <p:sp>
+        <p:nvSpPr>
+          <p:cNvPr id="20" name="TextBox 19"/>
+          <p:cNvSpPr txBox="1"/>
+          <p:nvPr/>
+        </p:nvSpPr>
+        <p:spPr>
+          <a:xfrm>
+            <a:off x="7589520" y="5102352"/>
+            <a:ext cx="4114800" cy="502920"/>
+          </a:xfrm>
+          <a:prstGeom prst="rect">
+            <a:avLst/>
+          </a:prstGeom>
+          <a:noFill/>
+        </p:spPr>
+        <p:txBody>
+          <a:bodyPr wrap="square">
+            <a:spAutoFit/>
+          </a:bodyPr>
+          <a:lstStyle/>
+          <a:p>
+            <a:pPr algn="l"/>
+            <a:r>
+              <a:rPr sz="1600" b="0" i="0">
+                <a:solidFill>
+                  <a:srgbClr val="B0CEE6"/>
+                </a:solidFill>
+                <a:latin typeface="Calibri"/>
+              </a:rPr>
+              <a:t>Deployed now — not a mockup</a:t>
             </a:r>
           </a:p>
         </p:txBody>
@@ -4802,7 +5043,7 @@
     <p:bg>
       <p:bgPr>
         <a:solidFill>
-          <a:srgbClr val="0D1B2A"/>
+          <a:srgbClr val="0A1422"/>
         </a:solidFill>
         <a:effectLst/>
       </p:bgPr>
@@ -4823,7 +5064,7 @@
         <p:spPr>
           <a:xfrm>
             <a:off x="0" y="0"/>
-            <a:ext cx="73152" cy="6858000"/>
+            <a:ext cx="64008" cy="6858000"/>
           </a:xfrm>
           <a:prstGeom prst="rect">
             <a:avLst/>
@@ -4865,8 +5106,8 @@
         </p:nvSpPr>
         <p:spPr>
           <a:xfrm>
-            <a:off x="457200" y="365760"/>
-            <a:ext cx="9144000" cy="548640"/>
+            <a:off x="411480" y="274320"/>
+            <a:ext cx="9144000" cy="411480"/>
           </a:xfrm>
           <a:prstGeom prst="rect">
             <a:avLst/>
@@ -4881,7 +5122,7 @@
           <a:p>
             <a:pPr algn="l"/>
             <a:r>
-              <a:rPr sz="1300" b="1" i="0">
+              <a:rPr sz="1200" b="1" i="0">
                 <a:solidFill>
                   <a:srgbClr val="00B4D8"/>
                 </a:solidFill>
@@ -4900,8 +5141,8 @@
         </p:nvSpPr>
         <p:spPr>
           <a:xfrm>
-            <a:off x="457200" y="914400"/>
-            <a:ext cx="8229600" cy="1463040"/>
+            <a:off x="411480" y="777240"/>
+            <a:ext cx="9601200" cy="914400"/>
           </a:xfrm>
           <a:prstGeom prst="rect">
             <a:avLst/>
@@ -4916,14 +5157,13 @@
           <a:p>
             <a:pPr algn="l"/>
             <a:r>
-              <a:rPr sz="4200" b="1" i="0">
+              <a:rPr sz="4400" b="1" i="0">
                 <a:solidFill>
                   <a:srgbClr val="FFFFFF"/>
                 </a:solidFill>
                 <a:latin typeface="Calibri"/>
               </a:rPr>
-              <a:t>Fitness data is everywhere.
-Insights are nowhere.</a:t>
+              <a:t>Your data exists. Your insights don't.</a:t>
             </a:r>
           </a:p>
         </p:txBody>
@@ -4936,8 +5176,8 @@
         </p:nvSpPr>
         <p:spPr>
           <a:xfrm>
-            <a:off x="457200" y="2514600"/>
-            <a:ext cx="1645920" cy="45720"/>
+            <a:off x="411480" y="1828800"/>
+            <a:ext cx="2286000" cy="50292"/>
           </a:xfrm>
           <a:prstGeom prst="rect">
             <a:avLst/>
@@ -4979,14 +5219,14 @@
         </p:nvSpPr>
         <p:spPr>
           <a:xfrm>
-            <a:off x="457200" y="2743200"/>
-            <a:ext cx="10972800" cy="713232"/>
+            <a:off x="411480" y="2057400"/>
+            <a:ext cx="11338560" cy="1234440"/>
           </a:xfrm>
           <a:prstGeom prst="rect">
             <a:avLst/>
           </a:prstGeom>
           <a:solidFill>
-            <a:srgbClr val="14263A"/>
+            <a:srgbClr val="122235"/>
           </a:solidFill>
           <a:ln>
             <a:noFill/>
@@ -5016,55 +5256,20 @@
       </p:sp>
       <p:sp>
         <p:nvSpPr>
-          <p:cNvPr id="7" name="TextBox 6"/>
-          <p:cNvSpPr txBox="1"/>
-          <p:nvPr/>
-        </p:nvSpPr>
-        <p:spPr>
-          <a:xfrm>
-            <a:off x="685800" y="2807208"/>
-            <a:ext cx="10515600" cy="566928"/>
-          </a:xfrm>
-          <a:prstGeom prst="rect">
-            <a:avLst/>
-          </a:prstGeom>
-          <a:noFill/>
-        </p:spPr>
-        <p:txBody>
-          <a:bodyPr wrap="square">
-            <a:spAutoFit/>
-          </a:bodyPr>
-          <a:lstStyle/>
-          <a:p>
-            <a:pPr algn="l"/>
-            <a:r>
-              <a:rPr sz="1900" b="0" i="0">
-                <a:solidFill>
-                  <a:srgbClr val="B8D4E8"/>
-                </a:solidFill>
-                <a:latin typeface="Calibri"/>
-              </a:rPr>
-              <a:t>▸  Wearables &amp; apps keep data locked in their own silos</a:t>
-            </a:r>
-          </a:p>
-        </p:txBody>
-      </p:sp>
-      <p:sp>
-        <p:nvSpPr>
-          <p:cNvPr id="8" name="Rectangle 7"/>
+          <p:cNvPr id="7" name="Rectangle 6"/>
           <p:cNvSpPr/>
           <p:nvPr/>
         </p:nvSpPr>
         <p:spPr>
           <a:xfrm>
-            <a:off x="457200" y="3611880"/>
-            <a:ext cx="10972800" cy="713232"/>
+            <a:off x="411480" y="2057400"/>
+            <a:ext cx="64008" cy="1234440"/>
           </a:xfrm>
           <a:prstGeom prst="rect">
             <a:avLst/>
           </a:prstGeom>
           <a:solidFill>
-            <a:srgbClr val="14263A"/>
+            <a:srgbClr val="00B4D8"/>
           </a:solidFill>
           <a:ln>
             <a:noFill/>
@@ -5094,14 +5299,14 @@
       </p:sp>
       <p:sp>
         <p:nvSpPr>
-          <p:cNvPr id="9" name="TextBox 8"/>
+          <p:cNvPr id="8" name="TextBox 7"/>
           <p:cNvSpPr txBox="1"/>
           <p:nvPr/>
         </p:nvSpPr>
         <p:spPr>
           <a:xfrm>
-            <a:off x="685800" y="3675887"/>
-            <a:ext cx="10515600" cy="566928"/>
+            <a:off x="594360" y="2203704"/>
+            <a:ext cx="3200400" cy="502920"/>
           </a:xfrm>
           <a:prstGeom prst="rect">
             <a:avLst/>
@@ -5116,13 +5321,48 @@
           <a:p>
             <a:pPr algn="l"/>
             <a:r>
-              <a:rPr sz="1900" b="0" i="0">
+              <a:rPr sz="1800" b="1" i="0">
                 <a:solidFill>
-                  <a:srgbClr val="B8D4E8"/>
+                  <a:srgbClr val="48CAE4"/>
                 </a:solidFill>
                 <a:latin typeface="Calibri"/>
               </a:rPr>
-              <a:t>▸  Raw numbers mean nothing without context or science</a:t>
+              <a:t>Data is siloed</a:t>
+            </a:r>
+          </a:p>
+        </p:txBody>
+      </p:sp>
+      <p:sp>
+        <p:nvSpPr>
+          <p:cNvPr id="9" name="TextBox 8"/>
+          <p:cNvSpPr txBox="1"/>
+          <p:nvPr/>
+        </p:nvSpPr>
+        <p:spPr>
+          <a:xfrm>
+            <a:off x="3657600" y="2221992"/>
+            <a:ext cx="7863840" cy="475488"/>
+          </a:xfrm>
+          <a:prstGeom prst="rect">
+            <a:avLst/>
+          </a:prstGeom>
+          <a:noFill/>
+        </p:spPr>
+        <p:txBody>
+          <a:bodyPr wrap="square">
+            <a:spAutoFit/>
+          </a:bodyPr>
+          <a:lstStyle/>
+          <a:p>
+            <a:pPr algn="l"/>
+            <a:r>
+              <a:rPr sz="1700" b="0" i="0">
+                <a:solidFill>
+                  <a:srgbClr val="B0CEE6"/>
+                </a:solidFill>
+                <a:latin typeface="Calibri"/>
+              </a:rPr>
+              <a:t>Apple Watch, Strava, Garmin — each knows a slice of you, none talks to the others</a:t>
             </a:r>
           </a:p>
         </p:txBody>
@@ -5135,14 +5375,14 @@
         </p:nvSpPr>
         <p:spPr>
           <a:xfrm>
-            <a:off x="457200" y="4480560"/>
-            <a:ext cx="10972800" cy="713232"/>
+            <a:off x="411480" y="3383280"/>
+            <a:ext cx="11338560" cy="1234440"/>
           </a:xfrm>
           <a:prstGeom prst="rect">
             <a:avLst/>
           </a:prstGeom>
           <a:solidFill>
-            <a:srgbClr val="14263A"/>
+            <a:srgbClr val="122235"/>
           </a:solidFill>
           <a:ln>
             <a:noFill/>
@@ -5172,55 +5412,20 @@
       </p:sp>
       <p:sp>
         <p:nvSpPr>
-          <p:cNvPr id="11" name="TextBox 10"/>
-          <p:cNvSpPr txBox="1"/>
-          <p:nvPr/>
-        </p:nvSpPr>
-        <p:spPr>
-          <a:xfrm>
-            <a:off x="685800" y="4544568"/>
-            <a:ext cx="10515600" cy="566928"/>
-          </a:xfrm>
-          <a:prstGeom prst="rect">
-            <a:avLst/>
-          </a:prstGeom>
-          <a:noFill/>
-        </p:spPr>
-        <p:txBody>
-          <a:bodyPr wrap="square">
-            <a:spAutoFit/>
-          </a:bodyPr>
-          <a:lstStyle/>
-          <a:p>
-            <a:pPr algn="l"/>
-            <a:r>
-              <a:rPr sz="1900" b="0" i="0">
-                <a:solidFill>
-                  <a:srgbClr val="B8D4E8"/>
-                </a:solidFill>
-                <a:latin typeface="Calibri"/>
-              </a:rPr>
-              <a:t>▸  Coaching insights require a personal trainer — expensive, inaccessible</a:t>
-            </a:r>
-          </a:p>
-        </p:txBody>
-      </p:sp>
-      <p:sp>
-        <p:nvSpPr>
-          <p:cNvPr id="12" name="Rectangle 11"/>
+          <p:cNvPr id="11" name="Rectangle 10"/>
           <p:cNvSpPr/>
           <p:nvPr/>
         </p:nvSpPr>
         <p:spPr>
           <a:xfrm>
-            <a:off x="457200" y="5349240"/>
-            <a:ext cx="10972800" cy="713232"/>
+            <a:off x="411480" y="3383280"/>
+            <a:ext cx="64008" cy="1234440"/>
           </a:xfrm>
           <a:prstGeom prst="rect">
             <a:avLst/>
           </a:prstGeom>
           <a:solidFill>
-            <a:srgbClr val="14263A"/>
+            <a:srgbClr val="00B4D8"/>
           </a:solidFill>
           <a:ln>
             <a:noFill/>
@@ -5250,14 +5455,14 @@
       </p:sp>
       <p:sp>
         <p:nvSpPr>
-          <p:cNvPr id="13" name="TextBox 12"/>
+          <p:cNvPr id="12" name="TextBox 11"/>
           <p:cNvSpPr txBox="1"/>
           <p:nvPr/>
         </p:nvSpPr>
         <p:spPr>
           <a:xfrm>
-            <a:off x="685800" y="5413248"/>
-            <a:ext cx="10515600" cy="566928"/>
+            <a:off x="594360" y="3529584"/>
+            <a:ext cx="3200400" cy="502920"/>
           </a:xfrm>
           <a:prstGeom prst="rect">
             <a:avLst/>
@@ -5272,13 +5477,204 @@
           <a:p>
             <a:pPr algn="l"/>
             <a:r>
-              <a:rPr sz="1900" b="0" i="0">
+              <a:rPr sz="1800" b="1" i="0">
                 <a:solidFill>
-                  <a:srgbClr val="B8D4E8"/>
+                  <a:srgbClr val="48CAE4"/>
                 </a:solidFill>
                 <a:latin typeface="Calibri"/>
               </a:rPr>
-              <a:t>▸  Most people never act on their health data</a:t>
+              <a:t>Numbers without context are useless</a:t>
+            </a:r>
+          </a:p>
+        </p:txBody>
+      </p:sp>
+      <p:sp>
+        <p:nvSpPr>
+          <p:cNvPr id="13" name="TextBox 12"/>
+          <p:cNvSpPr txBox="1"/>
+          <p:nvPr/>
+        </p:nvSpPr>
+        <p:spPr>
+          <a:xfrm>
+            <a:off x="3657600" y="3547872"/>
+            <a:ext cx="7863840" cy="475488"/>
+          </a:xfrm>
+          <a:prstGeom prst="rect">
+            <a:avLst/>
+          </a:prstGeom>
+          <a:noFill/>
+        </p:spPr>
+        <p:txBody>
+          <a:bodyPr wrap="square">
+            <a:spAutoFit/>
+          </a:bodyPr>
+          <a:lstStyle/>
+          <a:p>
+            <a:pPr algn="l"/>
+            <a:r>
+              <a:rPr sz="1700" b="0" i="0">
+                <a:solidFill>
+                  <a:srgbClr val="B0CEE6"/>
+                </a:solidFill>
+                <a:latin typeface="Calibri"/>
+              </a:rPr>
+              <a:t>A resting HR of 58 bpm means nothing without knowing your baseline, last workout, and sleep</a:t>
+            </a:r>
+          </a:p>
+        </p:txBody>
+      </p:sp>
+      <p:sp>
+        <p:nvSpPr>
+          <p:cNvPr id="14" name="Rectangle 13"/>
+          <p:cNvSpPr/>
+          <p:nvPr/>
+        </p:nvSpPr>
+        <p:spPr>
+          <a:xfrm>
+            <a:off x="411480" y="4709160"/>
+            <a:ext cx="11338560" cy="1234440"/>
+          </a:xfrm>
+          <a:prstGeom prst="rect">
+            <a:avLst/>
+          </a:prstGeom>
+          <a:solidFill>
+            <a:srgbClr val="122235"/>
+          </a:solidFill>
+          <a:ln>
+            <a:noFill/>
+          </a:ln>
+        </p:spPr>
+        <p:style>
+          <a:lnRef idx="1">
+            <a:schemeClr val="accent1"/>
+          </a:lnRef>
+          <a:fillRef idx="3">
+            <a:schemeClr val="accent1"/>
+          </a:fillRef>
+          <a:effectRef idx="2">
+            <a:schemeClr val="accent1"/>
+          </a:effectRef>
+          <a:fontRef idx="minor">
+            <a:schemeClr val="lt1"/>
+          </a:fontRef>
+        </p:style>
+        <p:txBody>
+          <a:bodyPr rtlCol="0" anchor="ctr"/>
+          <a:lstStyle/>
+          <a:p>
+            <a:pPr algn="ctr"/>
+          </a:p>
+        </p:txBody>
+      </p:sp>
+      <p:sp>
+        <p:nvSpPr>
+          <p:cNvPr id="15" name="Rectangle 14"/>
+          <p:cNvSpPr/>
+          <p:nvPr/>
+        </p:nvSpPr>
+        <p:spPr>
+          <a:xfrm>
+            <a:off x="411480" y="4709160"/>
+            <a:ext cx="64008" cy="1234440"/>
+          </a:xfrm>
+          <a:prstGeom prst="rect">
+            <a:avLst/>
+          </a:prstGeom>
+          <a:solidFill>
+            <a:srgbClr val="00B4D8"/>
+          </a:solidFill>
+          <a:ln>
+            <a:noFill/>
+          </a:ln>
+        </p:spPr>
+        <p:style>
+          <a:lnRef idx="1">
+            <a:schemeClr val="accent1"/>
+          </a:lnRef>
+          <a:fillRef idx="3">
+            <a:schemeClr val="accent1"/>
+          </a:fillRef>
+          <a:effectRef idx="2">
+            <a:schemeClr val="accent1"/>
+          </a:effectRef>
+          <a:fontRef idx="minor">
+            <a:schemeClr val="lt1"/>
+          </a:fontRef>
+        </p:style>
+        <p:txBody>
+          <a:bodyPr rtlCol="0" anchor="ctr"/>
+          <a:lstStyle/>
+          <a:p>
+            <a:pPr algn="ctr"/>
+          </a:p>
+        </p:txBody>
+      </p:sp>
+      <p:sp>
+        <p:nvSpPr>
+          <p:cNvPr id="16" name="TextBox 15"/>
+          <p:cNvSpPr txBox="1"/>
+          <p:nvPr/>
+        </p:nvSpPr>
+        <p:spPr>
+          <a:xfrm>
+            <a:off x="594360" y="4855464"/>
+            <a:ext cx="3200400" cy="502920"/>
+          </a:xfrm>
+          <a:prstGeom prst="rect">
+            <a:avLst/>
+          </a:prstGeom>
+          <a:noFill/>
+        </p:spPr>
+        <p:txBody>
+          <a:bodyPr wrap="square">
+            <a:spAutoFit/>
+          </a:bodyPr>
+          <a:lstStyle/>
+          <a:p>
+            <a:pPr algn="l"/>
+            <a:r>
+              <a:rPr sz="1800" b="1" i="0">
+                <a:solidFill>
+                  <a:srgbClr val="48CAE4"/>
+                </a:solidFill>
+                <a:latin typeface="Calibri"/>
+              </a:rPr>
+              <a:t>Expert guidance costs $150–300/month</a:t>
+            </a:r>
+          </a:p>
+        </p:txBody>
+      </p:sp>
+      <p:sp>
+        <p:nvSpPr>
+          <p:cNvPr id="17" name="TextBox 16"/>
+          <p:cNvSpPr txBox="1"/>
+          <p:nvPr/>
+        </p:nvSpPr>
+        <p:spPr>
+          <a:xfrm>
+            <a:off x="3657600" y="4873752"/>
+            <a:ext cx="7863840" cy="475488"/>
+          </a:xfrm>
+          <a:prstGeom prst="rect">
+            <a:avLst/>
+          </a:prstGeom>
+          <a:noFill/>
+        </p:spPr>
+        <p:txBody>
+          <a:bodyPr wrap="square">
+            <a:spAutoFit/>
+          </a:bodyPr>
+          <a:lstStyle/>
+          <a:p>
+            <a:pPr algn="l"/>
+            <a:r>
+              <a:rPr sz="1700" b="0" i="0">
+                <a:solidFill>
+                  <a:srgbClr val="B0CEE6"/>
+                </a:solidFill>
+                <a:latin typeface="Calibri"/>
+              </a:rPr>
+              <a:t>Sports scientists and personal coaches are a luxury. Evidence-based training advice is not accessible</a:t>
             </a:r>
           </a:p>
         </p:txBody>
@@ -5297,7 +5693,7 @@
     <p:bg>
       <p:bgPr>
         <a:solidFill>
-          <a:srgbClr val="0D1B2A"/>
+          <a:srgbClr val="0A1422"/>
         </a:solidFill>
         <a:effectLst/>
       </p:bgPr>
@@ -5318,7 +5714,7 @@
         <p:spPr>
           <a:xfrm>
             <a:off x="0" y="0"/>
-            <a:ext cx="73152" cy="6858000"/>
+            <a:ext cx="64008" cy="6858000"/>
           </a:xfrm>
           <a:prstGeom prst="rect">
             <a:avLst/>
@@ -5360,8 +5756,8 @@
         </p:nvSpPr>
         <p:spPr>
           <a:xfrm>
-            <a:off x="457200" y="365760"/>
-            <a:ext cx="9144000" cy="548640"/>
+            <a:off x="411480" y="274320"/>
+            <a:ext cx="9144000" cy="411480"/>
           </a:xfrm>
           <a:prstGeom prst="rect">
             <a:avLst/>
@@ -5376,7 +5772,7 @@
           <a:p>
             <a:pPr algn="l"/>
             <a:r>
-              <a:rPr sz="1300" b="1" i="0">
+              <a:rPr sz="1200" b="1" i="0">
                 <a:solidFill>
                   <a:srgbClr val="00B4D8"/>
                 </a:solidFill>
@@ -5395,8 +5791,8 @@
         </p:nvSpPr>
         <p:spPr>
           <a:xfrm>
-            <a:off x="457200" y="914400"/>
-            <a:ext cx="9144000" cy="1463040"/>
+            <a:off x="411480" y="777240"/>
+            <a:ext cx="10972800" cy="914400"/>
           </a:xfrm>
           <a:prstGeom prst="rect">
             <a:avLst/>
@@ -5411,14 +5807,13 @@
           <a:p>
             <a:pPr algn="l"/>
             <a:r>
-              <a:rPr sz="4000" b="1" i="0">
+              <a:rPr sz="3600" b="1" i="0">
                 <a:solidFill>
                   <a:srgbClr val="FFFFFF"/>
                 </a:solidFill>
                 <a:latin typeface="Calibri"/>
               </a:rPr>
-              <a:t>One platform. Any source.
-AI that speaks sports science.</a:t>
+              <a:t>One platform. Any source. AI that speaks sports science.</a:t>
             </a:r>
           </a:p>
         </p:txBody>
@@ -5431,8 +5826,8 @@
         </p:nvSpPr>
         <p:spPr>
           <a:xfrm>
-            <a:off x="457200" y="2514600"/>
-            <a:ext cx="2011680" cy="45720"/>
+            <a:off x="411480" y="1828800"/>
+            <a:ext cx="2011680" cy="50292"/>
           </a:xfrm>
           <a:prstGeom prst="rect">
             <a:avLst/>
@@ -5474,14 +5869,14 @@
         </p:nvSpPr>
         <p:spPr>
           <a:xfrm>
-            <a:off x="457200" y="2834640"/>
-            <a:ext cx="3566160" cy="3291840"/>
+            <a:off x="411480" y="2103120"/>
+            <a:ext cx="3657600" cy="4297680"/>
           </a:xfrm>
           <a:prstGeom prst="rect">
             <a:avLst/>
           </a:prstGeom>
           <a:solidFill>
-            <a:srgbClr val="14263A"/>
+            <a:srgbClr val="122235"/>
           </a:solidFill>
           <a:ln>
             <a:noFill/>
@@ -5517,8 +5912,8 @@
         </p:nvSpPr>
         <p:spPr>
           <a:xfrm>
-            <a:off x="457200" y="2834640"/>
-            <a:ext cx="3566160" cy="73152"/>
+            <a:off x="411480" y="2103120"/>
+            <a:ext cx="3657600" cy="64008"/>
           </a:xfrm>
           <a:prstGeom prst="rect">
             <a:avLst/>
@@ -5560,8 +5955,8 @@
         </p:nvSpPr>
         <p:spPr>
           <a:xfrm>
-            <a:off x="640080" y="2971800"/>
-            <a:ext cx="3200400" cy="502920"/>
+            <a:off x="594360" y="2240280"/>
+            <a:ext cx="3291840" cy="548640"/>
           </a:xfrm>
           <a:prstGeom prst="rect">
             <a:avLst/>
@@ -5576,13 +5971,13 @@
           <a:p>
             <a:pPr algn="l"/>
             <a:r>
-              <a:rPr sz="2000" b="1" i="0">
+              <a:rPr sz="1800" b="1" i="0">
                 <a:solidFill>
                   <a:srgbClr val="00B4D8"/>
                 </a:solidFill>
                 <a:latin typeface="Calibri"/>
               </a:rPr>
-              <a:t>CONNECT</a:t>
+              <a:t>① CONNECT</a:t>
             </a:r>
           </a:p>
         </p:txBody>
@@ -5595,8 +5990,8 @@
         </p:nvSpPr>
         <p:spPr>
           <a:xfrm>
-            <a:off x="640080" y="3566160"/>
-            <a:ext cx="3200400" cy="2286000"/>
+            <a:off x="594360" y="2834640"/>
+            <a:ext cx="3291840" cy="2011680"/>
           </a:xfrm>
           <a:prstGeom prst="rect">
             <a:avLst/>
@@ -5611,15 +6006,16 @@
           <a:p>
             <a:pPr algn="l"/>
             <a:r>
-              <a:rPr sz="1700" b="0" i="0">
+              <a:rPr sz="1600" b="0" i="0">
                 <a:solidFill>
-                  <a:srgbClr val="B8D4E8"/>
+                  <a:srgbClr val="B0CEE6"/>
                 </a:solidFill>
                 <a:latin typeface="Calibri"/>
               </a:rPr>
-              <a:t>OAuth sync or file drop
-Strava · Fitbit · Apple Health
-Garmin · COROS · Wahoo · +8 more</a:t>
+              <a:t>Strava · Fitbit OAuth
+Apple Health · Garmin
+.fit / .tcx / .gpx files
+Manual log + GPS tracker</a:t>
             </a:r>
           </a:p>
         </p:txBody>
@@ -5632,51 +6028,8 @@
         </p:nvSpPr>
         <p:spPr>
           <a:xfrm>
-            <a:off x="4361688" y="2834640"/>
-            <a:ext cx="3566160" cy="3291840"/>
-          </a:xfrm>
-          <a:prstGeom prst="rect">
-            <a:avLst/>
-          </a:prstGeom>
-          <a:solidFill>
-            <a:srgbClr val="14263A"/>
-          </a:solidFill>
-          <a:ln>
-            <a:noFill/>
-          </a:ln>
-        </p:spPr>
-        <p:style>
-          <a:lnRef idx="1">
-            <a:schemeClr val="accent1"/>
-          </a:lnRef>
-          <a:fillRef idx="3">
-            <a:schemeClr val="accent1"/>
-          </a:fillRef>
-          <a:effectRef idx="2">
-            <a:schemeClr val="accent1"/>
-          </a:effectRef>
-          <a:fontRef idx="minor">
-            <a:schemeClr val="lt1"/>
-          </a:fontRef>
-        </p:style>
-        <p:txBody>
-          <a:bodyPr rtlCol="0" anchor="ctr"/>
-          <a:lstStyle/>
-          <a:p>
-            <a:pPr algn="ctr"/>
-          </a:p>
-        </p:txBody>
-      </p:sp>
-      <p:sp>
-        <p:nvSpPr>
-          <p:cNvPr id="11" name="Rectangle 10"/>
-          <p:cNvSpPr/>
-          <p:nvPr/>
-        </p:nvSpPr>
-        <p:spPr>
-          <a:xfrm>
-            <a:off x="4361688" y="2834640"/>
-            <a:ext cx="3566160" cy="73152"/>
+            <a:off x="594360" y="4937760"/>
+            <a:ext cx="3200400" cy="41148"/>
           </a:xfrm>
           <a:prstGeom prst="rect">
             <a:avLst/>
@@ -5712,14 +6065,14 @@
       </p:sp>
       <p:sp>
         <p:nvSpPr>
-          <p:cNvPr id="12" name="TextBox 11"/>
+          <p:cNvPr id="11" name="TextBox 10"/>
           <p:cNvSpPr txBox="1"/>
           <p:nvPr/>
         </p:nvSpPr>
         <p:spPr>
           <a:xfrm>
-            <a:off x="4544568" y="2971800"/>
-            <a:ext cx="3200400" cy="502920"/>
+            <a:off x="594360" y="5074920"/>
+            <a:ext cx="3291840" cy="777240"/>
           </a:xfrm>
           <a:prstGeom prst="rect">
             <a:avLst/>
@@ -5734,70 +6087,34 @@
           <a:p>
             <a:pPr algn="l"/>
             <a:r>
-              <a:rPr sz="2000" b="1" i="0">
+              <a:rPr sz="1500" b="0" i="1">
                 <a:solidFill>
-                  <a:srgbClr val="00B4D8"/>
+                  <a:srgbClr val="48CAE4"/>
                 </a:solidFill>
                 <a:latin typeface="Calibri"/>
               </a:rPr>
-              <a:t>ANALYZE</a:t>
-            </a:r>
-          </a:p>
-        </p:txBody>
-      </p:sp>
-      <p:sp>
-        <p:nvSpPr>
-          <p:cNvPr id="13" name="TextBox 12"/>
-          <p:cNvSpPr txBox="1"/>
-          <p:nvPr/>
-        </p:nvSpPr>
-        <p:spPr>
-          <a:xfrm>
-            <a:off x="4544568" y="3566160"/>
-            <a:ext cx="3200400" cy="2286000"/>
-          </a:xfrm>
-          <a:prstGeom prst="rect">
-            <a:avLst/>
-          </a:prstGeom>
-          <a:noFill/>
-        </p:spPr>
-        <p:txBody>
-          <a:bodyPr wrap="square">
-            <a:spAutoFit/>
-          </a:bodyPr>
-          <a:lstStyle/>
-          <a:p>
-            <a:pPr algn="l"/>
-            <a:r>
-              <a:rPr sz="1700" b="0" i="0">
-                <a:solidFill>
-                  <a:srgbClr val="B8D4E8"/>
-                </a:solidFill>
-                <a:latin typeface="Calibri"/>
-              </a:rPr>
-              <a:t>8 AI agents process your data
-Sports scientist + trend analysis
-QA-scored output</a:t>
-            </a:r>
-          </a:p>
-        </p:txBody>
-      </p:sp>
-      <p:sp>
-        <p:nvSpPr>
-          <p:cNvPr id="14" name="Rectangle 13"/>
+              <a:t>13+ sources.
+No new hardware.</a:t>
+            </a:r>
+          </a:p>
+        </p:txBody>
+      </p:sp>
+      <p:sp>
+        <p:nvSpPr>
+          <p:cNvPr id="12" name="Rectangle 11"/>
           <p:cNvSpPr/>
           <p:nvPr/>
         </p:nvSpPr>
         <p:spPr>
           <a:xfrm>
-            <a:off x="8266175" y="2834640"/>
-            <a:ext cx="3566160" cy="3291840"/>
+            <a:off x="4343400" y="2103120"/>
+            <a:ext cx="3657600" cy="4297680"/>
           </a:xfrm>
           <a:prstGeom prst="rect">
             <a:avLst/>
           </a:prstGeom>
           <a:solidFill>
-            <a:srgbClr val="14263A"/>
+            <a:srgbClr val="122235"/>
           </a:solidFill>
           <a:ln>
             <a:noFill/>
@@ -5827,14 +6144,14 @@
       </p:sp>
       <p:sp>
         <p:nvSpPr>
-          <p:cNvPr id="15" name="Rectangle 14"/>
+          <p:cNvPr id="13" name="Rectangle 12"/>
           <p:cNvSpPr/>
           <p:nvPr/>
         </p:nvSpPr>
         <p:spPr>
           <a:xfrm>
-            <a:off x="8266175" y="2834640"/>
-            <a:ext cx="3566160" cy="73152"/>
+            <a:off x="4343400" y="2103120"/>
+            <a:ext cx="3657600" cy="64008"/>
           </a:xfrm>
           <a:prstGeom prst="rect">
             <a:avLst/>
@@ -5870,14 +6187,14 @@
       </p:sp>
       <p:sp>
         <p:nvSpPr>
-          <p:cNvPr id="16" name="TextBox 15"/>
+          <p:cNvPr id="14" name="TextBox 13"/>
           <p:cNvSpPr txBox="1"/>
           <p:nvPr/>
         </p:nvSpPr>
         <p:spPr>
           <a:xfrm>
-            <a:off x="8449055" y="2971800"/>
-            <a:ext cx="3200400" cy="502920"/>
+            <a:off x="4526280" y="2240280"/>
+            <a:ext cx="3291840" cy="548640"/>
           </a:xfrm>
           <a:prstGeom prst="rect">
             <a:avLst/>
@@ -5892,27 +6209,27 @@
           <a:p>
             <a:pPr algn="l"/>
             <a:r>
-              <a:rPr sz="2000" b="1" i="0">
+              <a:rPr sz="1800" b="1" i="0">
                 <a:solidFill>
                   <a:srgbClr val="00B4D8"/>
                 </a:solidFill>
                 <a:latin typeface="Calibri"/>
               </a:rPr>
-              <a:t>ACT</a:t>
-            </a:r>
-          </a:p>
-        </p:txBody>
-      </p:sp>
-      <p:sp>
-        <p:nvSpPr>
-          <p:cNvPr id="17" name="TextBox 16"/>
+              <a:t>② ANALYZE</a:t>
+            </a:r>
+          </a:p>
+        </p:txBody>
+      </p:sp>
+      <p:sp>
+        <p:nvSpPr>
+          <p:cNvPr id="15" name="TextBox 14"/>
           <p:cNvSpPr txBox="1"/>
           <p:nvPr/>
         </p:nvSpPr>
         <p:spPr>
           <a:xfrm>
-            <a:off x="8449055" y="3566160"/>
-            <a:ext cx="3200400" cy="2286000"/>
+            <a:off x="4526280" y="2834640"/>
+            <a:ext cx="3291840" cy="2011680"/>
           </a:xfrm>
           <a:prstGeom prst="rect">
             <a:avLst/>
@@ -5927,15 +6244,333 @@
           <a:p>
             <a:pPr algn="l"/>
             <a:r>
-              <a:rPr sz="1700" b="0" i="0">
+              <a:rPr sz="1600" b="0" i="0">
                 <a:solidFill>
-                  <a:srgbClr val="B8D4E8"/>
+                  <a:srgbClr val="B0CEE6"/>
                 </a:solidFill>
                 <a:latin typeface="Calibri"/>
               </a:rPr>
-              <a:t>Weekly coach plan
-Readiness score &amp; alerts
-Chat with your data</a:t>
+              <a:t>8 specialized AI agents
+Sports scientist reasoning
+Trend &amp; pattern detection
+QA-scored output</a:t>
+            </a:r>
+          </a:p>
+        </p:txBody>
+      </p:sp>
+      <p:sp>
+        <p:nvSpPr>
+          <p:cNvPr id="16" name="Rectangle 15"/>
+          <p:cNvSpPr/>
+          <p:nvPr/>
+        </p:nvSpPr>
+        <p:spPr>
+          <a:xfrm>
+            <a:off x="4526280" y="4937760"/>
+            <a:ext cx="3200400" cy="41148"/>
+          </a:xfrm>
+          <a:prstGeom prst="rect">
+            <a:avLst/>
+          </a:prstGeom>
+          <a:solidFill>
+            <a:srgbClr val="00B4D8"/>
+          </a:solidFill>
+          <a:ln>
+            <a:noFill/>
+          </a:ln>
+        </p:spPr>
+        <p:style>
+          <a:lnRef idx="1">
+            <a:schemeClr val="accent1"/>
+          </a:lnRef>
+          <a:fillRef idx="3">
+            <a:schemeClr val="accent1"/>
+          </a:fillRef>
+          <a:effectRef idx="2">
+            <a:schemeClr val="accent1"/>
+          </a:effectRef>
+          <a:fontRef idx="minor">
+            <a:schemeClr val="lt1"/>
+          </a:fontRef>
+        </p:style>
+        <p:txBody>
+          <a:bodyPr rtlCol="0" anchor="ctr"/>
+          <a:lstStyle/>
+          <a:p>
+            <a:pPr algn="ctr"/>
+          </a:p>
+        </p:txBody>
+      </p:sp>
+      <p:sp>
+        <p:nvSpPr>
+          <p:cNvPr id="17" name="TextBox 16"/>
+          <p:cNvSpPr txBox="1"/>
+          <p:nvPr/>
+        </p:nvSpPr>
+        <p:spPr>
+          <a:xfrm>
+            <a:off x="4526280" y="5074920"/>
+            <a:ext cx="3291840" cy="777240"/>
+          </a:xfrm>
+          <a:prstGeom prst="rect">
+            <a:avLst/>
+          </a:prstGeom>
+          <a:noFill/>
+        </p:spPr>
+        <p:txBody>
+          <a:bodyPr wrap="square">
+            <a:spAutoFit/>
+          </a:bodyPr>
+          <a:lstStyle/>
+          <a:p>
+            <a:pPr algn="l"/>
+            <a:r>
+              <a:rPr sz="1500" b="0" i="1">
+                <a:solidFill>
+                  <a:srgbClr val="48CAE4"/>
+                </a:solidFill>
+                <a:latin typeface="Calibri"/>
+              </a:rPr>
+              <a:t>Expert-level analysis
+automatically.</a:t>
+            </a:r>
+          </a:p>
+        </p:txBody>
+      </p:sp>
+      <p:sp>
+        <p:nvSpPr>
+          <p:cNvPr id="18" name="Rectangle 17"/>
+          <p:cNvSpPr/>
+          <p:nvPr/>
+        </p:nvSpPr>
+        <p:spPr>
+          <a:xfrm>
+            <a:off x="8275319" y="2103120"/>
+            <a:ext cx="3657600" cy="4297680"/>
+          </a:xfrm>
+          <a:prstGeom prst="rect">
+            <a:avLst/>
+          </a:prstGeom>
+          <a:solidFill>
+            <a:srgbClr val="122235"/>
+          </a:solidFill>
+          <a:ln>
+            <a:noFill/>
+          </a:ln>
+        </p:spPr>
+        <p:style>
+          <a:lnRef idx="1">
+            <a:schemeClr val="accent1"/>
+          </a:lnRef>
+          <a:fillRef idx="3">
+            <a:schemeClr val="accent1"/>
+          </a:fillRef>
+          <a:effectRef idx="2">
+            <a:schemeClr val="accent1"/>
+          </a:effectRef>
+          <a:fontRef idx="minor">
+            <a:schemeClr val="lt1"/>
+          </a:fontRef>
+        </p:style>
+        <p:txBody>
+          <a:bodyPr rtlCol="0" anchor="ctr"/>
+          <a:lstStyle/>
+          <a:p>
+            <a:pPr algn="ctr"/>
+          </a:p>
+        </p:txBody>
+      </p:sp>
+      <p:sp>
+        <p:nvSpPr>
+          <p:cNvPr id="19" name="Rectangle 18"/>
+          <p:cNvSpPr/>
+          <p:nvPr/>
+        </p:nvSpPr>
+        <p:spPr>
+          <a:xfrm>
+            <a:off x="8275319" y="2103120"/>
+            <a:ext cx="3657600" cy="64008"/>
+          </a:xfrm>
+          <a:prstGeom prst="rect">
+            <a:avLst/>
+          </a:prstGeom>
+          <a:solidFill>
+            <a:srgbClr val="00B4D8"/>
+          </a:solidFill>
+          <a:ln>
+            <a:noFill/>
+          </a:ln>
+        </p:spPr>
+        <p:style>
+          <a:lnRef idx="1">
+            <a:schemeClr val="accent1"/>
+          </a:lnRef>
+          <a:fillRef idx="3">
+            <a:schemeClr val="accent1"/>
+          </a:fillRef>
+          <a:effectRef idx="2">
+            <a:schemeClr val="accent1"/>
+          </a:effectRef>
+          <a:fontRef idx="minor">
+            <a:schemeClr val="lt1"/>
+          </a:fontRef>
+        </p:style>
+        <p:txBody>
+          <a:bodyPr rtlCol="0" anchor="ctr"/>
+          <a:lstStyle/>
+          <a:p>
+            <a:pPr algn="ctr"/>
+          </a:p>
+        </p:txBody>
+      </p:sp>
+      <p:sp>
+        <p:nvSpPr>
+          <p:cNvPr id="20" name="TextBox 19"/>
+          <p:cNvSpPr txBox="1"/>
+          <p:nvPr/>
+        </p:nvSpPr>
+        <p:spPr>
+          <a:xfrm>
+            <a:off x="8458199" y="2240280"/>
+            <a:ext cx="3291840" cy="548640"/>
+          </a:xfrm>
+          <a:prstGeom prst="rect">
+            <a:avLst/>
+          </a:prstGeom>
+          <a:noFill/>
+        </p:spPr>
+        <p:txBody>
+          <a:bodyPr wrap="square">
+            <a:spAutoFit/>
+          </a:bodyPr>
+          <a:lstStyle/>
+          <a:p>
+            <a:pPr algn="l"/>
+            <a:r>
+              <a:rPr sz="1800" b="1" i="0">
+                <a:solidFill>
+                  <a:srgbClr val="00B4D8"/>
+                </a:solidFill>
+                <a:latin typeface="Calibri"/>
+              </a:rPr>
+              <a:t>③ ACT</a:t>
+            </a:r>
+          </a:p>
+        </p:txBody>
+      </p:sp>
+      <p:sp>
+        <p:nvSpPr>
+          <p:cNvPr id="21" name="TextBox 20"/>
+          <p:cNvSpPr txBox="1"/>
+          <p:nvPr/>
+        </p:nvSpPr>
+        <p:spPr>
+          <a:xfrm>
+            <a:off x="8458199" y="2834640"/>
+            <a:ext cx="3291840" cy="2011680"/>
+          </a:xfrm>
+          <a:prstGeom prst="rect">
+            <a:avLst/>
+          </a:prstGeom>
+          <a:noFill/>
+        </p:spPr>
+        <p:txBody>
+          <a:bodyPr wrap="square">
+            <a:spAutoFit/>
+          </a:bodyPr>
+          <a:lstStyle/>
+          <a:p>
+            <a:pPr algn="l"/>
+            <a:r>
+              <a:rPr sz="1600" b="0" i="0">
+                <a:solidFill>
+                  <a:srgbClr val="B0CEE6"/>
+                </a:solidFill>
+                <a:latin typeface="Calibri"/>
+              </a:rPr>
+              <a:t>Adaptive weekly coach plan
+Daily readiness score
+Proactive health alerts
+Conversational data chat</a:t>
+            </a:r>
+          </a:p>
+        </p:txBody>
+      </p:sp>
+      <p:sp>
+        <p:nvSpPr>
+          <p:cNvPr id="22" name="Rectangle 21"/>
+          <p:cNvSpPr/>
+          <p:nvPr/>
+        </p:nvSpPr>
+        <p:spPr>
+          <a:xfrm>
+            <a:off x="8458199" y="4937760"/>
+            <a:ext cx="3200400" cy="41148"/>
+          </a:xfrm>
+          <a:prstGeom prst="rect">
+            <a:avLst/>
+          </a:prstGeom>
+          <a:solidFill>
+            <a:srgbClr val="00B4D8"/>
+          </a:solidFill>
+          <a:ln>
+            <a:noFill/>
+          </a:ln>
+        </p:spPr>
+        <p:style>
+          <a:lnRef idx="1">
+            <a:schemeClr val="accent1"/>
+          </a:lnRef>
+          <a:fillRef idx="3">
+            <a:schemeClr val="accent1"/>
+          </a:fillRef>
+          <a:effectRef idx="2">
+            <a:schemeClr val="accent1"/>
+          </a:effectRef>
+          <a:fontRef idx="minor">
+            <a:schemeClr val="lt1"/>
+          </a:fontRef>
+        </p:style>
+        <p:txBody>
+          <a:bodyPr rtlCol="0" anchor="ctr"/>
+          <a:lstStyle/>
+          <a:p>
+            <a:pPr algn="ctr"/>
+          </a:p>
+        </p:txBody>
+      </p:sp>
+      <p:sp>
+        <p:nvSpPr>
+          <p:cNvPr id="23" name="TextBox 22"/>
+          <p:cNvSpPr txBox="1"/>
+          <p:nvPr/>
+        </p:nvSpPr>
+        <p:spPr>
+          <a:xfrm>
+            <a:off x="8458199" y="5074920"/>
+            <a:ext cx="3291840" cy="777240"/>
+          </a:xfrm>
+          <a:prstGeom prst="rect">
+            <a:avLst/>
+          </a:prstGeom>
+          <a:noFill/>
+        </p:spPr>
+        <p:txBody>
+          <a:bodyPr wrap="square">
+            <a:spAutoFit/>
+          </a:bodyPr>
+          <a:lstStyle/>
+          <a:p>
+            <a:pPr algn="l"/>
+            <a:r>
+              <a:rPr sz="1500" b="0" i="1">
+                <a:solidFill>
+                  <a:srgbClr val="48CAE4"/>
+                </a:solidFill>
+                <a:latin typeface="Calibri"/>
+              </a:rPr>
+              <a:t>From data to decision
+in seconds.</a:t>
             </a:r>
           </a:p>
         </p:txBody>
@@ -5954,7 +6589,7 @@
     <p:bg>
       <p:bgPr>
         <a:solidFill>
-          <a:srgbClr val="0D1B2A"/>
+          <a:srgbClr val="0A1422"/>
         </a:solidFill>
         <a:effectLst/>
       </p:bgPr>
@@ -5975,7 +6610,7 @@
         <p:spPr>
           <a:xfrm>
             <a:off x="0" y="0"/>
-            <a:ext cx="73152" cy="6858000"/>
+            <a:ext cx="64008" cy="6858000"/>
           </a:xfrm>
           <a:prstGeom prst="rect">
             <a:avLst/>
@@ -6017,8 +6652,8 @@
         </p:nvSpPr>
         <p:spPr>
           <a:xfrm>
-            <a:off x="457200" y="365760"/>
-            <a:ext cx="9144000" cy="548640"/>
+            <a:off x="411480" y="274320"/>
+            <a:ext cx="9144000" cy="411480"/>
           </a:xfrm>
           <a:prstGeom prst="rect">
             <a:avLst/>
@@ -6033,13 +6668,13 @@
           <a:p>
             <a:pPr algn="l"/>
             <a:r>
-              <a:rPr sz="1300" b="1" i="0">
+              <a:rPr sz="1200" b="1" i="0">
                 <a:solidFill>
                   <a:srgbClr val="00B4D8"/>
                 </a:solidFill>
                 <a:latin typeface="Calibri"/>
               </a:rPr>
-              <a:t>CAPABILITIES</a:t>
+              <a:t>CREATIVITY &amp; INNOVATION</a:t>
             </a:r>
           </a:p>
         </p:txBody>
@@ -6052,8 +6687,8 @@
         </p:nvSpPr>
         <p:spPr>
           <a:xfrm>
-            <a:off x="457200" y="868680"/>
-            <a:ext cx="8229600" cy="685800"/>
+            <a:off x="411480" y="777240"/>
+            <a:ext cx="10058400" cy="777240"/>
           </a:xfrm>
           <a:prstGeom prst="rect">
             <a:avLst/>
@@ -6068,13 +6703,13 @@
           <a:p>
             <a:pPr algn="l"/>
             <a:r>
-              <a:rPr sz="3600" b="1" i="0">
+              <a:rPr sz="4000" b="1" i="0">
                 <a:solidFill>
                   <a:srgbClr val="FFFFFF"/>
                 </a:solidFill>
                 <a:latin typeface="Calibri"/>
               </a:rPr>
-              <a:t>Five AI-powered features</a:t>
+              <a:t>What makes this genuinely different.</a:t>
             </a:r>
           </a:p>
         </p:txBody>
@@ -6087,8 +6722,8 @@
         </p:nvSpPr>
         <p:spPr>
           <a:xfrm>
-            <a:off x="457200" y="1664208"/>
-            <a:ext cx="1371600" cy="45720"/>
+            <a:off x="411480" y="1691640"/>
+            <a:ext cx="1828800" cy="50292"/>
           </a:xfrm>
           <a:prstGeom prst="rect">
             <a:avLst/>
@@ -6130,14 +6765,14 @@
         </p:nvSpPr>
         <p:spPr>
           <a:xfrm>
-            <a:off x="457200" y="1920240"/>
-            <a:ext cx="10972800" cy="749808"/>
+            <a:off x="411480" y="1920240"/>
+            <a:ext cx="11338560" cy="1024128"/>
           </a:xfrm>
           <a:prstGeom prst="rect">
             <a:avLst/>
           </a:prstGeom>
           <a:solidFill>
-            <a:srgbClr val="14263A"/>
+            <a:srgbClr val="122235"/>
           </a:solidFill>
           <a:ln>
             <a:noFill/>
@@ -6173,14 +6808,14 @@
         </p:nvSpPr>
         <p:spPr>
           <a:xfrm>
-            <a:off x="457200" y="1920240"/>
-            <a:ext cx="73152" cy="749808"/>
+            <a:off x="411480" y="1920240"/>
+            <a:ext cx="64008" cy="1024128"/>
           </a:xfrm>
           <a:prstGeom prst="rect">
             <a:avLst/>
           </a:prstGeom>
           <a:solidFill>
-            <a:srgbClr val="00B4D8"/>
+            <a:srgbClr val="06D6A0"/>
           </a:solidFill>
           <a:ln>
             <a:noFill/>
@@ -6216,8 +6851,8 @@
         </p:nvSpPr>
         <p:spPr>
           <a:xfrm>
-            <a:off x="685800" y="2029968"/>
-            <a:ext cx="2926080" cy="502920"/>
+            <a:off x="594360" y="2066544"/>
+            <a:ext cx="3200400" cy="502920"/>
           </a:xfrm>
           <a:prstGeom prst="rect">
             <a:avLst/>
@@ -6238,7 +6873,7 @@
                 </a:solidFill>
                 <a:latin typeface="Calibri"/>
               </a:rPr>
-              <a:t>AI Analysis</a:t>
+              <a:t>Multi-agent pipeline from scratch</a:t>
             </a:r>
           </a:p>
         </p:txBody>
@@ -6251,8 +6886,8 @@
         </p:nvSpPr>
         <p:spPr>
           <a:xfrm>
-            <a:off x="3474720" y="2048256"/>
-            <a:ext cx="7772400" cy="457200"/>
+            <a:off x="3657600" y="2084832"/>
+            <a:ext cx="7863840" cy="475488"/>
           </a:xfrm>
           <a:prstGeom prst="rect">
             <a:avLst/>
@@ -6269,11 +6904,11 @@
             <a:r>
               <a:rPr sz="1700" b="0" i="0">
                 <a:solidFill>
-                  <a:srgbClr val="B8D4E8"/>
+                  <a:srgbClr val="B0CEE6"/>
                 </a:solidFill>
                 <a:latin typeface="Calibri"/>
               </a:rPr>
-              <a:t>8-agent CrewAI pipeline — metrics, charts, trend reports, QA score</a:t>
+              <a:t>Not a wrapper around ChatGPT. 8 purpose-built agents — context, cleaner, prompt engineer, analyst, sports scientist, trend analyzer, formatter, QA critic — each with a defined role and passing context forward</a:t>
             </a:r>
           </a:p>
         </p:txBody>
@@ -6286,14 +6921,14 @@
         </p:nvSpPr>
         <p:spPr>
           <a:xfrm>
-            <a:off x="457200" y="2834640"/>
-            <a:ext cx="10972800" cy="749808"/>
+            <a:off x="411480" y="3035808"/>
+            <a:ext cx="11338560" cy="1024128"/>
           </a:xfrm>
           <a:prstGeom prst="rect">
             <a:avLst/>
           </a:prstGeom>
           <a:solidFill>
-            <a:srgbClr val="14263A"/>
+            <a:srgbClr val="122235"/>
           </a:solidFill>
           <a:ln>
             <a:noFill/>
@@ -6329,14 +6964,14 @@
         </p:nvSpPr>
         <p:spPr>
           <a:xfrm>
-            <a:off x="457200" y="2834640"/>
-            <a:ext cx="73152" cy="749808"/>
+            <a:off x="411480" y="3035808"/>
+            <a:ext cx="64008" cy="1024128"/>
           </a:xfrm>
           <a:prstGeom prst="rect">
             <a:avLst/>
           </a:prstGeom>
           <a:solidFill>
-            <a:srgbClr val="00B4D8"/>
+            <a:srgbClr val="06D6A0"/>
           </a:solidFill>
           <a:ln>
             <a:noFill/>
@@ -6372,8 +7007,8 @@
         </p:nvSpPr>
         <p:spPr>
           <a:xfrm>
-            <a:off x="685800" y="2944368"/>
-            <a:ext cx="2926080" cy="502920"/>
+            <a:off x="594360" y="3182112"/>
+            <a:ext cx="3200400" cy="502920"/>
           </a:xfrm>
           <a:prstGeom prst="rect">
             <a:avLst/>
@@ -6394,7 +7029,7 @@
                 </a:solidFill>
                 <a:latin typeface="Calibri"/>
               </a:rPr>
-              <a:t>AI Coach</a:t>
+              <a:t>Free alternatives to $15–18/mo subscriptions</a:t>
             </a:r>
           </a:p>
         </p:txBody>
@@ -6407,8 +7042,8 @@
         </p:nvSpPr>
         <p:spPr>
           <a:xfrm>
-            <a:off x="3474720" y="2962656"/>
-            <a:ext cx="7772400" cy="457200"/>
+            <a:off x="3657600" y="3200400"/>
+            <a:ext cx="7863840" cy="475488"/>
           </a:xfrm>
           <a:prstGeom prst="rect">
             <a:avLst/>
@@ -6425,11 +7060,11 @@
             <a:r>
               <a:rPr sz="1700" b="0" i="0">
                 <a:solidFill>
-                  <a:srgbClr val="B8D4E8"/>
+                  <a:srgbClr val="B0CEE6"/>
                 </a:solidFill>
                 <a:latin typeface="Calibri"/>
               </a:rPr>
-              <a:t>Goal → adaptive weekly plan that updates as your real workouts come in</a:t>
+              <a:t>Whoop and Oura charge monthly fees just for a recovery score. This platform computes the same Readiness Score — HRV trend, resting HR, sleep quality, acute:chronic load — deterministically, at zero cost, from any data source</a:t>
             </a:r>
           </a:p>
         </p:txBody>
@@ -6442,14 +7077,14 @@
         </p:nvSpPr>
         <p:spPr>
           <a:xfrm>
-            <a:off x="457200" y="3749039"/>
-            <a:ext cx="10972800" cy="749808"/>
+            <a:off x="411480" y="4151376"/>
+            <a:ext cx="11338560" cy="1024128"/>
           </a:xfrm>
           <a:prstGeom prst="rect">
             <a:avLst/>
           </a:prstGeom>
           <a:solidFill>
-            <a:srgbClr val="14263A"/>
+            <a:srgbClr val="122235"/>
           </a:solidFill>
           <a:ln>
             <a:noFill/>
@@ -6485,14 +7120,14 @@
         </p:nvSpPr>
         <p:spPr>
           <a:xfrm>
-            <a:off x="457200" y="3749039"/>
-            <a:ext cx="73152" cy="749808"/>
+            <a:off x="411480" y="4151376"/>
+            <a:ext cx="64008" cy="1024128"/>
           </a:xfrm>
           <a:prstGeom prst="rect">
             <a:avLst/>
           </a:prstGeom>
           <a:solidFill>
-            <a:srgbClr val="00B4D8"/>
+            <a:srgbClr val="06D6A0"/>
           </a:solidFill>
           <a:ln>
             <a:noFill/>
@@ -6528,8 +7163,8 @@
         </p:nvSpPr>
         <p:spPr>
           <a:xfrm>
-            <a:off x="685800" y="3858768"/>
-            <a:ext cx="2926080" cy="502920"/>
+            <a:off x="594360" y="4297680"/>
+            <a:ext cx="3200400" cy="502920"/>
           </a:xfrm>
           <a:prstGeom prst="rect">
             <a:avLst/>
@@ -6550,7 +7185,7 @@
                 </a:solidFill>
                 <a:latin typeface="Calibri"/>
               </a:rPr>
-              <a:t>Readiness Score</a:t>
+              <a:t>Universal import — any device, any app</a:t>
             </a:r>
           </a:p>
         </p:txBody>
@@ -6563,8 +7198,8 @@
         </p:nvSpPr>
         <p:spPr>
           <a:xfrm>
-            <a:off x="3474720" y="3877055"/>
-            <a:ext cx="7772400" cy="457200"/>
+            <a:off x="3657600" y="4315968"/>
+            <a:ext cx="7863840" cy="475488"/>
           </a:xfrm>
           <a:prstGeom prst="rect">
             <a:avLst/>
@@ -6581,11 +7216,11 @@
             <a:r>
               <a:rPr sz="1700" b="0" i="0">
                 <a:solidFill>
-                  <a:srgbClr val="B8D4E8"/>
+                  <a:srgbClr val="B0CEE6"/>
                 </a:solidFill>
                 <a:latin typeface="Calibri"/>
               </a:rPr>
-              <a:t>HRV + resting HR + sleep + training load → daily recovery score</a:t>
+              <a:t>Most platforms lock you into their ecosystem. This reads .fit, .tcx, .gpx from 13+ sources and attributes every row to its device — Garmin looks different from Apple Watch. The AI knows the difference</a:t>
             </a:r>
           </a:p>
         </p:txBody>
@@ -6598,14 +7233,14 @@
         </p:nvSpPr>
         <p:spPr>
           <a:xfrm>
-            <a:off x="457200" y="4663440"/>
-            <a:ext cx="10972800" cy="749808"/>
+            <a:off x="411480" y="5266944"/>
+            <a:ext cx="11338560" cy="1024128"/>
           </a:xfrm>
           <a:prstGeom prst="rect">
             <a:avLst/>
           </a:prstGeom>
           <a:solidFill>
-            <a:srgbClr val="14263A"/>
+            <a:srgbClr val="122235"/>
           </a:solidFill>
           <a:ln>
             <a:noFill/>
@@ -6641,14 +7276,14 @@
         </p:nvSpPr>
         <p:spPr>
           <a:xfrm>
-            <a:off x="457200" y="4663440"/>
-            <a:ext cx="73152" cy="749808"/>
+            <a:off x="411480" y="5266944"/>
+            <a:ext cx="64008" cy="1024128"/>
           </a:xfrm>
           <a:prstGeom prst="rect">
             <a:avLst/>
           </a:prstGeom>
           <a:solidFill>
-            <a:srgbClr val="00B4D8"/>
+            <a:srgbClr val="06D6A0"/>
           </a:solidFill>
           <a:ln>
             <a:noFill/>
@@ -6684,8 +7319,8 @@
         </p:nvSpPr>
         <p:spPr>
           <a:xfrm>
-            <a:off x="685800" y="4773168"/>
-            <a:ext cx="2926080" cy="502920"/>
+            <a:off x="594360" y="5413248"/>
+            <a:ext cx="3200400" cy="502920"/>
           </a:xfrm>
           <a:prstGeom prst="rect">
             <a:avLst/>
@@ -6706,7 +7341,7 @@
                 </a:solidFill>
                 <a:latin typeface="Calibri"/>
               </a:rPr>
-              <a:t>Health Watchdog</a:t>
+              <a:t>Light + heavy AI on the same platform</a:t>
             </a:r>
           </a:p>
         </p:txBody>
@@ -6719,8 +7354,8 @@
         </p:nvSpPr>
         <p:spPr>
           <a:xfrm>
-            <a:off x="3474720" y="4791455"/>
-            <a:ext cx="7772400" cy="457200"/>
+            <a:off x="3657600" y="5431536"/>
+            <a:ext cx="7863840" cy="475488"/>
           </a:xfrm>
           <a:prstGeom prst="rect">
             <a:avLst/>
@@ -6737,167 +7372,11 @@
             <a:r>
               <a:rPr sz="1700" b="0" i="0">
                 <a:solidFill>
-                  <a:srgbClr val="B8D4E8"/>
+                  <a:srgbClr val="B0CEE6"/>
                 </a:solidFill>
                 <a:latin typeface="Calibri"/>
               </a:rPr>
-              <a:t>Proactive alerts: rising HR, dropping HRV, overtraining spikes</a:t>
-            </a:r>
-          </a:p>
-        </p:txBody>
-      </p:sp>
-      <p:sp>
-        <p:nvSpPr>
-          <p:cNvPr id="22" name="Rectangle 21"/>
-          <p:cNvSpPr/>
-          <p:nvPr/>
-        </p:nvSpPr>
-        <p:spPr>
-          <a:xfrm>
-            <a:off x="457200" y="5577840"/>
-            <a:ext cx="10972800" cy="749808"/>
-          </a:xfrm>
-          <a:prstGeom prst="rect">
-            <a:avLst/>
-          </a:prstGeom>
-          <a:solidFill>
-            <a:srgbClr val="14263A"/>
-          </a:solidFill>
-          <a:ln>
-            <a:noFill/>
-          </a:ln>
-        </p:spPr>
-        <p:style>
-          <a:lnRef idx="1">
-            <a:schemeClr val="accent1"/>
-          </a:lnRef>
-          <a:fillRef idx="3">
-            <a:schemeClr val="accent1"/>
-          </a:fillRef>
-          <a:effectRef idx="2">
-            <a:schemeClr val="accent1"/>
-          </a:effectRef>
-          <a:fontRef idx="minor">
-            <a:schemeClr val="lt1"/>
-          </a:fontRef>
-        </p:style>
-        <p:txBody>
-          <a:bodyPr rtlCol="0" anchor="ctr"/>
-          <a:lstStyle/>
-          <a:p>
-            <a:pPr algn="ctr"/>
-          </a:p>
-        </p:txBody>
-      </p:sp>
-      <p:sp>
-        <p:nvSpPr>
-          <p:cNvPr id="23" name="Rectangle 22"/>
-          <p:cNvSpPr/>
-          <p:nvPr/>
-        </p:nvSpPr>
-        <p:spPr>
-          <a:xfrm>
-            <a:off x="457200" y="5577840"/>
-            <a:ext cx="73152" cy="749808"/>
-          </a:xfrm>
-          <a:prstGeom prst="rect">
-            <a:avLst/>
-          </a:prstGeom>
-          <a:solidFill>
-            <a:srgbClr val="00B4D8"/>
-          </a:solidFill>
-          <a:ln>
-            <a:noFill/>
-          </a:ln>
-        </p:spPr>
-        <p:style>
-          <a:lnRef idx="1">
-            <a:schemeClr val="accent1"/>
-          </a:lnRef>
-          <a:fillRef idx="3">
-            <a:schemeClr val="accent1"/>
-          </a:fillRef>
-          <a:effectRef idx="2">
-            <a:schemeClr val="accent1"/>
-          </a:effectRef>
-          <a:fontRef idx="minor">
-            <a:schemeClr val="lt1"/>
-          </a:fontRef>
-        </p:style>
-        <p:txBody>
-          <a:bodyPr rtlCol="0" anchor="ctr"/>
-          <a:lstStyle/>
-          <a:p>
-            <a:pPr algn="ctr"/>
-          </a:p>
-        </p:txBody>
-      </p:sp>
-      <p:sp>
-        <p:nvSpPr>
-          <p:cNvPr id="24" name="TextBox 23"/>
-          <p:cNvSpPr txBox="1"/>
-          <p:nvPr/>
-        </p:nvSpPr>
-        <p:spPr>
-          <a:xfrm>
-            <a:off x="685800" y="5687568"/>
-            <a:ext cx="2926080" cy="502920"/>
-          </a:xfrm>
-          <a:prstGeom prst="rect">
-            <a:avLst/>
-          </a:prstGeom>
-          <a:noFill/>
-        </p:spPr>
-        <p:txBody>
-          <a:bodyPr wrap="square">
-            <a:spAutoFit/>
-          </a:bodyPr>
-          <a:lstStyle/>
-          <a:p>
-            <a:pPr algn="l"/>
-            <a:r>
-              <a:rPr sz="1800" b="1" i="0">
-                <a:solidFill>
-                  <a:srgbClr val="48CAE4"/>
-                </a:solidFill>
-                <a:latin typeface="Calibri"/>
-              </a:rPr>
-              <a:t>Chat</a:t>
-            </a:r>
-          </a:p>
-        </p:txBody>
-      </p:sp>
-      <p:sp>
-        <p:nvSpPr>
-          <p:cNvPr id="25" name="TextBox 24"/>
-          <p:cNvSpPr txBox="1"/>
-          <p:nvPr/>
-        </p:nvSpPr>
-        <p:spPr>
-          <a:xfrm>
-            <a:off x="3474720" y="5705855"/>
-            <a:ext cx="7772400" cy="457200"/>
-          </a:xfrm>
-          <a:prstGeom prst="rect">
-            <a:avLst/>
-          </a:prstGeom>
-          <a:noFill/>
-        </p:spPr>
-        <p:txBody>
-          <a:bodyPr wrap="square">
-            <a:spAutoFit/>
-          </a:bodyPr>
-          <a:lstStyle/>
-          <a:p>
-            <a:pPr algn="l"/>
-            <a:r>
-              <a:rPr sz="1700" b="0" i="0">
-                <a:solidFill>
-                  <a:srgbClr val="B8D4E8"/>
-                </a:solidFill>
-                <a:latin typeface="Calibri"/>
-              </a:rPr>
-              <a:t>Conversational — ask anything, answers grounded in your own history</a:t>
+              <a:t>Heavy 8-agent analysis in a HuggingFace Space; lightweight Coach, Chat, and Watchdog on the always-on Vercel backend via a custom multi-model failover router (llm_lite.py) with a 200-call/day guardrail</a:t>
             </a:r>
           </a:p>
         </p:txBody>
@@ -6916,7 +7395,7 @@
     <p:bg>
       <p:bgPr>
         <a:solidFill>
-          <a:srgbClr val="0D1B2A"/>
+          <a:srgbClr val="0A1422"/>
         </a:solidFill>
         <a:effectLst/>
       </p:bgPr>
@@ -6937,7 +7416,7 @@
         <p:spPr>
           <a:xfrm>
             <a:off x="0" y="0"/>
-            <a:ext cx="73152" cy="6858000"/>
+            <a:ext cx="64008" cy="6858000"/>
           </a:xfrm>
           <a:prstGeom prst="rect">
             <a:avLst/>
@@ -6979,8 +7458,8 @@
         </p:nvSpPr>
         <p:spPr>
           <a:xfrm>
-            <a:off x="457200" y="365760"/>
-            <a:ext cx="9144000" cy="548640"/>
+            <a:off x="411480" y="274320"/>
+            <a:ext cx="9144000" cy="411480"/>
           </a:xfrm>
           <a:prstGeom prst="rect">
             <a:avLst/>
@@ -6995,13 +7474,13 @@
           <a:p>
             <a:pPr algn="l"/>
             <a:r>
-              <a:rPr sz="1300" b="1" i="0">
+              <a:rPr sz="1200" b="1" i="0">
                 <a:solidFill>
                   <a:srgbClr val="00B4D8"/>
                 </a:solidFill>
                 <a:latin typeface="Calibri"/>
               </a:rPr>
-              <a:t>HOW IT WORKS</a:t>
+              <a:t>WHAT IT DOES</a:t>
             </a:r>
           </a:p>
         </p:txBody>
@@ -7014,7 +7493,7 @@
         </p:nvSpPr>
         <p:spPr>
           <a:xfrm>
-            <a:off x="457200" y="868680"/>
+            <a:off x="411480" y="777240"/>
             <a:ext cx="8229600" cy="685800"/>
           </a:xfrm>
           <a:prstGeom prst="rect">
@@ -7030,13 +7509,13 @@
           <a:p>
             <a:pPr algn="l"/>
             <a:r>
-              <a:rPr sz="3600" b="1" i="0">
+              <a:rPr sz="4000" b="1" i="0">
                 <a:solidFill>
                   <a:srgbClr val="FFFFFF"/>
                 </a:solidFill>
                 <a:latin typeface="Calibri"/>
               </a:rPr>
-              <a:t>The 8-Agent Pipeline</a:t>
+              <a:t>Five AI-powered capabilities.</a:t>
             </a:r>
           </a:p>
         </p:txBody>
@@ -7049,8 +7528,8 @@
         </p:nvSpPr>
         <p:spPr>
           <a:xfrm>
-            <a:off x="457200" y="1664208"/>
-            <a:ext cx="1188720" cy="45720"/>
+            <a:off x="411480" y="1600200"/>
+            <a:ext cx="1463040" cy="50292"/>
           </a:xfrm>
           <a:prstGeom prst="rect">
             <a:avLst/>
@@ -7092,14 +7571,14 @@
         </p:nvSpPr>
         <p:spPr>
           <a:xfrm>
-            <a:off x="365760" y="2057400"/>
-            <a:ext cx="1325880" cy="1005840"/>
+            <a:off x="411480" y="1828800"/>
+            <a:ext cx="11338560" cy="859536"/>
           </a:xfrm>
           <a:prstGeom prst="rect">
             <a:avLst/>
           </a:prstGeom>
           <a:solidFill>
-            <a:srgbClr val="14263A"/>
+            <a:srgbClr val="122235"/>
           </a:solidFill>
           <a:ln>
             <a:noFill/>
@@ -7135,8 +7614,8 @@
         </p:nvSpPr>
         <p:spPr>
           <a:xfrm>
-            <a:off x="365760" y="2057400"/>
-            <a:ext cx="1325880" cy="64008"/>
+            <a:off x="411480" y="1828800"/>
+            <a:ext cx="64008" cy="859536"/>
           </a:xfrm>
           <a:prstGeom prst="rect">
             <a:avLst/>
@@ -7178,8 +7657,8 @@
         </p:nvSpPr>
         <p:spPr>
           <a:xfrm>
-            <a:off x="438912" y="2148840"/>
-            <a:ext cx="274320" cy="347472"/>
+            <a:off x="594360" y="1975104"/>
+            <a:ext cx="3200400" cy="502920"/>
           </a:xfrm>
           <a:prstGeom prst="rect">
             <a:avLst/>
@@ -7194,13 +7673,13 @@
           <a:p>
             <a:pPr algn="l"/>
             <a:r>
-              <a:rPr sz="1300" b="1" i="0">
+              <a:rPr sz="1800" b="1" i="0">
                 <a:solidFill>
-                  <a:srgbClr val="00B4D8"/>
+                  <a:srgbClr val="48CAE4"/>
                 </a:solidFill>
                 <a:latin typeface="Calibri"/>
               </a:rPr>
-              <a:t>1</a:t>
+              <a:t>AI Analysis</a:t>
             </a:r>
           </a:p>
         </p:txBody>
@@ -7213,8 +7692,8 @@
         </p:nvSpPr>
         <p:spPr>
           <a:xfrm>
-            <a:off x="457200" y="2441448"/>
-            <a:ext cx="1188720" cy="594360"/>
+            <a:off x="3657600" y="1993392"/>
+            <a:ext cx="7863840" cy="475488"/>
           </a:xfrm>
           <a:prstGeom prst="rect">
             <a:avLst/>
@@ -7229,68 +7708,33 @@
           <a:p>
             <a:pPr algn="l"/>
             <a:r>
-              <a:rPr sz="1400" b="1" i="0">
+              <a:rPr sz="1700" b="0" i="0">
                 <a:solidFill>
-                  <a:srgbClr val="FFFFFF"/>
+                  <a:srgbClr val="B0CEE6"/>
                 </a:solidFill>
                 <a:latin typeface="Calibri"/>
               </a:rPr>
-              <a:t>Context</a:t>
-            </a:r>
-          </a:p>
-        </p:txBody>
-      </p:sp>
-      <p:sp>
-        <p:nvSpPr>
-          <p:cNvPr id="10" name="TextBox 9"/>
-          <p:cNvSpPr txBox="1"/>
-          <p:nvPr/>
-        </p:nvSpPr>
-        <p:spPr>
-          <a:xfrm>
-            <a:off x="1691640" y="2377440"/>
-            <a:ext cx="109728" cy="411480"/>
-          </a:xfrm>
-          <a:prstGeom prst="rect">
-            <a:avLst/>
-          </a:prstGeom>
-          <a:noFill/>
-        </p:spPr>
-        <p:txBody>
-          <a:bodyPr wrap="square">
-            <a:spAutoFit/>
-          </a:bodyPr>
-          <a:lstStyle/>
-          <a:p>
-            <a:pPr algn="ctr"/>
-            <a:r>
-              <a:rPr sz="1400" b="1" i="0">
-                <a:solidFill>
-                  <a:srgbClr val="6088A8"/>
-                </a:solidFill>
-                <a:latin typeface="Calibri"/>
-              </a:rPr>
-              <a:t>→</a:t>
-            </a:r>
-          </a:p>
-        </p:txBody>
-      </p:sp>
-      <p:sp>
-        <p:nvSpPr>
-          <p:cNvPr id="11" name="Rectangle 10"/>
+              <a:t>8-agent CrewAI pipeline → metrics, charts, trends, QA-scored report</a:t>
+            </a:r>
+          </a:p>
+        </p:txBody>
+      </p:sp>
+      <p:sp>
+        <p:nvSpPr>
+          <p:cNvPr id="10" name="Rectangle 9"/>
           <p:cNvSpPr/>
           <p:nvPr/>
         </p:nvSpPr>
         <p:spPr>
           <a:xfrm>
-            <a:off x="1746504" y="2057400"/>
-            <a:ext cx="1325880" cy="1005840"/>
+            <a:off x="411480" y="2779776"/>
+            <a:ext cx="11338560" cy="859536"/>
           </a:xfrm>
           <a:prstGeom prst="rect">
             <a:avLst/>
           </a:prstGeom>
           <a:solidFill>
-            <a:srgbClr val="14263A"/>
+            <a:srgbClr val="122235"/>
           </a:solidFill>
           <a:ln>
             <a:noFill/>
@@ -7320,205 +7764,14 @@
       </p:sp>
       <p:sp>
         <p:nvSpPr>
-          <p:cNvPr id="12" name="Rectangle 11"/>
+          <p:cNvPr id="11" name="Rectangle 10"/>
           <p:cNvSpPr/>
           <p:nvPr/>
         </p:nvSpPr>
         <p:spPr>
           <a:xfrm>
-            <a:off x="1746504" y="2057400"/>
-            <a:ext cx="1325880" cy="64008"/>
-          </a:xfrm>
-          <a:prstGeom prst="rect">
-            <a:avLst/>
-          </a:prstGeom>
-          <a:solidFill>
-            <a:srgbClr val="48CAE4"/>
-          </a:solidFill>
-          <a:ln>
-            <a:noFill/>
-          </a:ln>
-        </p:spPr>
-        <p:style>
-          <a:lnRef idx="1">
-            <a:schemeClr val="accent1"/>
-          </a:lnRef>
-          <a:fillRef idx="3">
-            <a:schemeClr val="accent1"/>
-          </a:fillRef>
-          <a:effectRef idx="2">
-            <a:schemeClr val="accent1"/>
-          </a:effectRef>
-          <a:fontRef idx="minor">
-            <a:schemeClr val="lt1"/>
-          </a:fontRef>
-        </p:style>
-        <p:txBody>
-          <a:bodyPr rtlCol="0" anchor="ctr"/>
-          <a:lstStyle/>
-          <a:p>
-            <a:pPr algn="ctr"/>
-          </a:p>
-        </p:txBody>
-      </p:sp>
-      <p:sp>
-        <p:nvSpPr>
-          <p:cNvPr id="13" name="TextBox 12"/>
-          <p:cNvSpPr txBox="1"/>
-          <p:nvPr/>
-        </p:nvSpPr>
-        <p:spPr>
-          <a:xfrm>
-            <a:off x="1819656" y="2148840"/>
-            <a:ext cx="274320" cy="347472"/>
-          </a:xfrm>
-          <a:prstGeom prst="rect">
-            <a:avLst/>
-          </a:prstGeom>
-          <a:noFill/>
-        </p:spPr>
-        <p:txBody>
-          <a:bodyPr wrap="square">
-            <a:spAutoFit/>
-          </a:bodyPr>
-          <a:lstStyle/>
-          <a:p>
-            <a:pPr algn="l"/>
-            <a:r>
-              <a:rPr sz="1300" b="1" i="0">
-                <a:solidFill>
-                  <a:srgbClr val="48CAE4"/>
-                </a:solidFill>
-                <a:latin typeface="Calibri"/>
-              </a:rPr>
-              <a:t>2</a:t>
-            </a:r>
-          </a:p>
-        </p:txBody>
-      </p:sp>
-      <p:sp>
-        <p:nvSpPr>
-          <p:cNvPr id="14" name="TextBox 13"/>
-          <p:cNvSpPr txBox="1"/>
-          <p:nvPr/>
-        </p:nvSpPr>
-        <p:spPr>
-          <a:xfrm>
-            <a:off x="1837944" y="2441448"/>
-            <a:ext cx="1188720" cy="594360"/>
-          </a:xfrm>
-          <a:prstGeom prst="rect">
-            <a:avLst/>
-          </a:prstGeom>
-          <a:noFill/>
-        </p:spPr>
-        <p:txBody>
-          <a:bodyPr wrap="square">
-            <a:spAutoFit/>
-          </a:bodyPr>
-          <a:lstStyle/>
-          <a:p>
-            <a:pPr algn="l"/>
-            <a:r>
-              <a:rPr sz="1400" b="1" i="0">
-                <a:solidFill>
-                  <a:srgbClr val="FFFFFF"/>
-                </a:solidFill>
-                <a:latin typeface="Calibri"/>
-              </a:rPr>
-              <a:t>Cleaner</a:t>
-            </a:r>
-          </a:p>
-        </p:txBody>
-      </p:sp>
-      <p:sp>
-        <p:nvSpPr>
-          <p:cNvPr id="15" name="TextBox 14"/>
-          <p:cNvSpPr txBox="1"/>
-          <p:nvPr/>
-        </p:nvSpPr>
-        <p:spPr>
-          <a:xfrm>
-            <a:off x="3072384" y="2377440"/>
-            <a:ext cx="109728" cy="411480"/>
-          </a:xfrm>
-          <a:prstGeom prst="rect">
-            <a:avLst/>
-          </a:prstGeom>
-          <a:noFill/>
-        </p:spPr>
-        <p:txBody>
-          <a:bodyPr wrap="square">
-            <a:spAutoFit/>
-          </a:bodyPr>
-          <a:lstStyle/>
-          <a:p>
-            <a:pPr algn="ctr"/>
-            <a:r>
-              <a:rPr sz="1400" b="1" i="0">
-                <a:solidFill>
-                  <a:srgbClr val="6088A8"/>
-                </a:solidFill>
-                <a:latin typeface="Calibri"/>
-              </a:rPr>
-              <a:t>→</a:t>
-            </a:r>
-          </a:p>
-        </p:txBody>
-      </p:sp>
-      <p:sp>
-        <p:nvSpPr>
-          <p:cNvPr id="16" name="Rectangle 15"/>
-          <p:cNvSpPr/>
-          <p:nvPr/>
-        </p:nvSpPr>
-        <p:spPr>
-          <a:xfrm>
-            <a:off x="3127248" y="2057400"/>
-            <a:ext cx="1325880" cy="1005840"/>
-          </a:xfrm>
-          <a:prstGeom prst="rect">
-            <a:avLst/>
-          </a:prstGeom>
-          <a:solidFill>
-            <a:srgbClr val="14263A"/>
-          </a:solidFill>
-          <a:ln>
-            <a:noFill/>
-          </a:ln>
-        </p:spPr>
-        <p:style>
-          <a:lnRef idx="1">
-            <a:schemeClr val="accent1"/>
-          </a:lnRef>
-          <a:fillRef idx="3">
-            <a:schemeClr val="accent1"/>
-          </a:fillRef>
-          <a:effectRef idx="2">
-            <a:schemeClr val="accent1"/>
-          </a:effectRef>
-          <a:fontRef idx="minor">
-            <a:schemeClr val="lt1"/>
-          </a:fontRef>
-        </p:style>
-        <p:txBody>
-          <a:bodyPr rtlCol="0" anchor="ctr"/>
-          <a:lstStyle/>
-          <a:p>
-            <a:pPr algn="ctr"/>
-          </a:p>
-        </p:txBody>
-      </p:sp>
-      <p:sp>
-        <p:nvSpPr>
-          <p:cNvPr id="17" name="Rectangle 16"/>
-          <p:cNvSpPr/>
-          <p:nvPr/>
-        </p:nvSpPr>
-        <p:spPr>
-          <a:xfrm>
-            <a:off x="3127248" y="2057400"/>
-            <a:ext cx="1325880" cy="64008"/>
+            <a:off x="411480" y="2779776"/>
+            <a:ext cx="64008" cy="859536"/>
           </a:xfrm>
           <a:prstGeom prst="rect">
             <a:avLst/>
@@ -7554,14 +7807,14 @@
       </p:sp>
       <p:sp>
         <p:nvSpPr>
-          <p:cNvPr id="18" name="TextBox 17"/>
+          <p:cNvPr id="12" name="TextBox 11"/>
           <p:cNvSpPr txBox="1"/>
           <p:nvPr/>
         </p:nvSpPr>
         <p:spPr>
           <a:xfrm>
-            <a:off x="3200400" y="2148840"/>
-            <a:ext cx="274320" cy="347472"/>
+            <a:off x="594360" y="2926080"/>
+            <a:ext cx="3200400" cy="502920"/>
           </a:xfrm>
           <a:prstGeom prst="rect">
             <a:avLst/>
@@ -7576,27 +7829,27 @@
           <a:p>
             <a:pPr algn="l"/>
             <a:r>
-              <a:rPr sz="1300" b="1" i="0">
+              <a:rPr sz="1800" b="1" i="0">
                 <a:solidFill>
-                  <a:srgbClr val="00B4D8"/>
+                  <a:srgbClr val="48CAE4"/>
                 </a:solidFill>
                 <a:latin typeface="Calibri"/>
               </a:rPr>
-              <a:t>3</a:t>
-            </a:r>
-          </a:p>
-        </p:txBody>
-      </p:sp>
-      <p:sp>
-        <p:nvSpPr>
-          <p:cNvPr id="19" name="TextBox 18"/>
+              <a:t>AI Coach</a:t>
+            </a:r>
+          </a:p>
+        </p:txBody>
+      </p:sp>
+      <p:sp>
+        <p:nvSpPr>
+          <p:cNvPr id="13" name="TextBox 12"/>
           <p:cNvSpPr txBox="1"/>
           <p:nvPr/>
         </p:nvSpPr>
         <p:spPr>
           <a:xfrm>
-            <a:off x="3218688" y="2441448"/>
-            <a:ext cx="1188720" cy="594360"/>
+            <a:off x="3657600" y="2944368"/>
+            <a:ext cx="7863840" cy="475488"/>
           </a:xfrm>
           <a:prstGeom prst="rect">
             <a:avLst/>
@@ -7611,69 +7864,33 @@
           <a:p>
             <a:pPr algn="l"/>
             <a:r>
-              <a:rPr sz="1400" b="1" i="0">
+              <a:rPr sz="1700" b="0" i="0">
                 <a:solidFill>
-                  <a:srgbClr val="FFFFFF"/>
+                  <a:srgbClr val="B0CEE6"/>
                 </a:solidFill>
                 <a:latin typeface="Calibri"/>
               </a:rPr>
-              <a:t>Prompt
-Engineer</a:t>
-            </a:r>
-          </a:p>
-        </p:txBody>
-      </p:sp>
-      <p:sp>
-        <p:nvSpPr>
-          <p:cNvPr id="20" name="TextBox 19"/>
-          <p:cNvSpPr txBox="1"/>
-          <p:nvPr/>
-        </p:nvSpPr>
-        <p:spPr>
-          <a:xfrm>
-            <a:off x="4453128" y="2377440"/>
-            <a:ext cx="109728" cy="411480"/>
-          </a:xfrm>
-          <a:prstGeom prst="rect">
-            <a:avLst/>
-          </a:prstGeom>
-          <a:noFill/>
-        </p:spPr>
-        <p:txBody>
-          <a:bodyPr wrap="square">
-            <a:spAutoFit/>
-          </a:bodyPr>
-          <a:lstStyle/>
-          <a:p>
-            <a:pPr algn="ctr"/>
-            <a:r>
-              <a:rPr sz="1400" b="1" i="0">
-                <a:solidFill>
-                  <a:srgbClr val="6088A8"/>
-                </a:solidFill>
-                <a:latin typeface="Calibri"/>
-              </a:rPr>
-              <a:t>→</a:t>
-            </a:r>
-          </a:p>
-        </p:txBody>
-      </p:sp>
-      <p:sp>
-        <p:nvSpPr>
-          <p:cNvPr id="21" name="Rectangle 20"/>
+              <a:t>Set a goal → adaptive weekly plan that tracks and re-plans based on real workouts</a:t>
+            </a:r>
+          </a:p>
+        </p:txBody>
+      </p:sp>
+      <p:sp>
+        <p:nvSpPr>
+          <p:cNvPr id="14" name="Rectangle 13"/>
           <p:cNvSpPr/>
           <p:nvPr/>
         </p:nvSpPr>
         <p:spPr>
           <a:xfrm>
-            <a:off x="4507992" y="2057400"/>
-            <a:ext cx="1325880" cy="1005840"/>
+            <a:off x="411480" y="3730752"/>
+            <a:ext cx="11338560" cy="859536"/>
           </a:xfrm>
           <a:prstGeom prst="rect">
             <a:avLst/>
           </a:prstGeom>
           <a:solidFill>
-            <a:srgbClr val="14263A"/>
+            <a:srgbClr val="122235"/>
           </a:solidFill>
           <a:ln>
             <a:noFill/>
@@ -7703,205 +7920,14 @@
       </p:sp>
       <p:sp>
         <p:nvSpPr>
-          <p:cNvPr id="22" name="Rectangle 21"/>
+          <p:cNvPr id="15" name="Rectangle 14"/>
           <p:cNvSpPr/>
           <p:nvPr/>
         </p:nvSpPr>
         <p:spPr>
           <a:xfrm>
-            <a:off x="4507992" y="2057400"/>
-            <a:ext cx="1325880" cy="64008"/>
-          </a:xfrm>
-          <a:prstGeom prst="rect">
-            <a:avLst/>
-          </a:prstGeom>
-          <a:solidFill>
-            <a:srgbClr val="48CAE4"/>
-          </a:solidFill>
-          <a:ln>
-            <a:noFill/>
-          </a:ln>
-        </p:spPr>
-        <p:style>
-          <a:lnRef idx="1">
-            <a:schemeClr val="accent1"/>
-          </a:lnRef>
-          <a:fillRef idx="3">
-            <a:schemeClr val="accent1"/>
-          </a:fillRef>
-          <a:effectRef idx="2">
-            <a:schemeClr val="accent1"/>
-          </a:effectRef>
-          <a:fontRef idx="minor">
-            <a:schemeClr val="lt1"/>
-          </a:fontRef>
-        </p:style>
-        <p:txBody>
-          <a:bodyPr rtlCol="0" anchor="ctr"/>
-          <a:lstStyle/>
-          <a:p>
-            <a:pPr algn="ctr"/>
-          </a:p>
-        </p:txBody>
-      </p:sp>
-      <p:sp>
-        <p:nvSpPr>
-          <p:cNvPr id="23" name="TextBox 22"/>
-          <p:cNvSpPr txBox="1"/>
-          <p:nvPr/>
-        </p:nvSpPr>
-        <p:spPr>
-          <a:xfrm>
-            <a:off x="4581144" y="2148840"/>
-            <a:ext cx="274320" cy="347472"/>
-          </a:xfrm>
-          <a:prstGeom prst="rect">
-            <a:avLst/>
-          </a:prstGeom>
-          <a:noFill/>
-        </p:spPr>
-        <p:txBody>
-          <a:bodyPr wrap="square">
-            <a:spAutoFit/>
-          </a:bodyPr>
-          <a:lstStyle/>
-          <a:p>
-            <a:pPr algn="l"/>
-            <a:r>
-              <a:rPr sz="1300" b="1" i="0">
-                <a:solidFill>
-                  <a:srgbClr val="48CAE4"/>
-                </a:solidFill>
-                <a:latin typeface="Calibri"/>
-              </a:rPr>
-              <a:t>4</a:t>
-            </a:r>
-          </a:p>
-        </p:txBody>
-      </p:sp>
-      <p:sp>
-        <p:nvSpPr>
-          <p:cNvPr id="24" name="TextBox 23"/>
-          <p:cNvSpPr txBox="1"/>
-          <p:nvPr/>
-        </p:nvSpPr>
-        <p:spPr>
-          <a:xfrm>
-            <a:off x="4599432" y="2441448"/>
-            <a:ext cx="1188720" cy="594360"/>
-          </a:xfrm>
-          <a:prstGeom prst="rect">
-            <a:avLst/>
-          </a:prstGeom>
-          <a:noFill/>
-        </p:spPr>
-        <p:txBody>
-          <a:bodyPr wrap="square">
-            <a:spAutoFit/>
-          </a:bodyPr>
-          <a:lstStyle/>
-          <a:p>
-            <a:pPr algn="l"/>
-            <a:r>
-              <a:rPr sz="1400" b="1" i="0">
-                <a:solidFill>
-                  <a:srgbClr val="FFFFFF"/>
-                </a:solidFill>
-                <a:latin typeface="Calibri"/>
-              </a:rPr>
-              <a:t>Analyst</a:t>
-            </a:r>
-          </a:p>
-        </p:txBody>
-      </p:sp>
-      <p:sp>
-        <p:nvSpPr>
-          <p:cNvPr id="25" name="TextBox 24"/>
-          <p:cNvSpPr txBox="1"/>
-          <p:nvPr/>
-        </p:nvSpPr>
-        <p:spPr>
-          <a:xfrm>
-            <a:off x="5833872" y="2377440"/>
-            <a:ext cx="109728" cy="411480"/>
-          </a:xfrm>
-          <a:prstGeom prst="rect">
-            <a:avLst/>
-          </a:prstGeom>
-          <a:noFill/>
-        </p:spPr>
-        <p:txBody>
-          <a:bodyPr wrap="square">
-            <a:spAutoFit/>
-          </a:bodyPr>
-          <a:lstStyle/>
-          <a:p>
-            <a:pPr algn="ctr"/>
-            <a:r>
-              <a:rPr sz="1400" b="1" i="0">
-                <a:solidFill>
-                  <a:srgbClr val="6088A8"/>
-                </a:solidFill>
-                <a:latin typeface="Calibri"/>
-              </a:rPr>
-              <a:t>→</a:t>
-            </a:r>
-          </a:p>
-        </p:txBody>
-      </p:sp>
-      <p:sp>
-        <p:nvSpPr>
-          <p:cNvPr id="26" name="Rectangle 25"/>
-          <p:cNvSpPr/>
-          <p:nvPr/>
-        </p:nvSpPr>
-        <p:spPr>
-          <a:xfrm>
-            <a:off x="5888736" y="2057400"/>
-            <a:ext cx="1325880" cy="1005840"/>
-          </a:xfrm>
-          <a:prstGeom prst="rect">
-            <a:avLst/>
-          </a:prstGeom>
-          <a:solidFill>
-            <a:srgbClr val="14263A"/>
-          </a:solidFill>
-          <a:ln>
-            <a:noFill/>
-          </a:ln>
-        </p:spPr>
-        <p:style>
-          <a:lnRef idx="1">
-            <a:schemeClr val="accent1"/>
-          </a:lnRef>
-          <a:fillRef idx="3">
-            <a:schemeClr val="accent1"/>
-          </a:fillRef>
-          <a:effectRef idx="2">
-            <a:schemeClr val="accent1"/>
-          </a:effectRef>
-          <a:fontRef idx="minor">
-            <a:schemeClr val="lt1"/>
-          </a:fontRef>
-        </p:style>
-        <p:txBody>
-          <a:bodyPr rtlCol="0" anchor="ctr"/>
-          <a:lstStyle/>
-          <a:p>
-            <a:pPr algn="ctr"/>
-          </a:p>
-        </p:txBody>
-      </p:sp>
-      <p:sp>
-        <p:nvSpPr>
-          <p:cNvPr id="27" name="Rectangle 26"/>
-          <p:cNvSpPr/>
-          <p:nvPr/>
-        </p:nvSpPr>
-        <p:spPr>
-          <a:xfrm>
-            <a:off x="5888736" y="2057400"/>
-            <a:ext cx="1325880" cy="64008"/>
+            <a:off x="411480" y="3730752"/>
+            <a:ext cx="64008" cy="859536"/>
           </a:xfrm>
           <a:prstGeom prst="rect">
             <a:avLst/>
@@ -7937,14 +7963,14 @@
       </p:sp>
       <p:sp>
         <p:nvSpPr>
-          <p:cNvPr id="28" name="TextBox 27"/>
+          <p:cNvPr id="16" name="TextBox 15"/>
           <p:cNvSpPr txBox="1"/>
           <p:nvPr/>
         </p:nvSpPr>
         <p:spPr>
           <a:xfrm>
-            <a:off x="5961888" y="2148840"/>
-            <a:ext cx="274320" cy="347472"/>
+            <a:off x="594360" y="3877056"/>
+            <a:ext cx="3200400" cy="502920"/>
           </a:xfrm>
           <a:prstGeom prst="rect">
             <a:avLst/>
@@ -7959,27 +7985,27 @@
           <a:p>
             <a:pPr algn="l"/>
             <a:r>
-              <a:rPr sz="1300" b="1" i="0">
+              <a:rPr sz="1800" b="1" i="0">
                 <a:solidFill>
-                  <a:srgbClr val="00B4D8"/>
+                  <a:srgbClr val="48CAE4"/>
                 </a:solidFill>
                 <a:latin typeface="Calibri"/>
               </a:rPr>
-              <a:t>5</a:t>
-            </a:r>
-          </a:p>
-        </p:txBody>
-      </p:sp>
-      <p:sp>
-        <p:nvSpPr>
-          <p:cNvPr id="29" name="TextBox 28"/>
+              <a:t>Readiness Score</a:t>
+            </a:r>
+          </a:p>
+        </p:txBody>
+      </p:sp>
+      <p:sp>
+        <p:nvSpPr>
+          <p:cNvPr id="17" name="TextBox 16"/>
           <p:cNvSpPr txBox="1"/>
           <p:nvPr/>
         </p:nvSpPr>
         <p:spPr>
           <a:xfrm>
-            <a:off x="5980176" y="2441448"/>
-            <a:ext cx="1188720" cy="594360"/>
+            <a:off x="3657600" y="3895344"/>
+            <a:ext cx="7863840" cy="475488"/>
           </a:xfrm>
           <a:prstGeom prst="rect">
             <a:avLst/>
@@ -7994,69 +8020,33 @@
           <a:p>
             <a:pPr algn="l"/>
             <a:r>
-              <a:rPr sz="1400" b="1" i="0">
+              <a:rPr sz="1700" b="0" i="0">
                 <a:solidFill>
-                  <a:srgbClr val="FFFFFF"/>
+                  <a:srgbClr val="B0CEE6"/>
                 </a:solidFill>
                 <a:latin typeface="Calibri"/>
               </a:rPr>
-              <a:t>Sports
-Scientist</a:t>
-            </a:r>
-          </a:p>
-        </p:txBody>
-      </p:sp>
-      <p:sp>
-        <p:nvSpPr>
-          <p:cNvPr id="30" name="TextBox 29"/>
-          <p:cNvSpPr txBox="1"/>
-          <p:nvPr/>
-        </p:nvSpPr>
-        <p:spPr>
-          <a:xfrm>
-            <a:off x="7214616" y="2377440"/>
-            <a:ext cx="109728" cy="411480"/>
-          </a:xfrm>
-          <a:prstGeom prst="rect">
-            <a:avLst/>
-          </a:prstGeom>
-          <a:noFill/>
-        </p:spPr>
-        <p:txBody>
-          <a:bodyPr wrap="square">
-            <a:spAutoFit/>
-          </a:bodyPr>
-          <a:lstStyle/>
-          <a:p>
-            <a:pPr algn="ctr"/>
-            <a:r>
-              <a:rPr sz="1400" b="1" i="0">
-                <a:solidFill>
-                  <a:srgbClr val="6088A8"/>
-                </a:solidFill>
-                <a:latin typeface="Calibri"/>
-              </a:rPr>
-              <a:t>→</a:t>
-            </a:r>
-          </a:p>
-        </p:txBody>
-      </p:sp>
-      <p:sp>
-        <p:nvSpPr>
-          <p:cNvPr id="31" name="Rectangle 30"/>
+              <a:t>HRV + resting HR + sleep + training load → daily recovery number, like Whoop — free</a:t>
+            </a:r>
+          </a:p>
+        </p:txBody>
+      </p:sp>
+      <p:sp>
+        <p:nvSpPr>
+          <p:cNvPr id="18" name="Rectangle 17"/>
           <p:cNvSpPr/>
           <p:nvPr/>
         </p:nvSpPr>
         <p:spPr>
           <a:xfrm>
-            <a:off x="7269480" y="2057400"/>
-            <a:ext cx="1325880" cy="1005840"/>
+            <a:off x="411480" y="4681728"/>
+            <a:ext cx="11338560" cy="859536"/>
           </a:xfrm>
           <a:prstGeom prst="rect">
             <a:avLst/>
           </a:prstGeom>
           <a:solidFill>
-            <a:srgbClr val="14263A"/>
+            <a:srgbClr val="122235"/>
           </a:solidFill>
           <a:ln>
             <a:noFill/>
@@ -8086,206 +8076,14 @@
       </p:sp>
       <p:sp>
         <p:nvSpPr>
-          <p:cNvPr id="32" name="Rectangle 31"/>
+          <p:cNvPr id="19" name="Rectangle 18"/>
           <p:cNvSpPr/>
           <p:nvPr/>
         </p:nvSpPr>
         <p:spPr>
           <a:xfrm>
-            <a:off x="7269480" y="2057400"/>
-            <a:ext cx="1325880" cy="64008"/>
-          </a:xfrm>
-          <a:prstGeom prst="rect">
-            <a:avLst/>
-          </a:prstGeom>
-          <a:solidFill>
-            <a:srgbClr val="48CAE4"/>
-          </a:solidFill>
-          <a:ln>
-            <a:noFill/>
-          </a:ln>
-        </p:spPr>
-        <p:style>
-          <a:lnRef idx="1">
-            <a:schemeClr val="accent1"/>
-          </a:lnRef>
-          <a:fillRef idx="3">
-            <a:schemeClr val="accent1"/>
-          </a:fillRef>
-          <a:effectRef idx="2">
-            <a:schemeClr val="accent1"/>
-          </a:effectRef>
-          <a:fontRef idx="minor">
-            <a:schemeClr val="lt1"/>
-          </a:fontRef>
-        </p:style>
-        <p:txBody>
-          <a:bodyPr rtlCol="0" anchor="ctr"/>
-          <a:lstStyle/>
-          <a:p>
-            <a:pPr algn="ctr"/>
-          </a:p>
-        </p:txBody>
-      </p:sp>
-      <p:sp>
-        <p:nvSpPr>
-          <p:cNvPr id="33" name="TextBox 32"/>
-          <p:cNvSpPr txBox="1"/>
-          <p:nvPr/>
-        </p:nvSpPr>
-        <p:spPr>
-          <a:xfrm>
-            <a:off x="7342631" y="2148840"/>
-            <a:ext cx="274320" cy="347472"/>
-          </a:xfrm>
-          <a:prstGeom prst="rect">
-            <a:avLst/>
-          </a:prstGeom>
-          <a:noFill/>
-        </p:spPr>
-        <p:txBody>
-          <a:bodyPr wrap="square">
-            <a:spAutoFit/>
-          </a:bodyPr>
-          <a:lstStyle/>
-          <a:p>
-            <a:pPr algn="l"/>
-            <a:r>
-              <a:rPr sz="1300" b="1" i="0">
-                <a:solidFill>
-                  <a:srgbClr val="48CAE4"/>
-                </a:solidFill>
-                <a:latin typeface="Calibri"/>
-              </a:rPr>
-              <a:t>6</a:t>
-            </a:r>
-          </a:p>
-        </p:txBody>
-      </p:sp>
-      <p:sp>
-        <p:nvSpPr>
-          <p:cNvPr id="34" name="TextBox 33"/>
-          <p:cNvSpPr txBox="1"/>
-          <p:nvPr/>
-        </p:nvSpPr>
-        <p:spPr>
-          <a:xfrm>
-            <a:off x="7360920" y="2441448"/>
-            <a:ext cx="1188720" cy="594360"/>
-          </a:xfrm>
-          <a:prstGeom prst="rect">
-            <a:avLst/>
-          </a:prstGeom>
-          <a:noFill/>
-        </p:spPr>
-        <p:txBody>
-          <a:bodyPr wrap="square">
-            <a:spAutoFit/>
-          </a:bodyPr>
-          <a:lstStyle/>
-          <a:p>
-            <a:pPr algn="l"/>
-            <a:r>
-              <a:rPr sz="1400" b="1" i="0">
-                <a:solidFill>
-                  <a:srgbClr val="FFFFFF"/>
-                </a:solidFill>
-                <a:latin typeface="Calibri"/>
-              </a:rPr>
-              <a:t>Trend
-Analyzer</a:t>
-            </a:r>
-          </a:p>
-        </p:txBody>
-      </p:sp>
-      <p:sp>
-        <p:nvSpPr>
-          <p:cNvPr id="35" name="TextBox 34"/>
-          <p:cNvSpPr txBox="1"/>
-          <p:nvPr/>
-        </p:nvSpPr>
-        <p:spPr>
-          <a:xfrm>
-            <a:off x="8595360" y="2377440"/>
-            <a:ext cx="109728" cy="411480"/>
-          </a:xfrm>
-          <a:prstGeom prst="rect">
-            <a:avLst/>
-          </a:prstGeom>
-          <a:noFill/>
-        </p:spPr>
-        <p:txBody>
-          <a:bodyPr wrap="square">
-            <a:spAutoFit/>
-          </a:bodyPr>
-          <a:lstStyle/>
-          <a:p>
-            <a:pPr algn="ctr"/>
-            <a:r>
-              <a:rPr sz="1400" b="1" i="0">
-                <a:solidFill>
-                  <a:srgbClr val="6088A8"/>
-                </a:solidFill>
-                <a:latin typeface="Calibri"/>
-              </a:rPr>
-              <a:t>→</a:t>
-            </a:r>
-          </a:p>
-        </p:txBody>
-      </p:sp>
-      <p:sp>
-        <p:nvSpPr>
-          <p:cNvPr id="36" name="Rectangle 35"/>
-          <p:cNvSpPr/>
-          <p:nvPr/>
-        </p:nvSpPr>
-        <p:spPr>
-          <a:xfrm>
-            <a:off x="8650224" y="2057400"/>
-            <a:ext cx="1325880" cy="1005840"/>
-          </a:xfrm>
-          <a:prstGeom prst="rect">
-            <a:avLst/>
-          </a:prstGeom>
-          <a:solidFill>
-            <a:srgbClr val="14263A"/>
-          </a:solidFill>
-          <a:ln>
-            <a:noFill/>
-          </a:ln>
-        </p:spPr>
-        <p:style>
-          <a:lnRef idx="1">
-            <a:schemeClr val="accent1"/>
-          </a:lnRef>
-          <a:fillRef idx="3">
-            <a:schemeClr val="accent1"/>
-          </a:fillRef>
-          <a:effectRef idx="2">
-            <a:schemeClr val="accent1"/>
-          </a:effectRef>
-          <a:fontRef idx="minor">
-            <a:schemeClr val="lt1"/>
-          </a:fontRef>
-        </p:style>
-        <p:txBody>
-          <a:bodyPr rtlCol="0" anchor="ctr"/>
-          <a:lstStyle/>
-          <a:p>
-            <a:pPr algn="ctr"/>
-          </a:p>
-        </p:txBody>
-      </p:sp>
-      <p:sp>
-        <p:nvSpPr>
-          <p:cNvPr id="37" name="Rectangle 36"/>
-          <p:cNvSpPr/>
-          <p:nvPr/>
-        </p:nvSpPr>
-        <p:spPr>
-          <a:xfrm>
-            <a:off x="8650224" y="2057400"/>
-            <a:ext cx="1325880" cy="64008"/>
+            <a:off x="411480" y="4681728"/>
+            <a:ext cx="64008" cy="859536"/>
           </a:xfrm>
           <a:prstGeom prst="rect">
             <a:avLst/>
@@ -8321,14 +8119,14 @@
       </p:sp>
       <p:sp>
         <p:nvSpPr>
-          <p:cNvPr id="38" name="TextBox 37"/>
+          <p:cNvPr id="20" name="TextBox 19"/>
           <p:cNvSpPr txBox="1"/>
           <p:nvPr/>
         </p:nvSpPr>
         <p:spPr>
           <a:xfrm>
-            <a:off x="8723376" y="2148840"/>
-            <a:ext cx="274320" cy="347472"/>
+            <a:off x="594360" y="4828032"/>
+            <a:ext cx="3200400" cy="502920"/>
           </a:xfrm>
           <a:prstGeom prst="rect">
             <a:avLst/>
@@ -8343,27 +8141,27 @@
           <a:p>
             <a:pPr algn="l"/>
             <a:r>
-              <a:rPr sz="1300" b="1" i="0">
+              <a:rPr sz="1800" b="1" i="0">
                 <a:solidFill>
-                  <a:srgbClr val="00B4D8"/>
+                  <a:srgbClr val="48CAE4"/>
                 </a:solidFill>
                 <a:latin typeface="Calibri"/>
               </a:rPr>
-              <a:t>7</a:t>
-            </a:r>
-          </a:p>
-        </p:txBody>
-      </p:sp>
-      <p:sp>
-        <p:nvSpPr>
-          <p:cNvPr id="39" name="TextBox 38"/>
+              <a:t>Health Watchdog</a:t>
+            </a:r>
+          </a:p>
+        </p:txBody>
+      </p:sp>
+      <p:sp>
+        <p:nvSpPr>
+          <p:cNvPr id="21" name="TextBox 20"/>
           <p:cNvSpPr txBox="1"/>
           <p:nvPr/>
         </p:nvSpPr>
         <p:spPr>
           <a:xfrm>
-            <a:off x="8741664" y="2441448"/>
-            <a:ext cx="1188720" cy="594360"/>
+            <a:off x="3657600" y="4846320"/>
+            <a:ext cx="7863840" cy="475488"/>
           </a:xfrm>
           <a:prstGeom prst="rect">
             <a:avLst/>
@@ -8378,68 +8176,33 @@
           <a:p>
             <a:pPr algn="l"/>
             <a:r>
-              <a:rPr sz="1400" b="1" i="0">
+              <a:rPr sz="1700" b="0" i="0">
                 <a:solidFill>
-                  <a:srgbClr val="FFFFFF"/>
+                  <a:srgbClr val="B0CEE6"/>
                 </a:solidFill>
                 <a:latin typeface="Calibri"/>
               </a:rPr>
-              <a:t>Formatter</a:t>
-            </a:r>
-          </a:p>
-        </p:txBody>
-      </p:sp>
-      <p:sp>
-        <p:nvSpPr>
-          <p:cNvPr id="40" name="TextBox 39"/>
-          <p:cNvSpPr txBox="1"/>
-          <p:nvPr/>
-        </p:nvSpPr>
-        <p:spPr>
-          <a:xfrm>
-            <a:off x="9976104" y="2377440"/>
-            <a:ext cx="109728" cy="411480"/>
-          </a:xfrm>
-          <a:prstGeom prst="rect">
-            <a:avLst/>
-          </a:prstGeom>
-          <a:noFill/>
-        </p:spPr>
-        <p:txBody>
-          <a:bodyPr wrap="square">
-            <a:spAutoFit/>
-          </a:bodyPr>
-          <a:lstStyle/>
-          <a:p>
-            <a:pPr algn="ctr"/>
-            <a:r>
-              <a:rPr sz="1400" b="1" i="0">
-                <a:solidFill>
-                  <a:srgbClr val="6088A8"/>
-                </a:solidFill>
-                <a:latin typeface="Calibri"/>
-              </a:rPr>
-              <a:t>→</a:t>
-            </a:r>
-          </a:p>
-        </p:txBody>
-      </p:sp>
-      <p:sp>
-        <p:nvSpPr>
-          <p:cNvPr id="41" name="Rectangle 40"/>
+              <a:t>Deterministic alerts: rising resting HR, dropping HRV, acute:chronic load spike</a:t>
+            </a:r>
+          </a:p>
+        </p:txBody>
+      </p:sp>
+      <p:sp>
+        <p:nvSpPr>
+          <p:cNvPr id="22" name="Rectangle 21"/>
           <p:cNvSpPr/>
           <p:nvPr/>
         </p:nvSpPr>
         <p:spPr>
           <a:xfrm>
-            <a:off x="10030968" y="2057400"/>
-            <a:ext cx="1325880" cy="1005840"/>
+            <a:off x="411480" y="5632704"/>
+            <a:ext cx="11338560" cy="859536"/>
           </a:xfrm>
           <a:prstGeom prst="rect">
             <a:avLst/>
           </a:prstGeom>
           <a:solidFill>
-            <a:srgbClr val="14263A"/>
+            <a:srgbClr val="122235"/>
           </a:solidFill>
           <a:ln>
             <a:noFill/>
@@ -8469,20 +8232,20 @@
       </p:sp>
       <p:sp>
         <p:nvSpPr>
-          <p:cNvPr id="42" name="Rectangle 41"/>
+          <p:cNvPr id="23" name="Rectangle 22"/>
           <p:cNvSpPr/>
           <p:nvPr/>
         </p:nvSpPr>
         <p:spPr>
           <a:xfrm>
-            <a:off x="10030968" y="2057400"/>
-            <a:ext cx="1325880" cy="64008"/>
+            <a:off x="411480" y="5632704"/>
+            <a:ext cx="64008" cy="859536"/>
           </a:xfrm>
           <a:prstGeom prst="rect">
             <a:avLst/>
           </a:prstGeom>
           <a:solidFill>
-            <a:srgbClr val="48CAE4"/>
+            <a:srgbClr val="00B4D8"/>
           </a:solidFill>
           <a:ln>
             <a:noFill/>
@@ -8512,14 +8275,14 @@
       </p:sp>
       <p:sp>
         <p:nvSpPr>
-          <p:cNvPr id="43" name="TextBox 42"/>
+          <p:cNvPr id="24" name="TextBox 23"/>
           <p:cNvSpPr txBox="1"/>
           <p:nvPr/>
         </p:nvSpPr>
         <p:spPr>
           <a:xfrm>
-            <a:off x="10104120" y="2148840"/>
-            <a:ext cx="274320" cy="347472"/>
+            <a:off x="594360" y="5779008"/>
+            <a:ext cx="3200400" cy="502920"/>
           </a:xfrm>
           <a:prstGeom prst="rect">
             <a:avLst/>
@@ -8534,27 +8297,27 @@
           <a:p>
             <a:pPr algn="l"/>
             <a:r>
-              <a:rPr sz="1300" b="1" i="0">
+              <a:rPr sz="1800" b="1" i="0">
                 <a:solidFill>
                   <a:srgbClr val="48CAE4"/>
                 </a:solidFill>
                 <a:latin typeface="Calibri"/>
               </a:rPr>
-              <a:t>8</a:t>
-            </a:r>
-          </a:p>
-        </p:txBody>
-      </p:sp>
-      <p:sp>
-        <p:nvSpPr>
-          <p:cNvPr id="44" name="TextBox 43"/>
+              <a:t>Chat</a:t>
+            </a:r>
+          </a:p>
+        </p:txBody>
+      </p:sp>
+      <p:sp>
+        <p:nvSpPr>
+          <p:cNvPr id="25" name="TextBox 24"/>
           <p:cNvSpPr txBox="1"/>
           <p:nvPr/>
         </p:nvSpPr>
         <p:spPr>
           <a:xfrm>
-            <a:off x="10122408" y="2441448"/>
-            <a:ext cx="1188720" cy="594360"/>
+            <a:off x="3657600" y="5797296"/>
+            <a:ext cx="7863840" cy="475488"/>
           </a:xfrm>
           <a:prstGeom prst="rect">
             <a:avLst/>
@@ -8569,500 +8332,13 @@
           <a:p>
             <a:pPr algn="l"/>
             <a:r>
-              <a:rPr sz="1400" b="1" i="0">
+              <a:rPr sz="1700" b="0" i="0">
                 <a:solidFill>
-                  <a:srgbClr val="FFFFFF"/>
+                  <a:srgbClr val="B0CEE6"/>
                 </a:solidFill>
                 <a:latin typeface="Calibri"/>
               </a:rPr>
-              <a:t>QA Critic</a:t>
-            </a:r>
-          </a:p>
-        </p:txBody>
-      </p:sp>
-      <p:sp>
-        <p:nvSpPr>
-          <p:cNvPr id="45" name="TextBox 44"/>
-          <p:cNvSpPr txBox="1"/>
-          <p:nvPr/>
-        </p:nvSpPr>
-        <p:spPr>
-          <a:xfrm>
-            <a:off x="457200" y="3429000"/>
-            <a:ext cx="1828800" cy="365760"/>
-          </a:xfrm>
-          <a:prstGeom prst="rect">
-            <a:avLst/>
-          </a:prstGeom>
-          <a:noFill/>
-        </p:spPr>
-        <p:txBody>
-          <a:bodyPr wrap="square">
-            <a:spAutoFit/>
-          </a:bodyPr>
-          <a:lstStyle/>
-          <a:p>
-            <a:pPr algn="l"/>
-            <a:r>
-              <a:rPr sz="1300" b="1" i="0">
-                <a:solidFill>
-                  <a:srgbClr val="00B4D8"/>
-                </a:solidFill>
-                <a:latin typeface="Calibri"/>
-              </a:rPr>
-              <a:t>STACK</a:t>
-            </a:r>
-          </a:p>
-        </p:txBody>
-      </p:sp>
-      <p:sp>
-        <p:nvSpPr>
-          <p:cNvPr id="46" name="Rectangle 45"/>
-          <p:cNvSpPr/>
-          <p:nvPr/>
-        </p:nvSpPr>
-        <p:spPr>
-          <a:xfrm>
-            <a:off x="457200" y="3840480"/>
-            <a:ext cx="2743200" cy="822960"/>
-          </a:xfrm>
-          <a:prstGeom prst="rect">
-            <a:avLst/>
-          </a:prstGeom>
-          <a:solidFill>
-            <a:srgbClr val="14263A"/>
-          </a:solidFill>
-          <a:ln>
-            <a:noFill/>
-          </a:ln>
-        </p:spPr>
-        <p:style>
-          <a:lnRef idx="1">
-            <a:schemeClr val="accent1"/>
-          </a:lnRef>
-          <a:fillRef idx="3">
-            <a:schemeClr val="accent1"/>
-          </a:fillRef>
-          <a:effectRef idx="2">
-            <a:schemeClr val="accent1"/>
-          </a:effectRef>
-          <a:fontRef idx="minor">
-            <a:schemeClr val="lt1"/>
-          </a:fontRef>
-        </p:style>
-        <p:txBody>
-          <a:bodyPr rtlCol="0" anchor="ctr"/>
-          <a:lstStyle/>
-          <a:p>
-            <a:pPr algn="ctr"/>
-          </a:p>
-        </p:txBody>
-      </p:sp>
-      <p:sp>
-        <p:nvSpPr>
-          <p:cNvPr id="47" name="TextBox 46"/>
-          <p:cNvSpPr txBox="1"/>
-          <p:nvPr/>
-        </p:nvSpPr>
-        <p:spPr>
-          <a:xfrm>
-            <a:off x="594360" y="3913632"/>
-            <a:ext cx="1371600" cy="320040"/>
-          </a:xfrm>
-          <a:prstGeom prst="rect">
-            <a:avLst/>
-          </a:prstGeom>
-          <a:noFill/>
-        </p:spPr>
-        <p:txBody>
-          <a:bodyPr wrap="square">
-            <a:spAutoFit/>
-          </a:bodyPr>
-          <a:lstStyle/>
-          <a:p>
-            <a:pPr algn="l"/>
-            <a:r>
-              <a:rPr sz="1300" b="1" i="0">
-                <a:solidFill>
-                  <a:srgbClr val="48CAE4"/>
-                </a:solidFill>
-                <a:latin typeface="Calibri"/>
-              </a:rPr>
-              <a:t>Frontend</a:t>
-            </a:r>
-          </a:p>
-        </p:txBody>
-      </p:sp>
-      <p:sp>
-        <p:nvSpPr>
-          <p:cNvPr id="48" name="TextBox 47"/>
-          <p:cNvSpPr txBox="1"/>
-          <p:nvPr/>
-        </p:nvSpPr>
-        <p:spPr>
-          <a:xfrm>
-            <a:off x="594360" y="4206240"/>
-            <a:ext cx="2560320" cy="502920"/>
-          </a:xfrm>
-          <a:prstGeom prst="rect">
-            <a:avLst/>
-          </a:prstGeom>
-          <a:noFill/>
-        </p:spPr>
-        <p:txBody>
-          <a:bodyPr wrap="square">
-            <a:spAutoFit/>
-          </a:bodyPr>
-          <a:lstStyle/>
-          <a:p>
-            <a:pPr algn="l"/>
-            <a:r>
-              <a:rPr sz="1200" b="0" i="0">
-                <a:solidFill>
-                  <a:srgbClr val="B8D4E8"/>
-                </a:solidFill>
-                <a:latin typeface="Calibri"/>
-              </a:rPr>
-              <a:t>React 19 · Vite · Clerk · Chart.js · Leaflet · PWA</a:t>
-            </a:r>
-          </a:p>
-        </p:txBody>
-      </p:sp>
-      <p:sp>
-        <p:nvSpPr>
-          <p:cNvPr id="49" name="Rectangle 48"/>
-          <p:cNvSpPr/>
-          <p:nvPr/>
-        </p:nvSpPr>
-        <p:spPr>
-          <a:xfrm>
-            <a:off x="3383280" y="3840480"/>
-            <a:ext cx="2743200" cy="822960"/>
-          </a:xfrm>
-          <a:prstGeom prst="rect">
-            <a:avLst/>
-          </a:prstGeom>
-          <a:solidFill>
-            <a:srgbClr val="14263A"/>
-          </a:solidFill>
-          <a:ln>
-            <a:noFill/>
-          </a:ln>
-        </p:spPr>
-        <p:style>
-          <a:lnRef idx="1">
-            <a:schemeClr val="accent1"/>
-          </a:lnRef>
-          <a:fillRef idx="3">
-            <a:schemeClr val="accent1"/>
-          </a:fillRef>
-          <a:effectRef idx="2">
-            <a:schemeClr val="accent1"/>
-          </a:effectRef>
-          <a:fontRef idx="minor">
-            <a:schemeClr val="lt1"/>
-          </a:fontRef>
-        </p:style>
-        <p:txBody>
-          <a:bodyPr rtlCol="0" anchor="ctr"/>
-          <a:lstStyle/>
-          <a:p>
-            <a:pPr algn="ctr"/>
-          </a:p>
-        </p:txBody>
-      </p:sp>
-      <p:sp>
-        <p:nvSpPr>
-          <p:cNvPr id="50" name="TextBox 49"/>
-          <p:cNvSpPr txBox="1"/>
-          <p:nvPr/>
-        </p:nvSpPr>
-        <p:spPr>
-          <a:xfrm>
-            <a:off x="3520440" y="3913632"/>
-            <a:ext cx="1371600" cy="320040"/>
-          </a:xfrm>
-          <a:prstGeom prst="rect">
-            <a:avLst/>
-          </a:prstGeom>
-          <a:noFill/>
-        </p:spPr>
-        <p:txBody>
-          <a:bodyPr wrap="square">
-            <a:spAutoFit/>
-          </a:bodyPr>
-          <a:lstStyle/>
-          <a:p>
-            <a:pPr algn="l"/>
-            <a:r>
-              <a:rPr sz="1300" b="1" i="0">
-                <a:solidFill>
-                  <a:srgbClr val="48CAE4"/>
-                </a:solidFill>
-                <a:latin typeface="Calibri"/>
-              </a:rPr>
-              <a:t>Backend</a:t>
-            </a:r>
-          </a:p>
-        </p:txBody>
-      </p:sp>
-      <p:sp>
-        <p:nvSpPr>
-          <p:cNvPr id="51" name="TextBox 50"/>
-          <p:cNvSpPr txBox="1"/>
-          <p:nvPr/>
-        </p:nvSpPr>
-        <p:spPr>
-          <a:xfrm>
-            <a:off x="3520440" y="4206240"/>
-            <a:ext cx="2560320" cy="502920"/>
-          </a:xfrm>
-          <a:prstGeom prst="rect">
-            <a:avLst/>
-          </a:prstGeom>
-          <a:noFill/>
-        </p:spPr>
-        <p:txBody>
-          <a:bodyPr wrap="square">
-            <a:spAutoFit/>
-          </a:bodyPr>
-          <a:lstStyle/>
-          <a:p>
-            <a:pPr algn="l"/>
-            <a:r>
-              <a:rPr sz="1200" b="0" i="0">
-                <a:solidFill>
-                  <a:srgbClr val="B8D4E8"/>
-                </a:solidFill>
-                <a:latin typeface="Calibri"/>
-              </a:rPr>
-              <a:t>FastAPI · Vercel (always-on) · Supabase Postgres · RLS</a:t>
-            </a:r>
-          </a:p>
-        </p:txBody>
-      </p:sp>
-      <p:sp>
-        <p:nvSpPr>
-          <p:cNvPr id="52" name="Rectangle 51"/>
-          <p:cNvSpPr/>
-          <p:nvPr/>
-        </p:nvSpPr>
-        <p:spPr>
-          <a:xfrm>
-            <a:off x="6309360" y="3840480"/>
-            <a:ext cx="2743200" cy="822960"/>
-          </a:xfrm>
-          <a:prstGeom prst="rect">
-            <a:avLst/>
-          </a:prstGeom>
-          <a:solidFill>
-            <a:srgbClr val="14263A"/>
-          </a:solidFill>
-          <a:ln>
-            <a:noFill/>
-          </a:ln>
-        </p:spPr>
-        <p:style>
-          <a:lnRef idx="1">
-            <a:schemeClr val="accent1"/>
-          </a:lnRef>
-          <a:fillRef idx="3">
-            <a:schemeClr val="accent1"/>
-          </a:fillRef>
-          <a:effectRef idx="2">
-            <a:schemeClr val="accent1"/>
-          </a:effectRef>
-          <a:fontRef idx="minor">
-            <a:schemeClr val="lt1"/>
-          </a:fontRef>
-        </p:style>
-        <p:txBody>
-          <a:bodyPr rtlCol="0" anchor="ctr"/>
-          <a:lstStyle/>
-          <a:p>
-            <a:pPr algn="ctr"/>
-          </a:p>
-        </p:txBody>
-      </p:sp>
-      <p:sp>
-        <p:nvSpPr>
-          <p:cNvPr id="53" name="TextBox 52"/>
-          <p:cNvSpPr txBox="1"/>
-          <p:nvPr/>
-        </p:nvSpPr>
-        <p:spPr>
-          <a:xfrm>
-            <a:off x="6446520" y="3913632"/>
-            <a:ext cx="1371600" cy="320040"/>
-          </a:xfrm>
-          <a:prstGeom prst="rect">
-            <a:avLst/>
-          </a:prstGeom>
-          <a:noFill/>
-        </p:spPr>
-        <p:txBody>
-          <a:bodyPr wrap="square">
-            <a:spAutoFit/>
-          </a:bodyPr>
-          <a:lstStyle/>
-          <a:p>
-            <a:pPr algn="l"/>
-            <a:r>
-              <a:rPr sz="1300" b="1" i="0">
-                <a:solidFill>
-                  <a:srgbClr val="48CAE4"/>
-                </a:solidFill>
-                <a:latin typeface="Calibri"/>
-              </a:rPr>
-              <a:t>AI Heavy</a:t>
-            </a:r>
-          </a:p>
-        </p:txBody>
-      </p:sp>
-      <p:sp>
-        <p:nvSpPr>
-          <p:cNvPr id="54" name="TextBox 53"/>
-          <p:cNvSpPr txBox="1"/>
-          <p:nvPr/>
-        </p:nvSpPr>
-        <p:spPr>
-          <a:xfrm>
-            <a:off x="6446520" y="4206240"/>
-            <a:ext cx="2560320" cy="502920"/>
-          </a:xfrm>
-          <a:prstGeom prst="rect">
-            <a:avLst/>
-          </a:prstGeom>
-          <a:noFill/>
-        </p:spPr>
-        <p:txBody>
-          <a:bodyPr wrap="square">
-            <a:spAutoFit/>
-          </a:bodyPr>
-          <a:lstStyle/>
-          <a:p>
-            <a:pPr algn="l"/>
-            <a:r>
-              <a:rPr sz="1200" b="0" i="0">
-                <a:solidFill>
-                  <a:srgbClr val="B8D4E8"/>
-                </a:solidFill>
-                <a:latin typeface="Calibri"/>
-              </a:rPr>
-              <a:t>CrewAI · litellm · Groq + OpenRouter free pool · HF Space</a:t>
-            </a:r>
-          </a:p>
-        </p:txBody>
-      </p:sp>
-      <p:sp>
-        <p:nvSpPr>
-          <p:cNvPr id="55" name="Rectangle 54"/>
-          <p:cNvSpPr/>
-          <p:nvPr/>
-        </p:nvSpPr>
-        <p:spPr>
-          <a:xfrm>
-            <a:off x="9235440" y="3840480"/>
-            <a:ext cx="2743200" cy="822960"/>
-          </a:xfrm>
-          <a:prstGeom prst="rect">
-            <a:avLst/>
-          </a:prstGeom>
-          <a:solidFill>
-            <a:srgbClr val="14263A"/>
-          </a:solidFill>
-          <a:ln>
-            <a:noFill/>
-          </a:ln>
-        </p:spPr>
-        <p:style>
-          <a:lnRef idx="1">
-            <a:schemeClr val="accent1"/>
-          </a:lnRef>
-          <a:fillRef idx="3">
-            <a:schemeClr val="accent1"/>
-          </a:fillRef>
-          <a:effectRef idx="2">
-            <a:schemeClr val="accent1"/>
-          </a:effectRef>
-          <a:fontRef idx="minor">
-            <a:schemeClr val="lt1"/>
-          </a:fontRef>
-        </p:style>
-        <p:txBody>
-          <a:bodyPr rtlCol="0" anchor="ctr"/>
-          <a:lstStyle/>
-          <a:p>
-            <a:pPr algn="ctr"/>
-          </a:p>
-        </p:txBody>
-      </p:sp>
-      <p:sp>
-        <p:nvSpPr>
-          <p:cNvPr id="56" name="TextBox 55"/>
-          <p:cNvSpPr txBox="1"/>
-          <p:nvPr/>
-        </p:nvSpPr>
-        <p:spPr>
-          <a:xfrm>
-            <a:off x="9372600" y="3913632"/>
-            <a:ext cx="1371600" cy="320040"/>
-          </a:xfrm>
-          <a:prstGeom prst="rect">
-            <a:avLst/>
-          </a:prstGeom>
-          <a:noFill/>
-        </p:spPr>
-        <p:txBody>
-          <a:bodyPr wrap="square">
-            <a:spAutoFit/>
-          </a:bodyPr>
-          <a:lstStyle/>
-          <a:p>
-            <a:pPr algn="l"/>
-            <a:r>
-              <a:rPr sz="1300" b="1" i="0">
-                <a:solidFill>
-                  <a:srgbClr val="48CAE4"/>
-                </a:solidFill>
-                <a:latin typeface="Calibri"/>
-              </a:rPr>
-              <a:t>AI Light</a:t>
-            </a:r>
-          </a:p>
-        </p:txBody>
-      </p:sp>
-      <p:sp>
-        <p:nvSpPr>
-          <p:cNvPr id="57" name="TextBox 56"/>
-          <p:cNvSpPr txBox="1"/>
-          <p:nvPr/>
-        </p:nvSpPr>
-        <p:spPr>
-          <a:xfrm>
-            <a:off x="9372600" y="4206240"/>
-            <a:ext cx="2560320" cy="502920"/>
-          </a:xfrm>
-          <a:prstGeom prst="rect">
-            <a:avLst/>
-          </a:prstGeom>
-          <a:noFill/>
-        </p:spPr>
-        <p:txBody>
-          <a:bodyPr wrap="square">
-            <a:spAutoFit/>
-          </a:bodyPr>
-          <a:lstStyle/>
-          <a:p>
-            <a:pPr algn="l"/>
-            <a:r>
-              <a:rPr sz="1200" b="0" i="0">
-                <a:solidFill>
-                  <a:srgbClr val="B8D4E8"/>
-                </a:solidFill>
-                <a:latin typeface="Calibri"/>
-              </a:rPr>
-              <a:t>Single LLM calls via llm_lite.py — multi-model failover · 200/day rate limit</a:t>
+              <a:t>Ask anything in plain English — answers are grounded in your actual data, not hallucinated</a:t>
             </a:r>
           </a:p>
         </p:txBody>
@@ -9081,7 +8357,7 @@
     <p:bg>
       <p:bgPr>
         <a:solidFill>
-          <a:srgbClr val="0D1B2A"/>
+          <a:srgbClr val="0A1422"/>
         </a:solidFill>
         <a:effectLst/>
       </p:bgPr>
@@ -9102,7 +8378,7 @@
         <p:spPr>
           <a:xfrm>
             <a:off x="0" y="0"/>
-            <a:ext cx="73152" cy="6858000"/>
+            <a:ext cx="64008" cy="6858000"/>
           </a:xfrm>
           <a:prstGeom prst="rect">
             <a:avLst/>
@@ -9144,8 +8420,207 @@
         </p:nvSpPr>
         <p:spPr>
           <a:xfrm>
-            <a:off x="457200" y="365760"/>
-            <a:ext cx="9144000" cy="548640"/>
+            <a:off x="411480" y="274320"/>
+            <a:ext cx="9144000" cy="411480"/>
+          </a:xfrm>
+          <a:prstGeom prst="rect">
+            <a:avLst/>
+          </a:prstGeom>
+          <a:noFill/>
+        </p:spPr>
+        <p:txBody>
+          <a:bodyPr wrap="square">
+            <a:spAutoFit/>
+          </a:bodyPr>
+          <a:lstStyle/>
+          <a:p>
+            <a:pPr algn="l"/>
+            <a:r>
+              <a:rPr sz="1200" b="1" i="0">
+                <a:solidFill>
+                  <a:srgbClr val="00B4D8"/>
+                </a:solidFill>
+                <a:latin typeface="Calibri"/>
+              </a:rPr>
+              <a:t>UNDER THE HOOD</a:t>
+            </a:r>
+          </a:p>
+        </p:txBody>
+      </p:sp>
+      <p:sp>
+        <p:nvSpPr>
+          <p:cNvPr id="4" name="TextBox 3"/>
+          <p:cNvSpPr txBox="1"/>
+          <p:nvPr/>
+        </p:nvSpPr>
+        <p:spPr>
+          <a:xfrm>
+            <a:off x="411480" y="777240"/>
+            <a:ext cx="8686800" cy="685800"/>
+          </a:xfrm>
+          <a:prstGeom prst="rect">
+            <a:avLst/>
+          </a:prstGeom>
+          <a:noFill/>
+        </p:spPr>
+        <p:txBody>
+          <a:bodyPr wrap="square">
+            <a:spAutoFit/>
+          </a:bodyPr>
+          <a:lstStyle/>
+          <a:p>
+            <a:pPr algn="l"/>
+            <a:r>
+              <a:rPr sz="3800" b="1" i="0">
+                <a:solidFill>
+                  <a:srgbClr val="FFFFFF"/>
+                </a:solidFill>
+                <a:latin typeface="Calibri"/>
+              </a:rPr>
+              <a:t>The 8-Agent Pipeline + Stack</a:t>
+            </a:r>
+          </a:p>
+        </p:txBody>
+      </p:sp>
+      <p:sp>
+        <p:nvSpPr>
+          <p:cNvPr id="5" name="Rectangle 4"/>
+          <p:cNvSpPr/>
+          <p:nvPr/>
+        </p:nvSpPr>
+        <p:spPr>
+          <a:xfrm>
+            <a:off x="411480" y="1627632"/>
+            <a:ext cx="1645920" cy="50292"/>
+          </a:xfrm>
+          <a:prstGeom prst="rect">
+            <a:avLst/>
+          </a:prstGeom>
+          <a:solidFill>
+            <a:srgbClr val="00B4D8"/>
+          </a:solidFill>
+          <a:ln>
+            <a:noFill/>
+          </a:ln>
+        </p:spPr>
+        <p:style>
+          <a:lnRef idx="1">
+            <a:schemeClr val="accent1"/>
+          </a:lnRef>
+          <a:fillRef idx="3">
+            <a:schemeClr val="accent1"/>
+          </a:fillRef>
+          <a:effectRef idx="2">
+            <a:schemeClr val="accent1"/>
+          </a:effectRef>
+          <a:fontRef idx="minor">
+            <a:schemeClr val="lt1"/>
+          </a:fontRef>
+        </p:style>
+        <p:txBody>
+          <a:bodyPr rtlCol="0" anchor="ctr"/>
+          <a:lstStyle/>
+          <a:p>
+            <a:pPr algn="ctr"/>
+          </a:p>
+        </p:txBody>
+      </p:sp>
+      <p:sp>
+        <p:nvSpPr>
+          <p:cNvPr id="6" name="Rectangle 5"/>
+          <p:cNvSpPr/>
+          <p:nvPr/>
+        </p:nvSpPr>
+        <p:spPr>
+          <a:xfrm>
+            <a:off x="411480" y="1874519"/>
+            <a:ext cx="1335024" cy="1143000"/>
+          </a:xfrm>
+          <a:prstGeom prst="rect">
+            <a:avLst/>
+          </a:prstGeom>
+          <a:solidFill>
+            <a:srgbClr val="122235"/>
+          </a:solidFill>
+          <a:ln>
+            <a:noFill/>
+          </a:ln>
+        </p:spPr>
+        <p:style>
+          <a:lnRef idx="1">
+            <a:schemeClr val="accent1"/>
+          </a:lnRef>
+          <a:fillRef idx="3">
+            <a:schemeClr val="accent1"/>
+          </a:fillRef>
+          <a:effectRef idx="2">
+            <a:schemeClr val="accent1"/>
+          </a:effectRef>
+          <a:fontRef idx="minor">
+            <a:schemeClr val="lt1"/>
+          </a:fontRef>
+        </p:style>
+        <p:txBody>
+          <a:bodyPr rtlCol="0" anchor="ctr"/>
+          <a:lstStyle/>
+          <a:p>
+            <a:pPr algn="ctr"/>
+          </a:p>
+        </p:txBody>
+      </p:sp>
+      <p:sp>
+        <p:nvSpPr>
+          <p:cNvPr id="7" name="Rectangle 6"/>
+          <p:cNvSpPr/>
+          <p:nvPr/>
+        </p:nvSpPr>
+        <p:spPr>
+          <a:xfrm>
+            <a:off x="411480" y="1874519"/>
+            <a:ext cx="1335024" cy="64008"/>
+          </a:xfrm>
+          <a:prstGeom prst="rect">
+            <a:avLst/>
+          </a:prstGeom>
+          <a:solidFill>
+            <a:srgbClr val="00B4D8"/>
+          </a:solidFill>
+          <a:ln>
+            <a:noFill/>
+          </a:ln>
+        </p:spPr>
+        <p:style>
+          <a:lnRef idx="1">
+            <a:schemeClr val="accent1"/>
+          </a:lnRef>
+          <a:fillRef idx="3">
+            <a:schemeClr val="accent1"/>
+          </a:fillRef>
+          <a:effectRef idx="2">
+            <a:schemeClr val="accent1"/>
+          </a:effectRef>
+          <a:fontRef idx="minor">
+            <a:schemeClr val="lt1"/>
+          </a:fontRef>
+        </p:style>
+        <p:txBody>
+          <a:bodyPr rtlCol="0" anchor="ctr"/>
+          <a:lstStyle/>
+          <a:p>
+            <a:pPr algn="ctr"/>
+          </a:p>
+        </p:txBody>
+      </p:sp>
+      <p:sp>
+        <p:nvSpPr>
+          <p:cNvPr id="8" name="TextBox 7"/>
+          <p:cNvSpPr txBox="1"/>
+          <p:nvPr/>
+        </p:nvSpPr>
+        <p:spPr>
+          <a:xfrm>
+            <a:off x="502920" y="1965960"/>
+            <a:ext cx="320040" cy="365760"/>
           </a:xfrm>
           <a:prstGeom prst="rect">
             <a:avLst/>
@@ -9166,21 +8641,21 @@
                 </a:solidFill>
                 <a:latin typeface="Calibri"/>
               </a:rPr>
-              <a:t>IMPACT</a:t>
-            </a:r>
-          </a:p>
-        </p:txBody>
-      </p:sp>
-      <p:sp>
-        <p:nvSpPr>
-          <p:cNvPr id="4" name="TextBox 3"/>
+              <a:t>1</a:t>
+            </a:r>
+          </a:p>
+        </p:txBody>
+      </p:sp>
+      <p:sp>
+        <p:nvSpPr>
+          <p:cNvPr id="9" name="TextBox 8"/>
           <p:cNvSpPr txBox="1"/>
           <p:nvPr/>
         </p:nvSpPr>
         <p:spPr>
           <a:xfrm>
-            <a:off x="457200" y="914400"/>
-            <a:ext cx="8686800" cy="1463040"/>
+            <a:off x="502920" y="2313432"/>
+            <a:ext cx="1197864" cy="658368"/>
           </a:xfrm>
           <a:prstGeom prst="rect">
             <a:avLst/>
@@ -9195,28 +8670,296 @@
           <a:p>
             <a:pPr algn="l"/>
             <a:r>
-              <a:rPr sz="4000" b="1" i="0">
+              <a:rPr sz="1400" b="1" i="0">
                 <a:solidFill>
                   <a:srgbClr val="FFFFFF"/>
                 </a:solidFill>
                 <a:latin typeface="Calibri"/>
               </a:rPr>
-              <a:t>Democratizing sports-science
-for everyone with a phone.</a:t>
-            </a:r>
-          </a:p>
-        </p:txBody>
-      </p:sp>
-      <p:sp>
-        <p:nvSpPr>
-          <p:cNvPr id="5" name="Rectangle 4"/>
+              <a:t>Context</a:t>
+            </a:r>
+          </a:p>
+        </p:txBody>
+      </p:sp>
+      <p:sp>
+        <p:nvSpPr>
+          <p:cNvPr id="10" name="TextBox 9"/>
+          <p:cNvSpPr txBox="1"/>
+          <p:nvPr/>
+        </p:nvSpPr>
+        <p:spPr>
+          <a:xfrm>
+            <a:off x="1751075" y="2258568"/>
+            <a:ext cx="73152" cy="365760"/>
+          </a:xfrm>
+          <a:prstGeom prst="rect">
+            <a:avLst/>
+          </a:prstGeom>
+          <a:noFill/>
+        </p:spPr>
+        <p:txBody>
+          <a:bodyPr wrap="square">
+            <a:spAutoFit/>
+          </a:bodyPr>
+          <a:lstStyle/>
+          <a:p>
+            <a:pPr algn="ctr"/>
+            <a:r>
+              <a:rPr sz="1600" b="1" i="0">
+                <a:solidFill>
+                  <a:srgbClr val="557A9A"/>
+                </a:solidFill>
+                <a:latin typeface="Calibri"/>
+              </a:rPr>
+              <a:t>›</a:t>
+            </a:r>
+          </a:p>
+        </p:txBody>
+      </p:sp>
+      <p:sp>
+        <p:nvSpPr>
+          <p:cNvPr id="11" name="Rectangle 10"/>
           <p:cNvSpPr/>
           <p:nvPr/>
         </p:nvSpPr>
         <p:spPr>
           <a:xfrm>
-            <a:off x="457200" y="2514600"/>
-            <a:ext cx="1828800" cy="45720"/>
+            <a:off x="1796795" y="1874519"/>
+            <a:ext cx="1335024" cy="1143000"/>
+          </a:xfrm>
+          <a:prstGeom prst="rect">
+            <a:avLst/>
+          </a:prstGeom>
+          <a:solidFill>
+            <a:srgbClr val="122235"/>
+          </a:solidFill>
+          <a:ln>
+            <a:noFill/>
+          </a:ln>
+        </p:spPr>
+        <p:style>
+          <a:lnRef idx="1">
+            <a:schemeClr val="accent1"/>
+          </a:lnRef>
+          <a:fillRef idx="3">
+            <a:schemeClr val="accent1"/>
+          </a:fillRef>
+          <a:effectRef idx="2">
+            <a:schemeClr val="accent1"/>
+          </a:effectRef>
+          <a:fontRef idx="minor">
+            <a:schemeClr val="lt1"/>
+          </a:fontRef>
+        </p:style>
+        <p:txBody>
+          <a:bodyPr rtlCol="0" anchor="ctr"/>
+          <a:lstStyle/>
+          <a:p>
+            <a:pPr algn="ctr"/>
+          </a:p>
+        </p:txBody>
+      </p:sp>
+      <p:sp>
+        <p:nvSpPr>
+          <p:cNvPr id="12" name="Rectangle 11"/>
+          <p:cNvSpPr/>
+          <p:nvPr/>
+        </p:nvSpPr>
+        <p:spPr>
+          <a:xfrm>
+            <a:off x="1796795" y="1874519"/>
+            <a:ext cx="1335024" cy="64008"/>
+          </a:xfrm>
+          <a:prstGeom prst="rect">
+            <a:avLst/>
+          </a:prstGeom>
+          <a:solidFill>
+            <a:srgbClr val="48CAE4"/>
+          </a:solidFill>
+          <a:ln>
+            <a:noFill/>
+          </a:ln>
+        </p:spPr>
+        <p:style>
+          <a:lnRef idx="1">
+            <a:schemeClr val="accent1"/>
+          </a:lnRef>
+          <a:fillRef idx="3">
+            <a:schemeClr val="accent1"/>
+          </a:fillRef>
+          <a:effectRef idx="2">
+            <a:schemeClr val="accent1"/>
+          </a:effectRef>
+          <a:fontRef idx="minor">
+            <a:schemeClr val="lt1"/>
+          </a:fontRef>
+        </p:style>
+        <p:txBody>
+          <a:bodyPr rtlCol="0" anchor="ctr"/>
+          <a:lstStyle/>
+          <a:p>
+            <a:pPr algn="ctr"/>
+          </a:p>
+        </p:txBody>
+      </p:sp>
+      <p:sp>
+        <p:nvSpPr>
+          <p:cNvPr id="13" name="TextBox 12"/>
+          <p:cNvSpPr txBox="1"/>
+          <p:nvPr/>
+        </p:nvSpPr>
+        <p:spPr>
+          <a:xfrm>
+            <a:off x="1888236" y="1965960"/>
+            <a:ext cx="320040" cy="365760"/>
+          </a:xfrm>
+          <a:prstGeom prst="rect">
+            <a:avLst/>
+          </a:prstGeom>
+          <a:noFill/>
+        </p:spPr>
+        <p:txBody>
+          <a:bodyPr wrap="square">
+            <a:spAutoFit/>
+          </a:bodyPr>
+          <a:lstStyle/>
+          <a:p>
+            <a:pPr algn="l"/>
+            <a:r>
+              <a:rPr sz="1300" b="1" i="0">
+                <a:solidFill>
+                  <a:srgbClr val="48CAE4"/>
+                </a:solidFill>
+                <a:latin typeface="Calibri"/>
+              </a:rPr>
+              <a:t>2</a:t>
+            </a:r>
+          </a:p>
+        </p:txBody>
+      </p:sp>
+      <p:sp>
+        <p:nvSpPr>
+          <p:cNvPr id="14" name="TextBox 13"/>
+          <p:cNvSpPr txBox="1"/>
+          <p:nvPr/>
+        </p:nvSpPr>
+        <p:spPr>
+          <a:xfrm>
+            <a:off x="1888236" y="2313432"/>
+            <a:ext cx="1197864" cy="658368"/>
+          </a:xfrm>
+          <a:prstGeom prst="rect">
+            <a:avLst/>
+          </a:prstGeom>
+          <a:noFill/>
+        </p:spPr>
+        <p:txBody>
+          <a:bodyPr wrap="square">
+            <a:spAutoFit/>
+          </a:bodyPr>
+          <a:lstStyle/>
+          <a:p>
+            <a:pPr algn="l"/>
+            <a:r>
+              <a:rPr sz="1400" b="1" i="0">
+                <a:solidFill>
+                  <a:srgbClr val="FFFFFF"/>
+                </a:solidFill>
+                <a:latin typeface="Calibri"/>
+              </a:rPr>
+              <a:t>Cleaner</a:t>
+            </a:r>
+          </a:p>
+        </p:txBody>
+      </p:sp>
+      <p:sp>
+        <p:nvSpPr>
+          <p:cNvPr id="15" name="TextBox 14"/>
+          <p:cNvSpPr txBox="1"/>
+          <p:nvPr/>
+        </p:nvSpPr>
+        <p:spPr>
+          <a:xfrm>
+            <a:off x="3136391" y="2258568"/>
+            <a:ext cx="73152" cy="365760"/>
+          </a:xfrm>
+          <a:prstGeom prst="rect">
+            <a:avLst/>
+          </a:prstGeom>
+          <a:noFill/>
+        </p:spPr>
+        <p:txBody>
+          <a:bodyPr wrap="square">
+            <a:spAutoFit/>
+          </a:bodyPr>
+          <a:lstStyle/>
+          <a:p>
+            <a:pPr algn="ctr"/>
+            <a:r>
+              <a:rPr sz="1600" b="1" i="0">
+                <a:solidFill>
+                  <a:srgbClr val="557A9A"/>
+                </a:solidFill>
+                <a:latin typeface="Calibri"/>
+              </a:rPr>
+              <a:t>›</a:t>
+            </a:r>
+          </a:p>
+        </p:txBody>
+      </p:sp>
+      <p:sp>
+        <p:nvSpPr>
+          <p:cNvPr id="16" name="Rectangle 15"/>
+          <p:cNvSpPr/>
+          <p:nvPr/>
+        </p:nvSpPr>
+        <p:spPr>
+          <a:xfrm>
+            <a:off x="3182112" y="1874519"/>
+            <a:ext cx="1335024" cy="1143000"/>
+          </a:xfrm>
+          <a:prstGeom prst="rect">
+            <a:avLst/>
+          </a:prstGeom>
+          <a:solidFill>
+            <a:srgbClr val="122235"/>
+          </a:solidFill>
+          <a:ln>
+            <a:noFill/>
+          </a:ln>
+        </p:spPr>
+        <p:style>
+          <a:lnRef idx="1">
+            <a:schemeClr val="accent1"/>
+          </a:lnRef>
+          <a:fillRef idx="3">
+            <a:schemeClr val="accent1"/>
+          </a:fillRef>
+          <a:effectRef idx="2">
+            <a:schemeClr val="accent1"/>
+          </a:effectRef>
+          <a:fontRef idx="minor">
+            <a:schemeClr val="lt1"/>
+          </a:fontRef>
+        </p:style>
+        <p:txBody>
+          <a:bodyPr rtlCol="0" anchor="ctr"/>
+          <a:lstStyle/>
+          <a:p>
+            <a:pPr algn="ctr"/>
+          </a:p>
+        </p:txBody>
+      </p:sp>
+      <p:sp>
+        <p:nvSpPr>
+          <p:cNvPr id="17" name="Rectangle 16"/>
+          <p:cNvSpPr/>
+          <p:nvPr/>
+        </p:nvSpPr>
+        <p:spPr>
+          <a:xfrm>
+            <a:off x="3182112" y="1874519"/>
+            <a:ext cx="1335024" cy="64008"/>
           </a:xfrm>
           <a:prstGeom prst="rect">
             <a:avLst/>
@@ -9252,20 +8995,126 @@
       </p:sp>
       <p:sp>
         <p:nvSpPr>
-          <p:cNvPr id="6" name="Rectangle 5"/>
+          <p:cNvPr id="18" name="TextBox 17"/>
+          <p:cNvSpPr txBox="1"/>
+          <p:nvPr/>
+        </p:nvSpPr>
+        <p:spPr>
+          <a:xfrm>
+            <a:off x="3273552" y="1965960"/>
+            <a:ext cx="320040" cy="365760"/>
+          </a:xfrm>
+          <a:prstGeom prst="rect">
+            <a:avLst/>
+          </a:prstGeom>
+          <a:noFill/>
+        </p:spPr>
+        <p:txBody>
+          <a:bodyPr wrap="square">
+            <a:spAutoFit/>
+          </a:bodyPr>
+          <a:lstStyle/>
+          <a:p>
+            <a:pPr algn="l"/>
+            <a:r>
+              <a:rPr sz="1300" b="1" i="0">
+                <a:solidFill>
+                  <a:srgbClr val="00B4D8"/>
+                </a:solidFill>
+                <a:latin typeface="Calibri"/>
+              </a:rPr>
+              <a:t>3</a:t>
+            </a:r>
+          </a:p>
+        </p:txBody>
+      </p:sp>
+      <p:sp>
+        <p:nvSpPr>
+          <p:cNvPr id="19" name="TextBox 18"/>
+          <p:cNvSpPr txBox="1"/>
+          <p:nvPr/>
+        </p:nvSpPr>
+        <p:spPr>
+          <a:xfrm>
+            <a:off x="3273552" y="2313432"/>
+            <a:ext cx="1197864" cy="658368"/>
+          </a:xfrm>
+          <a:prstGeom prst="rect">
+            <a:avLst/>
+          </a:prstGeom>
+          <a:noFill/>
+        </p:spPr>
+        <p:txBody>
+          <a:bodyPr wrap="square">
+            <a:spAutoFit/>
+          </a:bodyPr>
+          <a:lstStyle/>
+          <a:p>
+            <a:pPr algn="l"/>
+            <a:r>
+              <a:rPr sz="1400" b="1" i="0">
+                <a:solidFill>
+                  <a:srgbClr val="FFFFFF"/>
+                </a:solidFill>
+                <a:latin typeface="Calibri"/>
+              </a:rPr>
+              <a:t>Prompt
+Engineer</a:t>
+            </a:r>
+          </a:p>
+        </p:txBody>
+      </p:sp>
+      <p:sp>
+        <p:nvSpPr>
+          <p:cNvPr id="20" name="TextBox 19"/>
+          <p:cNvSpPr txBox="1"/>
+          <p:nvPr/>
+        </p:nvSpPr>
+        <p:spPr>
+          <a:xfrm>
+            <a:off x="4521707" y="2258568"/>
+            <a:ext cx="73152" cy="365760"/>
+          </a:xfrm>
+          <a:prstGeom prst="rect">
+            <a:avLst/>
+          </a:prstGeom>
+          <a:noFill/>
+        </p:spPr>
+        <p:txBody>
+          <a:bodyPr wrap="square">
+            <a:spAutoFit/>
+          </a:bodyPr>
+          <a:lstStyle/>
+          <a:p>
+            <a:pPr algn="ctr"/>
+            <a:r>
+              <a:rPr sz="1600" b="1" i="0">
+                <a:solidFill>
+                  <a:srgbClr val="557A9A"/>
+                </a:solidFill>
+                <a:latin typeface="Calibri"/>
+              </a:rPr>
+              <a:t>›</a:t>
+            </a:r>
+          </a:p>
+        </p:txBody>
+      </p:sp>
+      <p:sp>
+        <p:nvSpPr>
+          <p:cNvPr id="21" name="Rectangle 20"/>
           <p:cNvSpPr/>
           <p:nvPr/>
         </p:nvSpPr>
         <p:spPr>
           <a:xfrm>
-            <a:off x="457200" y="2834640"/>
-            <a:ext cx="5394960" cy="1463040"/>
+            <a:off x="4567428" y="1874519"/>
+            <a:ext cx="1335024" cy="1143000"/>
           </a:xfrm>
           <a:prstGeom prst="rect">
             <a:avLst/>
           </a:prstGeom>
           <a:solidFill>
-            <a:srgbClr val="14263A"/>
+            <a:srgbClr val="122235"/>
           </a:solidFill>
           <a:ln>
             <a:noFill/>
@@ -9295,14 +9144,205 @@
       </p:sp>
       <p:sp>
         <p:nvSpPr>
-          <p:cNvPr id="7" name="Rectangle 6"/>
+          <p:cNvPr id="22" name="Rectangle 21"/>
           <p:cNvSpPr/>
           <p:nvPr/>
         </p:nvSpPr>
         <p:spPr>
           <a:xfrm>
-            <a:off x="457200" y="2834640"/>
-            <a:ext cx="5394960" cy="64008"/>
+            <a:off x="4567428" y="1874519"/>
+            <a:ext cx="1335024" cy="64008"/>
+          </a:xfrm>
+          <a:prstGeom prst="rect">
+            <a:avLst/>
+          </a:prstGeom>
+          <a:solidFill>
+            <a:srgbClr val="48CAE4"/>
+          </a:solidFill>
+          <a:ln>
+            <a:noFill/>
+          </a:ln>
+        </p:spPr>
+        <p:style>
+          <a:lnRef idx="1">
+            <a:schemeClr val="accent1"/>
+          </a:lnRef>
+          <a:fillRef idx="3">
+            <a:schemeClr val="accent1"/>
+          </a:fillRef>
+          <a:effectRef idx="2">
+            <a:schemeClr val="accent1"/>
+          </a:effectRef>
+          <a:fontRef idx="minor">
+            <a:schemeClr val="lt1"/>
+          </a:fontRef>
+        </p:style>
+        <p:txBody>
+          <a:bodyPr rtlCol="0" anchor="ctr"/>
+          <a:lstStyle/>
+          <a:p>
+            <a:pPr algn="ctr"/>
+          </a:p>
+        </p:txBody>
+      </p:sp>
+      <p:sp>
+        <p:nvSpPr>
+          <p:cNvPr id="23" name="TextBox 22"/>
+          <p:cNvSpPr txBox="1"/>
+          <p:nvPr/>
+        </p:nvSpPr>
+        <p:spPr>
+          <a:xfrm>
+            <a:off x="4658868" y="1965960"/>
+            <a:ext cx="320040" cy="365760"/>
+          </a:xfrm>
+          <a:prstGeom prst="rect">
+            <a:avLst/>
+          </a:prstGeom>
+          <a:noFill/>
+        </p:spPr>
+        <p:txBody>
+          <a:bodyPr wrap="square">
+            <a:spAutoFit/>
+          </a:bodyPr>
+          <a:lstStyle/>
+          <a:p>
+            <a:pPr algn="l"/>
+            <a:r>
+              <a:rPr sz="1300" b="1" i="0">
+                <a:solidFill>
+                  <a:srgbClr val="48CAE4"/>
+                </a:solidFill>
+                <a:latin typeface="Calibri"/>
+              </a:rPr>
+              <a:t>4</a:t>
+            </a:r>
+          </a:p>
+        </p:txBody>
+      </p:sp>
+      <p:sp>
+        <p:nvSpPr>
+          <p:cNvPr id="24" name="TextBox 23"/>
+          <p:cNvSpPr txBox="1"/>
+          <p:nvPr/>
+        </p:nvSpPr>
+        <p:spPr>
+          <a:xfrm>
+            <a:off x="4658868" y="2313432"/>
+            <a:ext cx="1197864" cy="658368"/>
+          </a:xfrm>
+          <a:prstGeom prst="rect">
+            <a:avLst/>
+          </a:prstGeom>
+          <a:noFill/>
+        </p:spPr>
+        <p:txBody>
+          <a:bodyPr wrap="square">
+            <a:spAutoFit/>
+          </a:bodyPr>
+          <a:lstStyle/>
+          <a:p>
+            <a:pPr algn="l"/>
+            <a:r>
+              <a:rPr sz="1400" b="1" i="0">
+                <a:solidFill>
+                  <a:srgbClr val="FFFFFF"/>
+                </a:solidFill>
+                <a:latin typeface="Calibri"/>
+              </a:rPr>
+              <a:t>Analyst</a:t>
+            </a:r>
+          </a:p>
+        </p:txBody>
+      </p:sp>
+      <p:sp>
+        <p:nvSpPr>
+          <p:cNvPr id="25" name="TextBox 24"/>
+          <p:cNvSpPr txBox="1"/>
+          <p:nvPr/>
+        </p:nvSpPr>
+        <p:spPr>
+          <a:xfrm>
+            <a:off x="5907024" y="2258568"/>
+            <a:ext cx="73152" cy="365760"/>
+          </a:xfrm>
+          <a:prstGeom prst="rect">
+            <a:avLst/>
+          </a:prstGeom>
+          <a:noFill/>
+        </p:spPr>
+        <p:txBody>
+          <a:bodyPr wrap="square">
+            <a:spAutoFit/>
+          </a:bodyPr>
+          <a:lstStyle/>
+          <a:p>
+            <a:pPr algn="ctr"/>
+            <a:r>
+              <a:rPr sz="1600" b="1" i="0">
+                <a:solidFill>
+                  <a:srgbClr val="557A9A"/>
+                </a:solidFill>
+                <a:latin typeface="Calibri"/>
+              </a:rPr>
+              <a:t>›</a:t>
+            </a:r>
+          </a:p>
+        </p:txBody>
+      </p:sp>
+      <p:sp>
+        <p:nvSpPr>
+          <p:cNvPr id="26" name="Rectangle 25"/>
+          <p:cNvSpPr/>
+          <p:nvPr/>
+        </p:nvSpPr>
+        <p:spPr>
+          <a:xfrm>
+            <a:off x="5952744" y="1874519"/>
+            <a:ext cx="1335024" cy="1143000"/>
+          </a:xfrm>
+          <a:prstGeom prst="rect">
+            <a:avLst/>
+          </a:prstGeom>
+          <a:solidFill>
+            <a:srgbClr val="122235"/>
+          </a:solidFill>
+          <a:ln>
+            <a:noFill/>
+          </a:ln>
+        </p:spPr>
+        <p:style>
+          <a:lnRef idx="1">
+            <a:schemeClr val="accent1"/>
+          </a:lnRef>
+          <a:fillRef idx="3">
+            <a:schemeClr val="accent1"/>
+          </a:fillRef>
+          <a:effectRef idx="2">
+            <a:schemeClr val="accent1"/>
+          </a:effectRef>
+          <a:fontRef idx="minor">
+            <a:schemeClr val="lt1"/>
+          </a:fontRef>
+        </p:style>
+        <p:txBody>
+          <a:bodyPr rtlCol="0" anchor="ctr"/>
+          <a:lstStyle/>
+          <a:p>
+            <a:pPr algn="ctr"/>
+          </a:p>
+        </p:txBody>
+      </p:sp>
+      <p:sp>
+        <p:nvSpPr>
+          <p:cNvPr id="27" name="Rectangle 26"/>
+          <p:cNvSpPr/>
+          <p:nvPr/>
+        </p:nvSpPr>
+        <p:spPr>
+          <a:xfrm>
+            <a:off x="5952744" y="1874519"/>
+            <a:ext cx="1335024" cy="64008"/>
           </a:xfrm>
           <a:prstGeom prst="rect">
             <a:avLst/>
@@ -9338,14 +9378,14 @@
       </p:sp>
       <p:sp>
         <p:nvSpPr>
-          <p:cNvPr id="8" name="TextBox 7"/>
+          <p:cNvPr id="28" name="TextBox 27"/>
           <p:cNvSpPr txBox="1"/>
           <p:nvPr/>
         </p:nvSpPr>
         <p:spPr>
           <a:xfrm>
-            <a:off x="640080" y="2971800"/>
-            <a:ext cx="5029200" cy="640080"/>
+            <a:off x="6044183" y="1965960"/>
+            <a:ext cx="320040" cy="365760"/>
           </a:xfrm>
           <a:prstGeom prst="rect">
             <a:avLst/>
@@ -9360,27 +9400,27 @@
           <a:p>
             <a:pPr algn="l"/>
             <a:r>
-              <a:rPr sz="3000" b="1" i="0">
+              <a:rPr sz="1300" b="1" i="0">
                 <a:solidFill>
                   <a:srgbClr val="00B4D8"/>
                 </a:solidFill>
                 <a:latin typeface="Calibri"/>
               </a:rPr>
-              <a:t>1 billion+</a:t>
-            </a:r>
-          </a:p>
-        </p:txBody>
-      </p:sp>
-      <p:sp>
-        <p:nvSpPr>
-          <p:cNvPr id="9" name="TextBox 8"/>
+              <a:t>5</a:t>
+            </a:r>
+          </a:p>
+        </p:txBody>
+      </p:sp>
+      <p:sp>
+        <p:nvSpPr>
+          <p:cNvPr id="29" name="TextBox 28"/>
           <p:cNvSpPr txBox="1"/>
           <p:nvPr/>
         </p:nvSpPr>
         <p:spPr>
           <a:xfrm>
-            <a:off x="640080" y="3584448"/>
-            <a:ext cx="5029200" cy="658368"/>
+            <a:off x="6044183" y="2313432"/>
+            <a:ext cx="1197864" cy="658368"/>
           </a:xfrm>
           <a:prstGeom prst="rect">
             <a:avLst/>
@@ -9395,34 +9435,69 @@
           <a:p>
             <a:pPr algn="l"/>
             <a:r>
-              <a:rPr sz="1600" b="0" i="0">
+              <a:rPr sz="1400" b="1" i="0">
                 <a:solidFill>
-                  <a:srgbClr val="B8D4E8"/>
+                  <a:srgbClr val="FFFFFF"/>
                 </a:solidFill>
                 <a:latin typeface="Calibri"/>
               </a:rPr>
-              <a:t>wearable users worldwide
-locked in data silos</a:t>
-            </a:r>
-          </a:p>
-        </p:txBody>
-      </p:sp>
-      <p:sp>
-        <p:nvSpPr>
-          <p:cNvPr id="10" name="Rectangle 9"/>
+              <a:t>Sports
+Scientist</a:t>
+            </a:r>
+          </a:p>
+        </p:txBody>
+      </p:sp>
+      <p:sp>
+        <p:nvSpPr>
+          <p:cNvPr id="30" name="TextBox 29"/>
+          <p:cNvSpPr txBox="1"/>
+          <p:nvPr/>
+        </p:nvSpPr>
+        <p:spPr>
+          <a:xfrm>
+            <a:off x="7292340" y="2258568"/>
+            <a:ext cx="73152" cy="365760"/>
+          </a:xfrm>
+          <a:prstGeom prst="rect">
+            <a:avLst/>
+          </a:prstGeom>
+          <a:noFill/>
+        </p:spPr>
+        <p:txBody>
+          <a:bodyPr wrap="square">
+            <a:spAutoFit/>
+          </a:bodyPr>
+          <a:lstStyle/>
+          <a:p>
+            <a:pPr algn="ctr"/>
+            <a:r>
+              <a:rPr sz="1600" b="1" i="0">
+                <a:solidFill>
+                  <a:srgbClr val="557A9A"/>
+                </a:solidFill>
+                <a:latin typeface="Calibri"/>
+              </a:rPr>
+              <a:t>›</a:t>
+            </a:r>
+          </a:p>
+        </p:txBody>
+      </p:sp>
+      <p:sp>
+        <p:nvSpPr>
+          <p:cNvPr id="31" name="Rectangle 30"/>
           <p:cNvSpPr/>
           <p:nvPr/>
         </p:nvSpPr>
         <p:spPr>
           <a:xfrm>
-            <a:off x="6309360" y="2834640"/>
-            <a:ext cx="5394960" cy="1463040"/>
+            <a:off x="7338059" y="1874519"/>
+            <a:ext cx="1335024" cy="1143000"/>
           </a:xfrm>
           <a:prstGeom prst="rect">
             <a:avLst/>
           </a:prstGeom>
           <a:solidFill>
-            <a:srgbClr val="14263A"/>
+            <a:srgbClr val="122235"/>
           </a:solidFill>
           <a:ln>
             <a:noFill/>
@@ -9452,14 +9527,206 @@
       </p:sp>
       <p:sp>
         <p:nvSpPr>
-          <p:cNvPr id="11" name="Rectangle 10"/>
+          <p:cNvPr id="32" name="Rectangle 31"/>
           <p:cNvSpPr/>
           <p:nvPr/>
         </p:nvSpPr>
         <p:spPr>
           <a:xfrm>
-            <a:off x="6309360" y="2834640"/>
-            <a:ext cx="5394960" cy="64008"/>
+            <a:off x="7338059" y="1874519"/>
+            <a:ext cx="1335024" cy="64008"/>
+          </a:xfrm>
+          <a:prstGeom prst="rect">
+            <a:avLst/>
+          </a:prstGeom>
+          <a:solidFill>
+            <a:srgbClr val="48CAE4"/>
+          </a:solidFill>
+          <a:ln>
+            <a:noFill/>
+          </a:ln>
+        </p:spPr>
+        <p:style>
+          <a:lnRef idx="1">
+            <a:schemeClr val="accent1"/>
+          </a:lnRef>
+          <a:fillRef idx="3">
+            <a:schemeClr val="accent1"/>
+          </a:fillRef>
+          <a:effectRef idx="2">
+            <a:schemeClr val="accent1"/>
+          </a:effectRef>
+          <a:fontRef idx="minor">
+            <a:schemeClr val="lt1"/>
+          </a:fontRef>
+        </p:style>
+        <p:txBody>
+          <a:bodyPr rtlCol="0" anchor="ctr"/>
+          <a:lstStyle/>
+          <a:p>
+            <a:pPr algn="ctr"/>
+          </a:p>
+        </p:txBody>
+      </p:sp>
+      <p:sp>
+        <p:nvSpPr>
+          <p:cNvPr id="33" name="TextBox 32"/>
+          <p:cNvSpPr txBox="1"/>
+          <p:nvPr/>
+        </p:nvSpPr>
+        <p:spPr>
+          <a:xfrm>
+            <a:off x="7429499" y="1965960"/>
+            <a:ext cx="320040" cy="365760"/>
+          </a:xfrm>
+          <a:prstGeom prst="rect">
+            <a:avLst/>
+          </a:prstGeom>
+          <a:noFill/>
+        </p:spPr>
+        <p:txBody>
+          <a:bodyPr wrap="square">
+            <a:spAutoFit/>
+          </a:bodyPr>
+          <a:lstStyle/>
+          <a:p>
+            <a:pPr algn="l"/>
+            <a:r>
+              <a:rPr sz="1300" b="1" i="0">
+                <a:solidFill>
+                  <a:srgbClr val="48CAE4"/>
+                </a:solidFill>
+                <a:latin typeface="Calibri"/>
+              </a:rPr>
+              <a:t>6</a:t>
+            </a:r>
+          </a:p>
+        </p:txBody>
+      </p:sp>
+      <p:sp>
+        <p:nvSpPr>
+          <p:cNvPr id="34" name="TextBox 33"/>
+          <p:cNvSpPr txBox="1"/>
+          <p:nvPr/>
+        </p:nvSpPr>
+        <p:spPr>
+          <a:xfrm>
+            <a:off x="7429499" y="2313432"/>
+            <a:ext cx="1197864" cy="658368"/>
+          </a:xfrm>
+          <a:prstGeom prst="rect">
+            <a:avLst/>
+          </a:prstGeom>
+          <a:noFill/>
+        </p:spPr>
+        <p:txBody>
+          <a:bodyPr wrap="square">
+            <a:spAutoFit/>
+          </a:bodyPr>
+          <a:lstStyle/>
+          <a:p>
+            <a:pPr algn="l"/>
+            <a:r>
+              <a:rPr sz="1400" b="1" i="0">
+                <a:solidFill>
+                  <a:srgbClr val="FFFFFF"/>
+                </a:solidFill>
+                <a:latin typeface="Calibri"/>
+              </a:rPr>
+              <a:t>Trend
+Analyzer</a:t>
+            </a:r>
+          </a:p>
+        </p:txBody>
+      </p:sp>
+      <p:sp>
+        <p:nvSpPr>
+          <p:cNvPr id="35" name="TextBox 34"/>
+          <p:cNvSpPr txBox="1"/>
+          <p:nvPr/>
+        </p:nvSpPr>
+        <p:spPr>
+          <a:xfrm>
+            <a:off x="8677656" y="2258568"/>
+            <a:ext cx="73152" cy="365760"/>
+          </a:xfrm>
+          <a:prstGeom prst="rect">
+            <a:avLst/>
+          </a:prstGeom>
+          <a:noFill/>
+        </p:spPr>
+        <p:txBody>
+          <a:bodyPr wrap="square">
+            <a:spAutoFit/>
+          </a:bodyPr>
+          <a:lstStyle/>
+          <a:p>
+            <a:pPr algn="ctr"/>
+            <a:r>
+              <a:rPr sz="1600" b="1" i="0">
+                <a:solidFill>
+                  <a:srgbClr val="557A9A"/>
+                </a:solidFill>
+                <a:latin typeface="Calibri"/>
+              </a:rPr>
+              <a:t>›</a:t>
+            </a:r>
+          </a:p>
+        </p:txBody>
+      </p:sp>
+      <p:sp>
+        <p:nvSpPr>
+          <p:cNvPr id="36" name="Rectangle 35"/>
+          <p:cNvSpPr/>
+          <p:nvPr/>
+        </p:nvSpPr>
+        <p:spPr>
+          <a:xfrm>
+            <a:off x="8723376" y="1874519"/>
+            <a:ext cx="1335024" cy="1143000"/>
+          </a:xfrm>
+          <a:prstGeom prst="rect">
+            <a:avLst/>
+          </a:prstGeom>
+          <a:solidFill>
+            <a:srgbClr val="122235"/>
+          </a:solidFill>
+          <a:ln>
+            <a:noFill/>
+          </a:ln>
+        </p:spPr>
+        <p:style>
+          <a:lnRef idx="1">
+            <a:schemeClr val="accent1"/>
+          </a:lnRef>
+          <a:fillRef idx="3">
+            <a:schemeClr val="accent1"/>
+          </a:fillRef>
+          <a:effectRef idx="2">
+            <a:schemeClr val="accent1"/>
+          </a:effectRef>
+          <a:fontRef idx="minor">
+            <a:schemeClr val="lt1"/>
+          </a:fontRef>
+        </p:style>
+        <p:txBody>
+          <a:bodyPr rtlCol="0" anchor="ctr"/>
+          <a:lstStyle/>
+          <a:p>
+            <a:pPr algn="ctr"/>
+          </a:p>
+        </p:txBody>
+      </p:sp>
+      <p:sp>
+        <p:nvSpPr>
+          <p:cNvPr id="37" name="Rectangle 36"/>
+          <p:cNvSpPr/>
+          <p:nvPr/>
+        </p:nvSpPr>
+        <p:spPr>
+          <a:xfrm>
+            <a:off x="8723376" y="1874519"/>
+            <a:ext cx="1335024" cy="64008"/>
           </a:xfrm>
           <a:prstGeom prst="rect">
             <a:avLst/>
@@ -9495,14 +9762,14 @@
       </p:sp>
       <p:sp>
         <p:nvSpPr>
-          <p:cNvPr id="12" name="TextBox 11"/>
+          <p:cNvPr id="38" name="TextBox 37"/>
           <p:cNvSpPr txBox="1"/>
           <p:nvPr/>
         </p:nvSpPr>
         <p:spPr>
           <a:xfrm>
-            <a:off x="6492240" y="2971800"/>
-            <a:ext cx="5029200" cy="640080"/>
+            <a:off x="8814815" y="1965960"/>
+            <a:ext cx="320040" cy="365760"/>
           </a:xfrm>
           <a:prstGeom prst="rect">
             <a:avLst/>
@@ -9517,27 +9784,27 @@
           <a:p>
             <a:pPr algn="l"/>
             <a:r>
-              <a:rPr sz="3000" b="1" i="0">
+              <a:rPr sz="1300" b="1" i="0">
                 <a:solidFill>
                   <a:srgbClr val="00B4D8"/>
                 </a:solidFill>
                 <a:latin typeface="Calibri"/>
               </a:rPr>
-              <a:t>$150–300/mo</a:t>
-            </a:r>
-          </a:p>
-        </p:txBody>
-      </p:sp>
-      <p:sp>
-        <p:nvSpPr>
-          <p:cNvPr id="13" name="TextBox 12"/>
+              <a:t>7</a:t>
+            </a:r>
+          </a:p>
+        </p:txBody>
+      </p:sp>
+      <p:sp>
+        <p:nvSpPr>
+          <p:cNvPr id="39" name="TextBox 38"/>
           <p:cNvSpPr txBox="1"/>
           <p:nvPr/>
         </p:nvSpPr>
         <p:spPr>
           <a:xfrm>
-            <a:off x="6492240" y="3584448"/>
-            <a:ext cx="5029200" cy="658368"/>
+            <a:off x="8814815" y="2313432"/>
+            <a:ext cx="1197864" cy="658368"/>
           </a:xfrm>
           <a:prstGeom prst="rect">
             <a:avLst/>
@@ -9552,34 +9819,68 @@
           <a:p>
             <a:pPr algn="l"/>
             <a:r>
-              <a:rPr sz="1600" b="0" i="0">
+              <a:rPr sz="1400" b="1" i="0">
                 <a:solidFill>
-                  <a:srgbClr val="B8D4E8"/>
+                  <a:srgbClr val="FFFFFF"/>
                 </a:solidFill>
                 <a:latin typeface="Calibri"/>
               </a:rPr>
-              <a:t>average personal trainer cost —
-this is free</a:t>
-            </a:r>
-          </a:p>
-        </p:txBody>
-      </p:sp>
-      <p:sp>
-        <p:nvSpPr>
-          <p:cNvPr id="14" name="Rectangle 13"/>
+              <a:t>Formatter</a:t>
+            </a:r>
+          </a:p>
+        </p:txBody>
+      </p:sp>
+      <p:sp>
+        <p:nvSpPr>
+          <p:cNvPr id="40" name="TextBox 39"/>
+          <p:cNvSpPr txBox="1"/>
+          <p:nvPr/>
+        </p:nvSpPr>
+        <p:spPr>
+          <a:xfrm>
+            <a:off x="10062972" y="2258568"/>
+            <a:ext cx="73152" cy="365760"/>
+          </a:xfrm>
+          <a:prstGeom prst="rect">
+            <a:avLst/>
+          </a:prstGeom>
+          <a:noFill/>
+        </p:spPr>
+        <p:txBody>
+          <a:bodyPr wrap="square">
+            <a:spAutoFit/>
+          </a:bodyPr>
+          <a:lstStyle/>
+          <a:p>
+            <a:pPr algn="ctr"/>
+            <a:r>
+              <a:rPr sz="1600" b="1" i="0">
+                <a:solidFill>
+                  <a:srgbClr val="557A9A"/>
+                </a:solidFill>
+                <a:latin typeface="Calibri"/>
+              </a:rPr>
+              <a:t>›</a:t>
+            </a:r>
+          </a:p>
+        </p:txBody>
+      </p:sp>
+      <p:sp>
+        <p:nvSpPr>
+          <p:cNvPr id="41" name="Rectangle 40"/>
           <p:cNvSpPr/>
           <p:nvPr/>
         </p:nvSpPr>
         <p:spPr>
           <a:xfrm>
-            <a:off x="457200" y="4663440"/>
-            <a:ext cx="5394960" cy="1463040"/>
+            <a:off x="10108691" y="1874519"/>
+            <a:ext cx="1335024" cy="1143000"/>
           </a:xfrm>
           <a:prstGeom prst="rect">
             <a:avLst/>
           </a:prstGeom>
           <a:solidFill>
-            <a:srgbClr val="14263A"/>
+            <a:srgbClr val="122235"/>
           </a:solidFill>
           <a:ln>
             <a:noFill/>
@@ -9609,14 +9910,205 @@
       </p:sp>
       <p:sp>
         <p:nvSpPr>
-          <p:cNvPr id="15" name="Rectangle 14"/>
+          <p:cNvPr id="42" name="Rectangle 41"/>
           <p:cNvSpPr/>
           <p:nvPr/>
         </p:nvSpPr>
         <p:spPr>
           <a:xfrm>
-            <a:off x="457200" y="4663440"/>
-            <a:ext cx="5394960" cy="64008"/>
+            <a:off x="10108691" y="1874519"/>
+            <a:ext cx="1335024" cy="64008"/>
+          </a:xfrm>
+          <a:prstGeom prst="rect">
+            <a:avLst/>
+          </a:prstGeom>
+          <a:solidFill>
+            <a:srgbClr val="48CAE4"/>
+          </a:solidFill>
+          <a:ln>
+            <a:noFill/>
+          </a:ln>
+        </p:spPr>
+        <p:style>
+          <a:lnRef idx="1">
+            <a:schemeClr val="accent1"/>
+          </a:lnRef>
+          <a:fillRef idx="3">
+            <a:schemeClr val="accent1"/>
+          </a:fillRef>
+          <a:effectRef idx="2">
+            <a:schemeClr val="accent1"/>
+          </a:effectRef>
+          <a:fontRef idx="minor">
+            <a:schemeClr val="lt1"/>
+          </a:fontRef>
+        </p:style>
+        <p:txBody>
+          <a:bodyPr rtlCol="0" anchor="ctr"/>
+          <a:lstStyle/>
+          <a:p>
+            <a:pPr algn="ctr"/>
+          </a:p>
+        </p:txBody>
+      </p:sp>
+      <p:sp>
+        <p:nvSpPr>
+          <p:cNvPr id="43" name="TextBox 42"/>
+          <p:cNvSpPr txBox="1"/>
+          <p:nvPr/>
+        </p:nvSpPr>
+        <p:spPr>
+          <a:xfrm>
+            <a:off x="10200131" y="1965960"/>
+            <a:ext cx="320040" cy="365760"/>
+          </a:xfrm>
+          <a:prstGeom prst="rect">
+            <a:avLst/>
+          </a:prstGeom>
+          <a:noFill/>
+        </p:spPr>
+        <p:txBody>
+          <a:bodyPr wrap="square">
+            <a:spAutoFit/>
+          </a:bodyPr>
+          <a:lstStyle/>
+          <a:p>
+            <a:pPr algn="l"/>
+            <a:r>
+              <a:rPr sz="1300" b="1" i="0">
+                <a:solidFill>
+                  <a:srgbClr val="48CAE4"/>
+                </a:solidFill>
+                <a:latin typeface="Calibri"/>
+              </a:rPr>
+              <a:t>8</a:t>
+            </a:r>
+          </a:p>
+        </p:txBody>
+      </p:sp>
+      <p:sp>
+        <p:nvSpPr>
+          <p:cNvPr id="44" name="TextBox 43"/>
+          <p:cNvSpPr txBox="1"/>
+          <p:nvPr/>
+        </p:nvSpPr>
+        <p:spPr>
+          <a:xfrm>
+            <a:off x="10200131" y="2313432"/>
+            <a:ext cx="1197864" cy="658368"/>
+          </a:xfrm>
+          <a:prstGeom prst="rect">
+            <a:avLst/>
+          </a:prstGeom>
+          <a:noFill/>
+        </p:spPr>
+        <p:txBody>
+          <a:bodyPr wrap="square">
+            <a:spAutoFit/>
+          </a:bodyPr>
+          <a:lstStyle/>
+          <a:p>
+            <a:pPr algn="l"/>
+            <a:r>
+              <a:rPr sz="1400" b="1" i="0">
+                <a:solidFill>
+                  <a:srgbClr val="FFFFFF"/>
+                </a:solidFill>
+                <a:latin typeface="Calibri"/>
+              </a:rPr>
+              <a:t>QA Critic</a:t>
+            </a:r>
+          </a:p>
+        </p:txBody>
+      </p:sp>
+      <p:sp>
+        <p:nvSpPr>
+          <p:cNvPr id="45" name="TextBox 44"/>
+          <p:cNvSpPr txBox="1"/>
+          <p:nvPr/>
+        </p:nvSpPr>
+        <p:spPr>
+          <a:xfrm>
+            <a:off x="411480" y="3291840"/>
+            <a:ext cx="9144000" cy="411480"/>
+          </a:xfrm>
+          <a:prstGeom prst="rect">
+            <a:avLst/>
+          </a:prstGeom>
+          <a:noFill/>
+        </p:spPr>
+        <p:txBody>
+          <a:bodyPr wrap="square">
+            <a:spAutoFit/>
+          </a:bodyPr>
+          <a:lstStyle/>
+          <a:p>
+            <a:pPr algn="l"/>
+            <a:r>
+              <a:rPr sz="1200" b="1" i="0">
+                <a:solidFill>
+                  <a:srgbClr val="00B4D8"/>
+                </a:solidFill>
+                <a:latin typeface="Calibri"/>
+              </a:rPr>
+              <a:t>STACK</a:t>
+            </a:r>
+          </a:p>
+        </p:txBody>
+      </p:sp>
+      <p:sp>
+        <p:nvSpPr>
+          <p:cNvPr id="46" name="Rectangle 45"/>
+          <p:cNvSpPr/>
+          <p:nvPr/>
+        </p:nvSpPr>
+        <p:spPr>
+          <a:xfrm>
+            <a:off x="411480" y="3703320"/>
+            <a:ext cx="2788920" cy="960120"/>
+          </a:xfrm>
+          <a:prstGeom prst="rect">
+            <a:avLst/>
+          </a:prstGeom>
+          <a:solidFill>
+            <a:srgbClr val="122235"/>
+          </a:solidFill>
+          <a:ln>
+            <a:noFill/>
+          </a:ln>
+        </p:spPr>
+        <p:style>
+          <a:lnRef idx="1">
+            <a:schemeClr val="accent1"/>
+          </a:lnRef>
+          <a:fillRef idx="3">
+            <a:schemeClr val="accent1"/>
+          </a:fillRef>
+          <a:effectRef idx="2">
+            <a:schemeClr val="accent1"/>
+          </a:effectRef>
+          <a:fontRef idx="minor">
+            <a:schemeClr val="lt1"/>
+          </a:fontRef>
+        </p:style>
+        <p:txBody>
+          <a:bodyPr rtlCol="0" anchor="ctr"/>
+          <a:lstStyle/>
+          <a:p>
+            <a:pPr algn="ctr"/>
+          </a:p>
+        </p:txBody>
+      </p:sp>
+      <p:sp>
+        <p:nvSpPr>
+          <p:cNvPr id="47" name="Rectangle 46"/>
+          <p:cNvSpPr/>
+          <p:nvPr/>
+        </p:nvSpPr>
+        <p:spPr>
+          <a:xfrm>
+            <a:off x="411480" y="3703320"/>
+            <a:ext cx="2788920" cy="59436"/>
           </a:xfrm>
           <a:prstGeom prst="rect">
             <a:avLst/>
@@ -9652,14 +10144,14 @@
       </p:sp>
       <p:sp>
         <p:nvSpPr>
-          <p:cNvPr id="16" name="TextBox 15"/>
+          <p:cNvPr id="48" name="TextBox 47"/>
           <p:cNvSpPr txBox="1"/>
           <p:nvPr/>
         </p:nvSpPr>
         <p:spPr>
           <a:xfrm>
-            <a:off x="640080" y="4800600"/>
-            <a:ext cx="5029200" cy="640080"/>
+            <a:off x="548640" y="3813048"/>
+            <a:ext cx="2468880" cy="365760"/>
           </a:xfrm>
           <a:prstGeom prst="rect">
             <a:avLst/>
@@ -9674,27 +10166,27 @@
           <a:p>
             <a:pPr algn="l"/>
             <a:r>
-              <a:rPr sz="3000" b="1" i="0">
+              <a:rPr sz="1300" b="1" i="0">
                 <a:solidFill>
-                  <a:srgbClr val="00B4D8"/>
+                  <a:srgbClr val="48CAE4"/>
                 </a:solidFill>
                 <a:latin typeface="Calibri"/>
               </a:rPr>
-              <a:t>13+ sources</a:t>
-            </a:r>
-          </a:p>
-        </p:txBody>
-      </p:sp>
-      <p:sp>
-        <p:nvSpPr>
-          <p:cNvPr id="17" name="TextBox 16"/>
+              <a:t>Frontend</a:t>
+            </a:r>
+          </a:p>
+        </p:txBody>
+      </p:sp>
+      <p:sp>
+        <p:nvSpPr>
+          <p:cNvPr id="49" name="TextBox 48"/>
           <p:cNvSpPr txBox="1"/>
           <p:nvPr/>
         </p:nvSpPr>
         <p:spPr>
           <a:xfrm>
-            <a:off x="640080" y="5413248"/>
-            <a:ext cx="5029200" cy="658368"/>
+            <a:off x="548640" y="4160520"/>
+            <a:ext cx="2560320" cy="502920"/>
           </a:xfrm>
           <a:prstGeom prst="rect">
             <a:avLst/>
@@ -9709,34 +10201,33 @@
           <a:p>
             <a:pPr algn="l"/>
             <a:r>
-              <a:rPr sz="1600" b="0" i="0">
+              <a:rPr sz="1200" b="0" i="0">
                 <a:solidFill>
-                  <a:srgbClr val="B8D4E8"/>
+                  <a:srgbClr val="B0CEE6"/>
                 </a:solidFill>
                 <a:latin typeface="Calibri"/>
               </a:rPr>
-              <a:t>supported at launch,
-zero hardware required</a:t>
-            </a:r>
-          </a:p>
-        </p:txBody>
-      </p:sp>
-      <p:sp>
-        <p:nvSpPr>
-          <p:cNvPr id="18" name="Rectangle 17"/>
+              <a:t>React 19 · Vite · Clerk Auth · Chart.js · Leaflet · PWA</a:t>
+            </a:r>
+          </a:p>
+        </p:txBody>
+      </p:sp>
+      <p:sp>
+        <p:nvSpPr>
+          <p:cNvPr id="50" name="Rectangle 49"/>
           <p:cNvSpPr/>
           <p:nvPr/>
         </p:nvSpPr>
         <p:spPr>
           <a:xfrm>
-            <a:off x="6309360" y="4663440"/>
-            <a:ext cx="5394960" cy="1463040"/>
+            <a:off x="3355848" y="3703320"/>
+            <a:ext cx="2788920" cy="960120"/>
           </a:xfrm>
           <a:prstGeom prst="rect">
             <a:avLst/>
           </a:prstGeom>
           <a:solidFill>
-            <a:srgbClr val="14263A"/>
+            <a:srgbClr val="122235"/>
           </a:solidFill>
           <a:ln>
             <a:noFill/>
@@ -9766,14 +10257,14 @@
       </p:sp>
       <p:sp>
         <p:nvSpPr>
-          <p:cNvPr id="19" name="Rectangle 18"/>
+          <p:cNvPr id="51" name="Rectangle 50"/>
           <p:cNvSpPr/>
           <p:nvPr/>
         </p:nvSpPr>
         <p:spPr>
           <a:xfrm>
-            <a:off x="6309360" y="4663440"/>
-            <a:ext cx="5394960" cy="64008"/>
+            <a:off x="3355848" y="3703320"/>
+            <a:ext cx="2788920" cy="59436"/>
           </a:xfrm>
           <a:prstGeom prst="rect">
             <a:avLst/>
@@ -9809,14 +10300,14 @@
       </p:sp>
       <p:sp>
         <p:nvSpPr>
-          <p:cNvPr id="20" name="TextBox 19"/>
+          <p:cNvPr id="52" name="TextBox 51"/>
           <p:cNvSpPr txBox="1"/>
           <p:nvPr/>
         </p:nvSpPr>
         <p:spPr>
           <a:xfrm>
-            <a:off x="6492240" y="4800600"/>
-            <a:ext cx="5029200" cy="640080"/>
+            <a:off x="3493008" y="3813048"/>
+            <a:ext cx="2468880" cy="365760"/>
           </a:xfrm>
           <a:prstGeom prst="rect">
             <a:avLst/>
@@ -9831,27 +10322,27 @@
           <a:p>
             <a:pPr algn="l"/>
             <a:r>
-              <a:rPr sz="3000" b="1" i="0">
+              <a:rPr sz="1300" b="1" i="0">
                 <a:solidFill>
-                  <a:srgbClr val="00B4D8"/>
+                  <a:srgbClr val="48CAE4"/>
                 </a:solidFill>
                 <a:latin typeface="Calibri"/>
               </a:rPr>
-              <a:t>5 AI features</a:t>
-            </a:r>
-          </a:p>
-        </p:txBody>
-      </p:sp>
-      <p:sp>
-        <p:nvSpPr>
-          <p:cNvPr id="21" name="TextBox 20"/>
+              <a:t>Backend</a:t>
+            </a:r>
+          </a:p>
+        </p:txBody>
+      </p:sp>
+      <p:sp>
+        <p:nvSpPr>
+          <p:cNvPr id="53" name="TextBox 52"/>
           <p:cNvSpPr txBox="1"/>
           <p:nvPr/>
         </p:nvSpPr>
         <p:spPr>
           <a:xfrm>
-            <a:off x="6492240" y="5413248"/>
-            <a:ext cx="5029200" cy="658368"/>
+            <a:off x="3493008" y="4160520"/>
+            <a:ext cx="2560320" cy="502920"/>
           </a:xfrm>
           <a:prstGeom prst="rect">
             <a:avLst/>
@@ -9866,14 +10357,325 @@
           <a:p>
             <a:pPr algn="l"/>
             <a:r>
-              <a:rPr sz="1600" b="0" i="0">
+              <a:rPr sz="1200" b="0" i="0">
                 <a:solidFill>
-                  <a:srgbClr val="B8D4E8"/>
+                  <a:srgbClr val="B0CEE6"/>
                 </a:solidFill>
                 <a:latin typeface="Calibri"/>
               </a:rPr>
-              <a:t>live and deployed today —
-not a mockup</a:t>
+              <a:t>FastAPI on Vercel (always-on, free) · Supabase Postgres + RLS</a:t>
+            </a:r>
+          </a:p>
+        </p:txBody>
+      </p:sp>
+      <p:sp>
+        <p:nvSpPr>
+          <p:cNvPr id="54" name="Rectangle 53"/>
+          <p:cNvSpPr/>
+          <p:nvPr/>
+        </p:nvSpPr>
+        <p:spPr>
+          <a:xfrm>
+            <a:off x="6300216" y="3703320"/>
+            <a:ext cx="2788920" cy="960120"/>
+          </a:xfrm>
+          <a:prstGeom prst="rect">
+            <a:avLst/>
+          </a:prstGeom>
+          <a:solidFill>
+            <a:srgbClr val="122235"/>
+          </a:solidFill>
+          <a:ln>
+            <a:noFill/>
+          </a:ln>
+        </p:spPr>
+        <p:style>
+          <a:lnRef idx="1">
+            <a:schemeClr val="accent1"/>
+          </a:lnRef>
+          <a:fillRef idx="3">
+            <a:schemeClr val="accent1"/>
+          </a:fillRef>
+          <a:effectRef idx="2">
+            <a:schemeClr val="accent1"/>
+          </a:effectRef>
+          <a:fontRef idx="minor">
+            <a:schemeClr val="lt1"/>
+          </a:fontRef>
+        </p:style>
+        <p:txBody>
+          <a:bodyPr rtlCol="0" anchor="ctr"/>
+          <a:lstStyle/>
+          <a:p>
+            <a:pPr algn="ctr"/>
+          </a:p>
+        </p:txBody>
+      </p:sp>
+      <p:sp>
+        <p:nvSpPr>
+          <p:cNvPr id="55" name="Rectangle 54"/>
+          <p:cNvSpPr/>
+          <p:nvPr/>
+        </p:nvSpPr>
+        <p:spPr>
+          <a:xfrm>
+            <a:off x="6300216" y="3703320"/>
+            <a:ext cx="2788920" cy="59436"/>
+          </a:xfrm>
+          <a:prstGeom prst="rect">
+            <a:avLst/>
+          </a:prstGeom>
+          <a:solidFill>
+            <a:srgbClr val="00B4D8"/>
+          </a:solidFill>
+          <a:ln>
+            <a:noFill/>
+          </a:ln>
+        </p:spPr>
+        <p:style>
+          <a:lnRef idx="1">
+            <a:schemeClr val="accent1"/>
+          </a:lnRef>
+          <a:fillRef idx="3">
+            <a:schemeClr val="accent1"/>
+          </a:fillRef>
+          <a:effectRef idx="2">
+            <a:schemeClr val="accent1"/>
+          </a:effectRef>
+          <a:fontRef idx="minor">
+            <a:schemeClr val="lt1"/>
+          </a:fontRef>
+        </p:style>
+        <p:txBody>
+          <a:bodyPr rtlCol="0" anchor="ctr"/>
+          <a:lstStyle/>
+          <a:p>
+            <a:pPr algn="ctr"/>
+          </a:p>
+        </p:txBody>
+      </p:sp>
+      <p:sp>
+        <p:nvSpPr>
+          <p:cNvPr id="56" name="TextBox 55"/>
+          <p:cNvSpPr txBox="1"/>
+          <p:nvPr/>
+        </p:nvSpPr>
+        <p:spPr>
+          <a:xfrm>
+            <a:off x="6437376" y="3813048"/>
+            <a:ext cx="2468880" cy="365760"/>
+          </a:xfrm>
+          <a:prstGeom prst="rect">
+            <a:avLst/>
+          </a:prstGeom>
+          <a:noFill/>
+        </p:spPr>
+        <p:txBody>
+          <a:bodyPr wrap="square">
+            <a:spAutoFit/>
+          </a:bodyPr>
+          <a:lstStyle/>
+          <a:p>
+            <a:pPr algn="l"/>
+            <a:r>
+              <a:rPr sz="1300" b="1" i="0">
+                <a:solidFill>
+                  <a:srgbClr val="48CAE4"/>
+                </a:solidFill>
+                <a:latin typeface="Calibri"/>
+              </a:rPr>
+              <a:t>AI — Heavy</a:t>
+            </a:r>
+          </a:p>
+        </p:txBody>
+      </p:sp>
+      <p:sp>
+        <p:nvSpPr>
+          <p:cNvPr id="57" name="TextBox 56"/>
+          <p:cNvSpPr txBox="1"/>
+          <p:nvPr/>
+        </p:nvSpPr>
+        <p:spPr>
+          <a:xfrm>
+            <a:off x="6437376" y="4160520"/>
+            <a:ext cx="2560320" cy="502920"/>
+          </a:xfrm>
+          <a:prstGeom prst="rect">
+            <a:avLst/>
+          </a:prstGeom>
+          <a:noFill/>
+        </p:spPr>
+        <p:txBody>
+          <a:bodyPr wrap="square">
+            <a:spAutoFit/>
+          </a:bodyPr>
+          <a:lstStyle/>
+          <a:p>
+            <a:pPr algn="l"/>
+            <a:r>
+              <a:rPr sz="1200" b="0" i="0">
+                <a:solidFill>
+                  <a:srgbClr val="B0CEE6"/>
+                </a:solidFill>
+                <a:latin typeface="Calibri"/>
+              </a:rPr>
+              <a:t>CrewAI · litellm · Groq + OpenRouter free pool · HuggingFace Space</a:t>
+            </a:r>
+          </a:p>
+        </p:txBody>
+      </p:sp>
+      <p:sp>
+        <p:nvSpPr>
+          <p:cNvPr id="58" name="Rectangle 57"/>
+          <p:cNvSpPr/>
+          <p:nvPr/>
+        </p:nvSpPr>
+        <p:spPr>
+          <a:xfrm>
+            <a:off x="9244584" y="3703320"/>
+            <a:ext cx="2788920" cy="960120"/>
+          </a:xfrm>
+          <a:prstGeom prst="rect">
+            <a:avLst/>
+          </a:prstGeom>
+          <a:solidFill>
+            <a:srgbClr val="122235"/>
+          </a:solidFill>
+          <a:ln>
+            <a:noFill/>
+          </a:ln>
+        </p:spPr>
+        <p:style>
+          <a:lnRef idx="1">
+            <a:schemeClr val="accent1"/>
+          </a:lnRef>
+          <a:fillRef idx="3">
+            <a:schemeClr val="accent1"/>
+          </a:fillRef>
+          <a:effectRef idx="2">
+            <a:schemeClr val="accent1"/>
+          </a:effectRef>
+          <a:fontRef idx="minor">
+            <a:schemeClr val="lt1"/>
+          </a:fontRef>
+        </p:style>
+        <p:txBody>
+          <a:bodyPr rtlCol="0" anchor="ctr"/>
+          <a:lstStyle/>
+          <a:p>
+            <a:pPr algn="ctr"/>
+          </a:p>
+        </p:txBody>
+      </p:sp>
+      <p:sp>
+        <p:nvSpPr>
+          <p:cNvPr id="59" name="Rectangle 58"/>
+          <p:cNvSpPr/>
+          <p:nvPr/>
+        </p:nvSpPr>
+        <p:spPr>
+          <a:xfrm>
+            <a:off x="9244584" y="3703320"/>
+            <a:ext cx="2788920" cy="59436"/>
+          </a:xfrm>
+          <a:prstGeom prst="rect">
+            <a:avLst/>
+          </a:prstGeom>
+          <a:solidFill>
+            <a:srgbClr val="00B4D8"/>
+          </a:solidFill>
+          <a:ln>
+            <a:noFill/>
+          </a:ln>
+        </p:spPr>
+        <p:style>
+          <a:lnRef idx="1">
+            <a:schemeClr val="accent1"/>
+          </a:lnRef>
+          <a:fillRef idx="3">
+            <a:schemeClr val="accent1"/>
+          </a:fillRef>
+          <a:effectRef idx="2">
+            <a:schemeClr val="accent1"/>
+          </a:effectRef>
+          <a:fontRef idx="minor">
+            <a:schemeClr val="lt1"/>
+          </a:fontRef>
+        </p:style>
+        <p:txBody>
+          <a:bodyPr rtlCol="0" anchor="ctr"/>
+          <a:lstStyle/>
+          <a:p>
+            <a:pPr algn="ctr"/>
+          </a:p>
+        </p:txBody>
+      </p:sp>
+      <p:sp>
+        <p:nvSpPr>
+          <p:cNvPr id="60" name="TextBox 59"/>
+          <p:cNvSpPr txBox="1"/>
+          <p:nvPr/>
+        </p:nvSpPr>
+        <p:spPr>
+          <a:xfrm>
+            <a:off x="9381744" y="3813048"/>
+            <a:ext cx="2468880" cy="365760"/>
+          </a:xfrm>
+          <a:prstGeom prst="rect">
+            <a:avLst/>
+          </a:prstGeom>
+          <a:noFill/>
+        </p:spPr>
+        <p:txBody>
+          <a:bodyPr wrap="square">
+            <a:spAutoFit/>
+          </a:bodyPr>
+          <a:lstStyle/>
+          <a:p>
+            <a:pPr algn="l"/>
+            <a:r>
+              <a:rPr sz="1300" b="1" i="0">
+                <a:solidFill>
+                  <a:srgbClr val="48CAE4"/>
+                </a:solidFill>
+                <a:latin typeface="Calibri"/>
+              </a:rPr>
+              <a:t>AI — Light</a:t>
+            </a:r>
+          </a:p>
+        </p:txBody>
+      </p:sp>
+      <p:sp>
+        <p:nvSpPr>
+          <p:cNvPr id="61" name="TextBox 60"/>
+          <p:cNvSpPr txBox="1"/>
+          <p:nvPr/>
+        </p:nvSpPr>
+        <p:spPr>
+          <a:xfrm>
+            <a:off x="9381744" y="4160520"/>
+            <a:ext cx="2560320" cy="502920"/>
+          </a:xfrm>
+          <a:prstGeom prst="rect">
+            <a:avLst/>
+          </a:prstGeom>
+          <a:noFill/>
+        </p:spPr>
+        <p:txBody>
+          <a:bodyPr wrap="square">
+            <a:spAutoFit/>
+          </a:bodyPr>
+          <a:lstStyle/>
+          <a:p>
+            <a:pPr algn="l"/>
+            <a:r>
+              <a:rPr sz="1200" b="0" i="0">
+                <a:solidFill>
+                  <a:srgbClr val="B0CEE6"/>
+                </a:solidFill>
+                <a:latin typeface="Calibri"/>
+              </a:rPr>
+              <a:t>llm_lite.py: multi-model failover · 200 calls/user/day guardrail</a:t>
             </a:r>
           </a:p>
         </p:txBody>
@@ -9892,7 +10694,7 @@
     <p:bg>
       <p:bgPr>
         <a:solidFill>
-          <a:srgbClr val="0D1B2A"/>
+          <a:srgbClr val="0A1422"/>
         </a:solidFill>
         <a:effectLst/>
       </p:bgPr>
@@ -9913,7 +10715,7 @@
         <p:spPr>
           <a:xfrm>
             <a:off x="0" y="0"/>
-            <a:ext cx="73152" cy="6858000"/>
+            <a:ext cx="64008" cy="6858000"/>
           </a:xfrm>
           <a:prstGeom prst="rect">
             <a:avLst/>
@@ -9955,8 +10757,8 @@
         </p:nvSpPr>
         <p:spPr>
           <a:xfrm>
-            <a:off x="457200" y="365760"/>
-            <a:ext cx="9144000" cy="548640"/>
+            <a:off x="411480" y="274320"/>
+            <a:ext cx="9144000" cy="411480"/>
           </a:xfrm>
           <a:prstGeom prst="rect">
             <a:avLst/>
@@ -9971,13 +10773,13 @@
           <a:p>
             <a:pPr algn="l"/>
             <a:r>
-              <a:rPr sz="1300" b="1" i="0">
+              <a:rPr sz="1200" b="1" i="0">
                 <a:solidFill>
                   <a:srgbClr val="00B4D8"/>
                 </a:solidFill>
                 <a:latin typeface="Calibri"/>
               </a:rPr>
-              <a:t>LIVE DEMO</a:t>
+              <a:t>IMPACT</a:t>
             </a:r>
           </a:p>
         </p:txBody>
@@ -9990,8 +10792,8 @@
         </p:nvSpPr>
         <p:spPr>
           <a:xfrm>
-            <a:off x="457200" y="960120"/>
-            <a:ext cx="9144000" cy="685800"/>
+            <a:off x="411480" y="777240"/>
+            <a:ext cx="10058400" cy="822960"/>
           </a:xfrm>
           <a:prstGeom prst="rect">
             <a:avLst/>
@@ -10006,13 +10808,13 @@
           <a:p>
             <a:pPr algn="l"/>
             <a:r>
-              <a:rPr sz="3800" b="1" i="0">
+              <a:rPr sz="4000" b="1" i="0">
                 <a:solidFill>
                   <a:srgbClr val="FFFFFF"/>
                 </a:solidFill>
                 <a:latin typeface="Calibri"/>
               </a:rPr>
-              <a:t>Built, deployed, and running now.</a:t>
+              <a:t>Big problem. Free solution. Ready now.</a:t>
             </a:r>
           </a:p>
         </p:txBody>
@@ -10025,8 +10827,8 @@
         </p:nvSpPr>
         <p:spPr>
           <a:xfrm>
-            <a:off x="457200" y="1783080"/>
-            <a:ext cx="1463040" cy="45720"/>
+            <a:off x="411480" y="1737360"/>
+            <a:ext cx="1828800" cy="50292"/>
           </a:xfrm>
           <a:prstGeom prst="rect">
             <a:avLst/>
@@ -10068,14 +10870,14 @@
         </p:nvSpPr>
         <p:spPr>
           <a:xfrm>
-            <a:off x="457200" y="2103120"/>
-            <a:ext cx="10972800" cy="868680"/>
+            <a:off x="411480" y="2011680"/>
+            <a:ext cx="5486400" cy="1920240"/>
           </a:xfrm>
           <a:prstGeom prst="rect">
             <a:avLst/>
           </a:prstGeom>
           <a:solidFill>
-            <a:srgbClr val="14263A"/>
+            <a:srgbClr val="122235"/>
           </a:solidFill>
           <a:ln>
             <a:noFill/>
@@ -10111,14 +10913,14 @@
         </p:nvSpPr>
         <p:spPr>
           <a:xfrm>
-            <a:off x="457200" y="2103120"/>
-            <a:ext cx="73152" cy="868680"/>
+            <a:off x="411480" y="2011680"/>
+            <a:ext cx="5486400" cy="73152"/>
           </a:xfrm>
           <a:prstGeom prst="rect">
             <a:avLst/>
           </a:prstGeom>
           <a:solidFill>
-            <a:srgbClr val="48CAE4"/>
+            <a:srgbClr val="00B4D8"/>
           </a:solidFill>
           <a:ln>
             <a:noFill/>
@@ -10154,8 +10956,8 @@
         </p:nvSpPr>
         <p:spPr>
           <a:xfrm>
-            <a:off x="685800" y="2194560"/>
-            <a:ext cx="5029200" cy="411480"/>
+            <a:off x="640080" y="2194560"/>
+            <a:ext cx="5029200" cy="868680"/>
           </a:xfrm>
           <a:prstGeom prst="rect">
             <a:avLst/>
@@ -10170,13 +10972,13 @@
           <a:p>
             <a:pPr algn="l"/>
             <a:r>
-              <a:rPr sz="1700" b="1" i="0">
+              <a:rPr sz="4400" b="1" i="0">
                 <a:solidFill>
-                  <a:srgbClr val="FFFFFF"/>
+                  <a:srgbClr val="00B4D8"/>
                 </a:solidFill>
                 <a:latin typeface="Calibri"/>
               </a:rPr>
-              <a:t>fitness-ai-agents.vercel.app</a:t>
+              <a:t>1 billion+</a:t>
             </a:r>
           </a:p>
         </p:txBody>
@@ -10189,8 +10991,8 @@
         </p:nvSpPr>
         <p:spPr>
           <a:xfrm>
-            <a:off x="685800" y="2578608"/>
-            <a:ext cx="10515600" cy="347472"/>
+            <a:off x="640080" y="3063240"/>
+            <a:ext cx="5029200" cy="777240"/>
           </a:xfrm>
           <a:prstGeom prst="rect">
             <a:avLst/>
@@ -10205,13 +11007,14 @@
           <a:p>
             <a:pPr algn="l"/>
             <a:r>
-              <a:rPr sz="1500" b="0" i="0">
+              <a:rPr sz="1800" b="0" i="0">
                 <a:solidFill>
-                  <a:srgbClr val="B8D4E8"/>
+                  <a:srgbClr val="B0CEE6"/>
                 </a:solidFill>
                 <a:latin typeface="Calibri"/>
               </a:rPr>
-              <a:t>Full dashboard — sign up or use /demo (no auth required)</a:t>
+              <a:t>people own wearables
+with siloed, unanalyzed data</a:t>
             </a:r>
           </a:p>
         </p:txBody>
@@ -10224,14 +11027,14 @@
         </p:nvSpPr>
         <p:spPr>
           <a:xfrm>
-            <a:off x="457200" y="3154679"/>
-            <a:ext cx="10972800" cy="868680"/>
+            <a:off x="6355080" y="2011680"/>
+            <a:ext cx="5486400" cy="1920240"/>
           </a:xfrm>
           <a:prstGeom prst="rect">
             <a:avLst/>
           </a:prstGeom>
           <a:solidFill>
-            <a:srgbClr val="14263A"/>
+            <a:srgbClr val="122235"/>
           </a:solidFill>
           <a:ln>
             <a:noFill/>
@@ -10267,14 +11070,14 @@
         </p:nvSpPr>
         <p:spPr>
           <a:xfrm>
-            <a:off x="457200" y="3154679"/>
-            <a:ext cx="73152" cy="868680"/>
+            <a:off x="6355080" y="2011680"/>
+            <a:ext cx="5486400" cy="73152"/>
           </a:xfrm>
           <a:prstGeom prst="rect">
             <a:avLst/>
           </a:prstGeom>
           <a:solidFill>
-            <a:srgbClr val="48CAE4"/>
+            <a:srgbClr val="00B4D8"/>
           </a:solidFill>
           <a:ln>
             <a:noFill/>
@@ -10310,8 +11113,8 @@
         </p:nvSpPr>
         <p:spPr>
           <a:xfrm>
-            <a:off x="685800" y="3246120"/>
-            <a:ext cx="5029200" cy="411480"/>
+            <a:off x="6583680" y="2194560"/>
+            <a:ext cx="5029200" cy="868680"/>
           </a:xfrm>
           <a:prstGeom prst="rect">
             <a:avLst/>
@@ -10326,13 +11129,13 @@
           <a:p>
             <a:pPr algn="l"/>
             <a:r>
-              <a:rPr sz="1700" b="1" i="0">
+              <a:rPr sz="4400" b="1" i="0">
                 <a:solidFill>
-                  <a:srgbClr val="FFFFFF"/>
+                  <a:srgbClr val="00B4D8"/>
                 </a:solidFill>
                 <a:latin typeface="Calibri"/>
               </a:rPr>
-              <a:t>pymite6941-fitness-ai-agents-demo.hf.space</a:t>
+              <a:t>$0</a:t>
             </a:r>
           </a:p>
         </p:txBody>
@@ -10345,8 +11148,8 @@
         </p:nvSpPr>
         <p:spPr>
           <a:xfrm>
-            <a:off x="685800" y="3630168"/>
-            <a:ext cx="10515600" cy="347472"/>
+            <a:off x="6583680" y="3063240"/>
+            <a:ext cx="5029200" cy="777240"/>
           </a:xfrm>
           <a:prstGeom prst="rect">
             <a:avLst/>
@@ -10361,13 +11164,14 @@
           <a:p>
             <a:pPr algn="l"/>
             <a:r>
-              <a:rPr sz="1500" b="0" i="0">
+              <a:rPr sz="1800" b="0" i="0">
                 <a:solidFill>
-                  <a:srgbClr val="B8D4E8"/>
+                  <a:srgbClr val="B0CEE6"/>
                 </a:solidFill>
                 <a:latin typeface="Calibri"/>
               </a:rPr>
-              <a:t>Live Gradio 8-agent pipeline — drop in any CSV</a:t>
+              <a:t>cost to the user
+vs. $15–300/mo for alternatives</a:t>
             </a:r>
           </a:p>
         </p:txBody>
@@ -10380,14 +11184,14 @@
         </p:nvSpPr>
         <p:spPr>
           <a:xfrm>
-            <a:off x="457200" y="4206240"/>
-            <a:ext cx="10972800" cy="868680"/>
+            <a:off x="411480" y="4251960"/>
+            <a:ext cx="5486400" cy="1920240"/>
           </a:xfrm>
           <a:prstGeom prst="rect">
             <a:avLst/>
           </a:prstGeom>
           <a:solidFill>
-            <a:srgbClr val="14263A"/>
+            <a:srgbClr val="122235"/>
           </a:solidFill>
           <a:ln>
             <a:noFill/>
@@ -10423,14 +11227,14 @@
         </p:nvSpPr>
         <p:spPr>
           <a:xfrm>
-            <a:off x="457200" y="4206240"/>
-            <a:ext cx="73152" cy="868680"/>
+            <a:off x="411480" y="4251960"/>
+            <a:ext cx="5486400" cy="73152"/>
           </a:xfrm>
           <a:prstGeom prst="rect">
             <a:avLst/>
           </a:prstGeom>
           <a:solidFill>
-            <a:srgbClr val="48CAE4"/>
+            <a:srgbClr val="00B4D8"/>
           </a:solidFill>
           <a:ln>
             <a:noFill/>
@@ -10466,8 +11270,8 @@
         </p:nvSpPr>
         <p:spPr>
           <a:xfrm>
-            <a:off x="685800" y="4297679"/>
-            <a:ext cx="5029200" cy="411480"/>
+            <a:off x="640080" y="4434840"/>
+            <a:ext cx="5029200" cy="868680"/>
           </a:xfrm>
           <a:prstGeom prst="rect">
             <a:avLst/>
@@ -10482,13 +11286,13 @@
           <a:p>
             <a:pPr algn="l"/>
             <a:r>
-              <a:rPr sz="1700" b="1" i="0">
+              <a:rPr sz="4400" b="1" i="0">
                 <a:solidFill>
-                  <a:srgbClr val="FFFFFF"/>
+                  <a:srgbClr val="00B4D8"/>
                 </a:solidFill>
                 <a:latin typeface="Calibri"/>
               </a:rPr>
-              <a:t>API: backend-seven-topaz-23.vercel.app</a:t>
+              <a:t>13+ sources</a:t>
             </a:r>
           </a:p>
         </p:txBody>
@@ -10501,8 +11305,8 @@
         </p:nvSpPr>
         <p:spPr>
           <a:xfrm>
-            <a:off x="685800" y="4681727"/>
-            <a:ext cx="10515600" cy="347472"/>
+            <a:off x="640080" y="5303520"/>
+            <a:ext cx="5029200" cy="777240"/>
           </a:xfrm>
           <a:prstGeom prst="rect">
             <a:avLst/>
@@ -10517,13 +11321,14 @@
           <a:p>
             <a:pPr algn="l"/>
             <a:r>
-              <a:rPr sz="1500" b="0" i="0">
+              <a:rPr sz="1800" b="0" i="0">
                 <a:solidFill>
-                  <a:srgbClr val="B8D4E8"/>
+                  <a:srgbClr val="B0CEE6"/>
                 </a:solidFill>
                 <a:latin typeface="Calibri"/>
               </a:rPr>
-              <a:t>Always-on FastAPI backend · /health → 200 right now</a:t>
+              <a:t>import at launch
+no new hardware required</a:t>
             </a:r>
           </a:p>
         </p:txBody>
@@ -10536,14 +11341,14 @@
         </p:nvSpPr>
         <p:spPr>
           <a:xfrm>
-            <a:off x="457200" y="5257800"/>
-            <a:ext cx="10972800" cy="868680"/>
+            <a:off x="6355080" y="4251960"/>
+            <a:ext cx="5486400" cy="1920240"/>
           </a:xfrm>
           <a:prstGeom prst="rect">
             <a:avLst/>
           </a:prstGeom>
           <a:solidFill>
-            <a:srgbClr val="14263A"/>
+            <a:srgbClr val="122235"/>
           </a:solidFill>
           <a:ln>
             <a:noFill/>
@@ -10579,14 +11384,14 @@
         </p:nvSpPr>
         <p:spPr>
           <a:xfrm>
-            <a:off x="457200" y="5257800"/>
-            <a:ext cx="73152" cy="868680"/>
+            <a:off x="6355080" y="4251960"/>
+            <a:ext cx="5486400" cy="73152"/>
           </a:xfrm>
           <a:prstGeom prst="rect">
             <a:avLst/>
           </a:prstGeom>
           <a:solidFill>
-            <a:srgbClr val="48CAE4"/>
+            <a:srgbClr val="00B4D8"/>
           </a:solidFill>
           <a:ln>
             <a:noFill/>
@@ -10622,8 +11427,8 @@
         </p:nvSpPr>
         <p:spPr>
           <a:xfrm>
-            <a:off x="685800" y="5349240"/>
-            <a:ext cx="5029200" cy="411480"/>
+            <a:off x="6583680" y="4434840"/>
+            <a:ext cx="5029200" cy="868680"/>
           </a:xfrm>
           <a:prstGeom prst="rect">
             <a:avLst/>
@@ -10638,13 +11443,13 @@
           <a:p>
             <a:pPr algn="l"/>
             <a:r>
-              <a:rPr sz="1700" b="1" i="0">
+              <a:rPr sz="4400" b="1" i="0">
                 <a:solidFill>
-                  <a:srgbClr val="FFFFFF"/>
+                  <a:srgbClr val="00B4D8"/>
                 </a:solidFill>
                 <a:latin typeface="Calibri"/>
               </a:rPr>
-              <a:t>Android tracker scaffolded</a:t>
+              <a:t>100% live</a:t>
             </a:r>
           </a:p>
         </p:txBody>
@@ -10657,8 +11462,8 @@
         </p:nvSpPr>
         <p:spPr>
           <a:xfrm>
-            <a:off x="685800" y="5733288"/>
-            <a:ext cx="10515600" cy="347472"/>
+            <a:off x="6583680" y="5303520"/>
+            <a:ext cx="5029200" cy="777240"/>
           </a:xfrm>
           <a:prstGeom prst="rect">
             <a:avLst/>
@@ -10673,13 +11478,14 @@
           <a:p>
             <a:pPr algn="l"/>
             <a:r>
-              <a:rPr sz="1500" b="0" i="0">
+              <a:rPr sz="1800" b="0" i="0">
                 <a:solidFill>
-                  <a:srgbClr val="B8D4E8"/>
+                  <a:srgbClr val="B0CEE6"/>
                 </a:solidFill>
                 <a:latin typeface="Calibri"/>
               </a:rPr>
-              <a:t>Background steps + GPS · pairs via hashed device token · PWA available today</a:t>
+              <a:t>deployed today at
+fitness-ai-agents.vercel.app</a:t>
             </a:r>
           </a:p>
         </p:txBody>
@@ -10698,7 +11504,7 @@
     <p:bg>
       <p:bgPr>
         <a:solidFill>
-          <a:srgbClr val="0D1B2A"/>
+          <a:srgbClr val="0A1422"/>
         </a:solidFill>
         <a:effectLst/>
       </p:bgPr>
@@ -10719,7 +11525,7 @@
         <p:spPr>
           <a:xfrm>
             <a:off x="0" y="0"/>
-            <a:ext cx="73152" cy="6858000"/>
+            <a:ext cx="64008" cy="6858000"/>
           </a:xfrm>
           <a:prstGeom prst="rect">
             <a:avLst/>
@@ -10761,14 +11567,14 @@
         </p:nvSpPr>
         <p:spPr>
           <a:xfrm>
-            <a:off x="5943600" y="0"/>
-            <a:ext cx="6245352" cy="6858000"/>
+            <a:off x="6217920" y="0"/>
+            <a:ext cx="5971032" cy="6858000"/>
           </a:xfrm>
           <a:prstGeom prst="rect">
             <a:avLst/>
           </a:prstGeom>
           <a:solidFill>
-            <a:srgbClr val="14263A"/>
+            <a:srgbClr val="122235"/>
           </a:solidFill>
           <a:ln>
             <a:noFill/>
@@ -10804,8 +11610,8 @@
         </p:nvSpPr>
         <p:spPr>
           <a:xfrm>
-            <a:off x="5943600" y="0"/>
-            <a:ext cx="54864" cy="6858000"/>
+            <a:off x="6217920" y="0"/>
+            <a:ext cx="50292" cy="6858000"/>
           </a:xfrm>
           <a:prstGeom prst="rect">
             <a:avLst/>
@@ -10847,8 +11653,8 @@
         </p:nvSpPr>
         <p:spPr>
           <a:xfrm>
-            <a:off x="457200" y="1280160"/>
-            <a:ext cx="5303520" cy="822960"/>
+            <a:off x="411480" y="1371600"/>
+            <a:ext cx="5486400" cy="1005840"/>
           </a:xfrm>
           <a:prstGeom prst="rect">
             <a:avLst/>
@@ -10882,8 +11688,8 @@
         </p:nvSpPr>
         <p:spPr>
           <a:xfrm>
-            <a:off x="457200" y="2240280"/>
-            <a:ext cx="1645920" cy="45720"/>
+            <a:off x="411480" y="2542032"/>
+            <a:ext cx="2286000" cy="50292"/>
           </a:xfrm>
           <a:prstGeom prst="rect">
             <a:avLst/>
@@ -10925,8 +11731,8 @@
         </p:nvSpPr>
         <p:spPr>
           <a:xfrm>
-            <a:off x="457200" y="2423160"/>
-            <a:ext cx="5303520" cy="1097280"/>
+            <a:off x="411480" y="2697480"/>
+            <a:ext cx="5486400" cy="1371600"/>
           </a:xfrm>
           <a:prstGeom prst="rect">
             <a:avLst/>
@@ -10948,7 +11754,8 @@
                 <a:latin typeface="Calibri"/>
               </a:rPr>
               <a:t>Any data. Any device.
-AI that trains you smarter.</a:t>
+AI that trains you smarter.
+Free. Live. Now.</a:t>
             </a:r>
           </a:p>
         </p:txBody>
@@ -10961,8 +11768,8 @@
         </p:nvSpPr>
         <p:spPr>
           <a:xfrm>
-            <a:off x="457200" y="5303520"/>
-            <a:ext cx="5303520" cy="640080"/>
+            <a:off x="411480" y="5394960"/>
+            <a:ext cx="3657600" cy="640080"/>
           </a:xfrm>
           <a:prstGeom prst="rect">
             <a:avLst/>
@@ -10996,8 +11803,8 @@
         </p:nvSpPr>
         <p:spPr>
           <a:xfrm>
-            <a:off x="6217920" y="1371600"/>
-            <a:ext cx="5669280" cy="502920"/>
+            <a:off x="6492240" y="1097280"/>
+            <a:ext cx="5303520" cy="411480"/>
           </a:xfrm>
           <a:prstGeom prst="rect">
             <a:avLst/>
@@ -11012,13 +11819,13 @@
           <a:p>
             <a:pPr algn="l"/>
             <a:r>
-              <a:rPr sz="1400" b="1" i="0">
+              <a:rPr sz="1300" b="1" i="0">
                 <a:solidFill>
                   <a:srgbClr val="00B4D8"/>
                 </a:solidFill>
                 <a:latin typeface="Calibri"/>
               </a:rPr>
-              <a:t>TRY IT NOW</a:t>
+              <a:t>TRY IT</a:t>
             </a:r>
           </a:p>
         </p:txBody>
@@ -11031,8 +11838,8 @@
         </p:nvSpPr>
         <p:spPr>
           <a:xfrm>
-            <a:off x="6217920" y="1920240"/>
-            <a:ext cx="5669280" cy="594360"/>
+            <a:off x="6492240" y="1481328"/>
+            <a:ext cx="5303520" cy="868680"/>
           </a:xfrm>
           <a:prstGeom prst="rect">
             <a:avLst/>
@@ -11047,7 +11854,7 @@
           <a:p>
             <a:pPr algn="l"/>
             <a:r>
-              <a:rPr sz="2200" b="1" i="0">
+              <a:rPr sz="2000" b="1" i="0">
                 <a:solidFill>
                   <a:srgbClr val="FFFFFF"/>
                 </a:solidFill>
@@ -11066,8 +11873,8 @@
         </p:nvSpPr>
         <p:spPr>
           <a:xfrm>
-            <a:off x="6217920" y="2926080"/>
-            <a:ext cx="5669280" cy="502920"/>
+            <a:off x="6492240" y="2788920"/>
+            <a:ext cx="5303520" cy="411480"/>
           </a:xfrm>
           <a:prstGeom prst="rect">
             <a:avLst/>
@@ -11082,7 +11889,7 @@
           <a:p>
             <a:pPr algn="l"/>
             <a:r>
-              <a:rPr sz="1400" b="1" i="0">
+              <a:rPr sz="1300" b="1" i="0">
                 <a:solidFill>
                   <a:srgbClr val="00B4D8"/>
                 </a:solidFill>
@@ -11101,8 +11908,8 @@
         </p:nvSpPr>
         <p:spPr>
           <a:xfrm>
-            <a:off x="6217920" y="3429000"/>
-            <a:ext cx="5669280" cy="822960"/>
+            <a:off x="6492240" y="3172968"/>
+            <a:ext cx="5303520" cy="868680"/>
           </a:xfrm>
           <a:prstGeom prst="rect">
             <a:avLst/>
@@ -11117,9 +11924,9 @@
           <a:p>
             <a:pPr algn="l"/>
             <a:r>
-              <a:rPr sz="1800" b="0" i="0">
+              <a:rPr sz="2000" b="1" i="0">
                 <a:solidFill>
-                  <a:srgbClr val="B8D4E8"/>
+                  <a:srgbClr val="FFFFFF"/>
                 </a:solidFill>
                 <a:latin typeface="Calibri"/>
               </a:rPr>
@@ -11137,8 +11944,8 @@
         </p:nvSpPr>
         <p:spPr>
           <a:xfrm>
-            <a:off x="6217920" y="4572000"/>
-            <a:ext cx="5669280" cy="411480"/>
+            <a:off x="6492240" y="4480560"/>
+            <a:ext cx="5303520" cy="411480"/>
           </a:xfrm>
           <a:prstGeom prst="rect">
             <a:avLst/>
@@ -11153,13 +11960,13 @@
           <a:p>
             <a:pPr algn="l"/>
             <a:r>
-              <a:rPr sz="1400" b="1" i="0">
+              <a:rPr sz="1300" b="1" i="0">
                 <a:solidFill>
                   <a:srgbClr val="00B4D8"/>
                 </a:solidFill>
                 <a:latin typeface="Calibri"/>
               </a:rPr>
-              <a:t>API (always-on)</a:t>
+              <a:t>API</a:t>
             </a:r>
           </a:p>
         </p:txBody>
@@ -11172,8 +11979,8 @@
         </p:nvSpPr>
         <p:spPr>
           <a:xfrm>
-            <a:off x="6217920" y="4983480"/>
-            <a:ext cx="5669280" cy="502920"/>
+            <a:off x="6492240" y="4864608"/>
+            <a:ext cx="5303520" cy="868680"/>
           </a:xfrm>
           <a:prstGeom prst="rect">
             <a:avLst/>
@@ -11188,13 +11995,14 @@
           <a:p>
             <a:pPr algn="l"/>
             <a:r>
-              <a:rPr sz="1600" b="0" i="0">
+              <a:rPr sz="2000" b="1" i="0">
                 <a:solidFill>
-                  <a:srgbClr val="B8D4E8"/>
+                  <a:srgbClr val="FFFFFF"/>
                 </a:solidFill>
                 <a:latin typeface="Calibri"/>
               </a:rPr>
-              <a:t>backend-seven-topaz-23.vercel.app</a:t>
+              <a:t>backend-seven-topaz-23
+.vercel.app/health</a:t>
             </a:r>
           </a:p>
         </p:txBody>

--- a/fitness_ai_agents_presentation.pptx
+++ b/fitness_ai_agents_presentation.pptx
@@ -6016,6 +6016,18 @@
 Apple Health · Garmin
 .fit / .tcx / .gpx files
 Manual log + GPS tracker</a:t>
+            </a:r>
+          </a:p>
+          <a:p>
+            <a:pPr algn="l"/>
+            <a:r>
+              <a:rPr sz="1600" b="0" i="0">
+                <a:solidFill>
+                  <a:srgbClr val="B0CEE6"/>
+                </a:solidFill>
+                <a:latin typeface="Calibri"/>
+              </a:rPr>
+              <a:t>Native Android app + iOS sideload</a:t>
             </a:r>
           </a:p>
         </p:txBody>

--- a/fitness_ai_agents_presentation.pptx
+++ b/fitness_ai_agents_presentation.pptx
@@ -754,6 +754,11 @@
               <a:t>That's the full loop — from raw sensor data to a decision you can act on today." </a:t>
             </a:r>
           </a:p>
+          <a:p>
+            <a:r>
+              <a:t>[ADD — phone as a tracker] "And if you do not have a watch at all, that is fine too. There are native Android and iOS apps you can install straight from the site that turn your phone itself into the tracker. No app store needed."</a:t>
+            </a:r>
+          </a:p>
         </p:txBody>
       </p:sp>
       <p:sp>
@@ -1172,6 +1177,11 @@
               <a:t>And this is not a prototype — it's live, right now. You can go to fitness-ai-agents.vercel.app, click 'Load Sample Data', and see the full dashboard with charts, heatmaps, AI analysis results, and a readiness score populated in about 90 seconds." </a:t>
             </a:r>
           </a:p>
+          <a:p>
+            <a:r>
+              <a:t>[ADD] "And the reach is not just the web app. The native Android and iOS apps build automatically in the cloud and publish straight to the site, so anyone can download and install them for free."</a:t>
+            </a:r>
+          </a:p>
         </p:txBody>
       </p:sp>
       <p:sp>
@@ -1270,6 +1280,11 @@
           <a:p>
             <a:r>
               <a:t>Then stop. Let them ask.</a:t>
+            </a:r>
+          </a:p>
+          <a:p>
+            <a:r>
+              <a:t>[ADD before final line] "It runs in any browser, installs as an app on any phone or desktop, and has downloadable native Android and iOS builds."</a:t>
             </a:r>
           </a:p>
         </p:txBody>
